--- a/units/unit00_course_intro/course_intro.pptx
+++ b/units/unit00_course_intro/course_intro.pptx
@@ -5,7 +5,7 @@
     <p:sldMasterId id="2147483648" r:id="rId1"/>
   </p:sldMasterIdLst>
   <p:notesMasterIdLst>
-    <p:notesMasterId r:id="rId31"/>
+    <p:notesMasterId r:id="rId32"/>
   </p:notesMasterIdLst>
   <p:sldIdLst>
     <p:sldId id="258" r:id="rId2"/>
@@ -14,29 +14,30 @@
     <p:sldId id="326" r:id="rId5"/>
     <p:sldId id="327" r:id="rId6"/>
     <p:sldId id="328" r:id="rId7"/>
-    <p:sldId id="330" r:id="rId8"/>
-    <p:sldId id="331" r:id="rId9"/>
-    <p:sldId id="332" r:id="rId10"/>
-    <p:sldId id="337" r:id="rId11"/>
-    <p:sldId id="333" r:id="rId12"/>
-    <p:sldId id="334" r:id="rId13"/>
-    <p:sldId id="346" r:id="rId14"/>
-    <p:sldId id="335" r:id="rId15"/>
-    <p:sldId id="336" r:id="rId16"/>
-    <p:sldId id="329" r:id="rId17"/>
-    <p:sldId id="272" r:id="rId18"/>
-    <p:sldId id="273" r:id="rId19"/>
-    <p:sldId id="341" r:id="rId20"/>
-    <p:sldId id="340" r:id="rId21"/>
-    <p:sldId id="342" r:id="rId22"/>
-    <p:sldId id="344" r:id="rId23"/>
-    <p:sldId id="343" r:id="rId24"/>
-    <p:sldId id="347" r:id="rId25"/>
-    <p:sldId id="345" r:id="rId26"/>
-    <p:sldId id="338" r:id="rId27"/>
-    <p:sldId id="348" r:id="rId28"/>
-    <p:sldId id="339" r:id="rId29"/>
-    <p:sldId id="274" r:id="rId30"/>
+    <p:sldId id="349" r:id="rId8"/>
+    <p:sldId id="330" r:id="rId9"/>
+    <p:sldId id="331" r:id="rId10"/>
+    <p:sldId id="332" r:id="rId11"/>
+    <p:sldId id="346" r:id="rId12"/>
+    <p:sldId id="337" r:id="rId13"/>
+    <p:sldId id="333" r:id="rId14"/>
+    <p:sldId id="334" r:id="rId15"/>
+    <p:sldId id="335" r:id="rId16"/>
+    <p:sldId id="336" r:id="rId17"/>
+    <p:sldId id="329" r:id="rId18"/>
+    <p:sldId id="272" r:id="rId19"/>
+    <p:sldId id="273" r:id="rId20"/>
+    <p:sldId id="341" r:id="rId21"/>
+    <p:sldId id="340" r:id="rId22"/>
+    <p:sldId id="342" r:id="rId23"/>
+    <p:sldId id="344" r:id="rId24"/>
+    <p:sldId id="343" r:id="rId25"/>
+    <p:sldId id="347" r:id="rId26"/>
+    <p:sldId id="345" r:id="rId27"/>
+    <p:sldId id="338" r:id="rId28"/>
+    <p:sldId id="348" r:id="rId29"/>
+    <p:sldId id="339" r:id="rId30"/>
+    <p:sldId id="274" r:id="rId31"/>
   </p:sldIdLst>
   <p:sldSz cx="12192000" cy="6858000"/>
   <p:notesSz cx="7315200" cy="9601200"/>
@@ -236,7 +237,7 @@
           <a:p>
             <a:fld id="{B7D6DDD3-D7E9-488B-B626-1E8285E424D8}" type="datetimeFigureOut">
               <a:rPr lang="en-US" smtClean="0"/>
-              <a:t>1/19/2026</a:t>
+              <a:t>8/5/2026</a:t>
             </a:fld>
             <a:endParaRPr lang="en-US"/>
           </a:p>
@@ -4066,7 +4067,7 @@
           <a:p>
             <a:r>
               <a:rPr lang="en-US" dirty="0"/>
-              <a:t>Ece-GY 9463:  Introduction to Hardware Design</a:t>
+              <a:t>Ece-GY 6463:  advanced Hardware Design</a:t>
             </a:r>
           </a:p>
           <a:p>
@@ -4136,7 +4137,7 @@
           <p:cNvPr id="2" name="Title 1">
             <a:extLst>
               <a:ext uri="{FF2B5EF4-FFF2-40B4-BE49-F238E27FC236}">
-                <a16:creationId xmlns:a16="http://schemas.microsoft.com/office/drawing/2014/main" id="{B315364D-9978-6A04-C9F5-A9C557EA8018}"/>
+                <a16:creationId xmlns:a16="http://schemas.microsoft.com/office/drawing/2014/main" id="{87763C20-3B82-441C-12B0-76CFECCBD52B}"/>
               </a:ext>
             </a:extLst>
           </p:cNvPr>
@@ -4154,7 +4155,7 @@
           <a:p>
             <a:r>
               <a:rPr lang="en-US" dirty="0"/>
-              <a:t>Using AI</a:t>
+              <a:t>Tentative Grading</a:t>
             </a:r>
           </a:p>
         </p:txBody>
@@ -4164,7 +4165,7 @@
           <p:cNvPr id="3" name="Content Placeholder 2">
             <a:extLst>
               <a:ext uri="{FF2B5EF4-FFF2-40B4-BE49-F238E27FC236}">
-                <a16:creationId xmlns:a16="http://schemas.microsoft.com/office/drawing/2014/main" id="{6D51529F-348E-A27A-8167-2D4D321BAB0B}"/>
+                <a16:creationId xmlns:a16="http://schemas.microsoft.com/office/drawing/2014/main" id="{569F4927-B5C7-8DB2-27BA-85662F410D9D}"/>
               </a:ext>
             </a:extLst>
           </p:cNvPr>
@@ -4175,101 +4176,92 @@
             <p:ph idx="1"/>
           </p:nvPr>
         </p:nvSpPr>
-        <p:spPr>
-          <a:xfrm>
-            <a:off x="1097280" y="1539277"/>
-            <a:ext cx="5800212" cy="4329817"/>
-          </a:xfrm>
-        </p:spPr>
-        <p:txBody>
-          <a:bodyPr>
-            <a:normAutofit/>
-          </a:bodyPr>
-          <a:lstStyle/>
-          <a:p>
-            <a:r>
-              <a:rPr lang="en-US" sz="2400" dirty="0">
-                <a:solidFill>
-                  <a:schemeClr val="accent1"/>
-                </a:solidFill>
-              </a:rPr>
-              <a:t>It is encouraged! </a:t>
+        <p:spPr/>
+        <p:txBody>
+          <a:bodyPr/>
+          <a:lstStyle/>
+          <a:p>
+            <a:r>
+              <a:rPr lang="en-US" dirty="0"/>
+              <a:t>Points</a:t>
             </a:r>
           </a:p>
           <a:p>
             <a:pPr lvl="1"/>
             <a:r>
-              <a:rPr lang="en-US" sz="2200" dirty="0"/>
-              <a:t>Use it for labs, problems, projects</a:t>
-            </a:r>
-          </a:p>
-          <a:p>
-            <a:r>
-              <a:rPr lang="en-US" sz="2400" dirty="0"/>
-              <a:t>But learn to use it well:</a:t>
+              <a:rPr lang="en-US" dirty="0"/>
+              <a:t>Homework + Labs: 25%</a:t>
             </a:r>
           </a:p>
           <a:p>
             <a:pPr lvl="1"/>
             <a:r>
-              <a:rPr lang="en-US" sz="2200" dirty="0"/>
-              <a:t>It still makes mistakes.</a:t>
+              <a:rPr lang="en-US" dirty="0"/>
+              <a:t>Midterm:  25%</a:t>
             </a:r>
           </a:p>
           <a:p>
             <a:pPr lvl="1"/>
             <a:r>
-              <a:rPr lang="en-US" sz="2200" dirty="0"/>
-              <a:t>Learn to test the results</a:t>
+              <a:rPr lang="en-US" dirty="0"/>
+              <a:t>Final:  25%</a:t>
             </a:r>
           </a:p>
           <a:p>
             <a:pPr lvl="1"/>
             <a:r>
-              <a:rPr lang="en-US" sz="2200" dirty="0"/>
-              <a:t>Write clear, specific prompts</a:t>
-            </a:r>
+              <a:rPr lang="en-US" dirty="0"/>
+              <a:t>Project:  25% </a:t>
+            </a:r>
+          </a:p>
+          <a:p>
+            <a:r>
+              <a:rPr lang="en-US" dirty="0"/>
+              <a:t>Labs will be mostly </a:t>
+            </a:r>
+            <a:r>
+              <a:rPr lang="en-US" dirty="0" err="1"/>
+              <a:t>SystemVerilog</a:t>
+            </a:r>
+            <a:r>
+              <a:rPr lang="en-US" dirty="0"/>
+              <a:t> and </a:t>
+            </a:r>
+            <a:r>
+              <a:rPr lang="en-US" dirty="0" err="1"/>
+              <a:t>VitisHLS</a:t>
+            </a:r>
+            <a:endParaRPr lang="en-US" dirty="0"/>
           </a:p>
           <a:p>
             <a:pPr lvl="1"/>
             <a:r>
-              <a:rPr lang="en-US" sz="2200" dirty="0"/>
-              <a:t>Use it as a tutor</a:t>
+              <a:rPr lang="en-US" dirty="0"/>
+              <a:t>Approximately 4 Vitis HLS assignments</a:t>
             </a:r>
           </a:p>
           <a:p>
             <a:pPr lvl="1"/>
             <a:r>
-              <a:rPr lang="en-US" sz="2200" dirty="0"/>
-              <a:t>Have it generate questions</a:t>
+              <a:rPr lang="en-US" dirty="0"/>
+              <a:t>Approximately 5 written assignments</a:t>
+            </a:r>
+          </a:p>
+          <a:p>
+            <a:r>
+              <a:rPr lang="en-US" dirty="0"/>
+              <a:t>Midterm and Final are in class</a:t>
             </a:r>
           </a:p>
           <a:p>
             <a:pPr lvl="1"/>
             <a:r>
-              <a:rPr lang="en-US" sz="2200" dirty="0"/>
-              <a:t>Explain results</a:t>
-            </a:r>
-          </a:p>
-          <a:p>
-            <a:r>
-              <a:rPr lang="en-US" sz="2400" dirty="0"/>
-              <a:t>On the midterm &amp; final there are </a:t>
-            </a:r>
-            <a:r>
-              <a:rPr lang="en-US" sz="2400" dirty="0">
-                <a:solidFill>
-                  <a:schemeClr val="accent1">
-                    <a:lumMod val="75000"/>
-                  </a:schemeClr>
-                </a:solidFill>
-              </a:rPr>
-              <a:t>no aids</a:t>
-            </a:r>
-            <a:r>
-              <a:rPr lang="en-US" sz="2400" dirty="0"/>
-              <a:t>!</a:t>
-            </a:r>
+              <a:rPr lang="en-US" dirty="0"/>
+              <a:t>Closed book, no electronic aids</a:t>
+            </a:r>
+          </a:p>
+          <a:p>
+            <a:endParaRPr lang="en-US" dirty="0"/>
           </a:p>
         </p:txBody>
       </p:sp>
@@ -4278,7 +4270,7 @@
           <p:cNvPr id="4" name="Slide Number Placeholder 3">
             <a:extLst>
               <a:ext uri="{FF2B5EF4-FFF2-40B4-BE49-F238E27FC236}">
-                <a16:creationId xmlns:a16="http://schemas.microsoft.com/office/drawing/2014/main" id="{69DEE8DA-A9AA-7730-E9CB-A591A192E087}"/>
+                <a16:creationId xmlns:a16="http://schemas.microsoft.com/office/drawing/2014/main" id="{D22CD1AC-1CF5-DED5-ADE8-F1E655F73621}"/>
               </a:ext>
             </a:extLst>
           </p:cNvPr>
@@ -4302,117 +4294,10 @@
           </a:p>
         </p:txBody>
       </p:sp>
-      <p:pic>
-        <p:nvPicPr>
-          <p:cNvPr id="6" name="Picture 5">
-            <a:extLst>
-              <a:ext uri="{FF2B5EF4-FFF2-40B4-BE49-F238E27FC236}">
-                <a16:creationId xmlns:a16="http://schemas.microsoft.com/office/drawing/2014/main" id="{6603A549-734E-A848-927E-67B41A9963B4}"/>
-              </a:ext>
-            </a:extLst>
-          </p:cNvPr>
-          <p:cNvPicPr>
-            <a:picLocks noChangeAspect="1"/>
-          </p:cNvPicPr>
-          <p:nvPr/>
-        </p:nvPicPr>
-        <p:blipFill>
-          <a:blip r:embed="rId2"/>
-          <a:stretch>
-            <a:fillRect/>
-          </a:stretch>
-        </p:blipFill>
-        <p:spPr>
-          <a:xfrm>
-            <a:off x="6915588" y="470266"/>
-            <a:ext cx="4525563" cy="636529"/>
-          </a:xfrm>
-          <a:prstGeom prst="rect">
-            <a:avLst/>
-          </a:prstGeom>
-        </p:spPr>
-      </p:pic>
-      <p:pic>
-        <p:nvPicPr>
-          <p:cNvPr id="8" name="Picture 7">
-            <a:extLst>
-              <a:ext uri="{FF2B5EF4-FFF2-40B4-BE49-F238E27FC236}">
-                <a16:creationId xmlns:a16="http://schemas.microsoft.com/office/drawing/2014/main" id="{0B1FB749-33A9-D03F-9B82-6BBE0F404778}"/>
-              </a:ext>
-            </a:extLst>
-          </p:cNvPr>
-          <p:cNvPicPr>
-            <a:picLocks noChangeAspect="1"/>
-          </p:cNvPicPr>
-          <p:nvPr/>
-        </p:nvPicPr>
-        <p:blipFill>
-          <a:blip r:embed="rId3"/>
-          <a:stretch>
-            <a:fillRect/>
-          </a:stretch>
-        </p:blipFill>
-        <p:spPr>
-          <a:xfrm>
-            <a:off x="6897492" y="1326814"/>
-            <a:ext cx="4543659" cy="4496031"/>
-          </a:xfrm>
-          <a:prstGeom prst="rect">
-            <a:avLst/>
-          </a:prstGeom>
-        </p:spPr>
-      </p:pic>
-      <p:pic>
-        <p:nvPicPr>
-          <p:cNvPr id="3074" name="Picture 2" descr="Microsoft Copilot Icon | Dashboard Icons">
-            <a:extLst>
-              <a:ext uri="{FF2B5EF4-FFF2-40B4-BE49-F238E27FC236}">
-                <a16:creationId xmlns:a16="http://schemas.microsoft.com/office/drawing/2014/main" id="{D5159984-BBBE-2871-4051-9B819EB70C1D}"/>
-              </a:ext>
-            </a:extLst>
-          </p:cNvPr>
-          <p:cNvPicPr>
-            <a:picLocks noChangeAspect="1" noChangeArrowheads="1"/>
-          </p:cNvPicPr>
-          <p:nvPr/>
-        </p:nvPicPr>
-        <p:blipFill>
-          <a:blip r:embed="rId4">
-            <a:extLst>
-              <a:ext uri="{28A0092B-C50C-407E-A947-70E740481C1C}">
-                <a14:useLocalDpi xmlns:a14="http://schemas.microsoft.com/office/drawing/2010/main" val="0"/>
-              </a:ext>
-            </a:extLst>
-          </a:blip>
-          <a:srcRect/>
-          <a:stretch>
-            <a:fillRect/>
-          </a:stretch>
-        </p:blipFill>
-        <p:spPr bwMode="auto">
-          <a:xfrm>
-            <a:off x="10476338" y="3372290"/>
-            <a:ext cx="1543050" cy="1409700"/>
-          </a:xfrm>
-          <a:prstGeom prst="rect">
-            <a:avLst/>
-          </a:prstGeom>
-          <a:noFill/>
-          <a:extLst>
-            <a:ext uri="{909E8E84-426E-40DD-AFC4-6F175D3DCCD1}">
-              <a14:hiddenFill xmlns:a14="http://schemas.microsoft.com/office/drawing/2010/main">
-                <a:solidFill>
-                  <a:srgbClr val="FFFFFF"/>
-                </a:solidFill>
-              </a14:hiddenFill>
-            </a:ext>
-          </a:extLst>
-        </p:spPr>
-      </p:pic>
     </p:spTree>
     <p:extLst>
       <p:ext uri="{BB962C8B-B14F-4D97-AF65-F5344CB8AC3E}">
-        <p14:creationId xmlns:p14="http://schemas.microsoft.com/office/powerpoint/2010/main" val="2250657855"/>
+        <p14:creationId xmlns:p14="http://schemas.microsoft.com/office/powerpoint/2010/main" val="2744818841"/>
       </p:ext>
     </p:extLst>
   </p:cSld>
@@ -4444,6 +4329,543 @@
           <p:cNvPr id="2" name="Title 1">
             <a:extLst>
               <a:ext uri="{FF2B5EF4-FFF2-40B4-BE49-F238E27FC236}">
+                <a16:creationId xmlns:a16="http://schemas.microsoft.com/office/drawing/2014/main" id="{B1FFA4C1-71AC-123B-B99F-699DEB5D92CF}"/>
+              </a:ext>
+            </a:extLst>
+          </p:cNvPr>
+          <p:cNvSpPr>
+            <a:spLocks noGrp="1"/>
+          </p:cNvSpPr>
+          <p:nvPr>
+            <p:ph type="title"/>
+          </p:nvPr>
+        </p:nvSpPr>
+        <p:spPr/>
+        <p:txBody>
+          <a:bodyPr/>
+          <a:lstStyle/>
+          <a:p>
+            <a:r>
+              <a:rPr lang="en-US" dirty="0"/>
+              <a:t>AI </a:t>
+            </a:r>
+            <a:r>
+              <a:rPr lang="en-US" dirty="0" err="1"/>
+              <a:t>Autograder</a:t>
+            </a:r>
+            <a:endParaRPr lang="en-US" dirty="0"/>
+          </a:p>
+        </p:txBody>
+      </p:sp>
+      <p:sp>
+        <p:nvSpPr>
+          <p:cNvPr id="3" name="Content Placeholder 2">
+            <a:extLst>
+              <a:ext uri="{FF2B5EF4-FFF2-40B4-BE49-F238E27FC236}">
+                <a16:creationId xmlns:a16="http://schemas.microsoft.com/office/drawing/2014/main" id="{4130ADDC-09C9-7DE9-3FE9-C059D43BFD30}"/>
+              </a:ext>
+            </a:extLst>
+          </p:cNvPr>
+          <p:cNvSpPr>
+            <a:spLocks noGrp="1"/>
+          </p:cNvSpPr>
+          <p:nvPr>
+            <p:ph idx="1"/>
+          </p:nvPr>
+        </p:nvSpPr>
+        <p:spPr>
+          <a:xfrm>
+            <a:off x="1097280" y="1539277"/>
+            <a:ext cx="5070862" cy="4329817"/>
+          </a:xfrm>
+        </p:spPr>
+        <p:txBody>
+          <a:bodyPr/>
+          <a:lstStyle/>
+          <a:p>
+            <a:r>
+              <a:rPr lang="en-US" dirty="0"/>
+              <a:t>An </a:t>
+            </a:r>
+            <a:r>
+              <a:rPr lang="en-US" dirty="0">
+                <a:hlinkClick r:id="rId2"/>
+              </a:rPr>
+              <a:t>LLM-automated grader</a:t>
+            </a:r>
+            <a:endParaRPr lang="en-US" dirty="0"/>
+          </a:p>
+          <a:p>
+            <a:r>
+              <a:rPr lang="en-US" dirty="0"/>
+              <a:t>Will use for:</a:t>
+            </a:r>
+          </a:p>
+          <a:p>
+            <a:pPr lvl="1"/>
+            <a:r>
+              <a:rPr lang="en-US" dirty="0"/>
+              <a:t>In class exercises</a:t>
+            </a:r>
+          </a:p>
+          <a:p>
+            <a:pPr lvl="1"/>
+            <a:r>
+              <a:rPr lang="en-US" dirty="0"/>
+              <a:t>For </a:t>
+            </a:r>
+            <a:r>
+              <a:rPr lang="en-US" dirty="0" err="1"/>
+              <a:t>Gradescrope</a:t>
+            </a:r>
+            <a:r>
+              <a:rPr lang="en-US" dirty="0"/>
+              <a:t> submissions</a:t>
+            </a:r>
+          </a:p>
+          <a:p>
+            <a:r>
+              <a:rPr lang="en-US" dirty="0"/>
+              <a:t>Provides</a:t>
+            </a:r>
+          </a:p>
+          <a:p>
+            <a:pPr lvl="1"/>
+            <a:r>
+              <a:rPr lang="en-US" dirty="0"/>
+              <a:t>Instant, detailed feedback</a:t>
+            </a:r>
+          </a:p>
+          <a:p>
+            <a:r>
+              <a:rPr lang="en-US" dirty="0"/>
+              <a:t>But</a:t>
+            </a:r>
+          </a:p>
+          <a:p>
+            <a:pPr lvl="1"/>
+            <a:r>
+              <a:rPr lang="en-US" dirty="0"/>
+              <a:t>May make mistakes</a:t>
+            </a:r>
+          </a:p>
+          <a:p>
+            <a:r>
+              <a:rPr lang="en-US" dirty="0"/>
+              <a:t>Still experimental</a:t>
+            </a:r>
+          </a:p>
+          <a:p>
+            <a:pPr lvl="1"/>
+            <a:r>
+              <a:rPr lang="en-US" dirty="0"/>
+              <a:t>Need your feedback</a:t>
+            </a:r>
+          </a:p>
+        </p:txBody>
+      </p:sp>
+      <p:sp>
+        <p:nvSpPr>
+          <p:cNvPr id="4" name="Slide Number Placeholder 3">
+            <a:extLst>
+              <a:ext uri="{FF2B5EF4-FFF2-40B4-BE49-F238E27FC236}">
+                <a16:creationId xmlns:a16="http://schemas.microsoft.com/office/drawing/2014/main" id="{199BE6A3-ED12-515F-1028-F85F299E3CE2}"/>
+              </a:ext>
+            </a:extLst>
+          </p:cNvPr>
+          <p:cNvSpPr>
+            <a:spLocks noGrp="1"/>
+          </p:cNvSpPr>
+          <p:nvPr>
+            <p:ph type="sldNum" sz="quarter" idx="12"/>
+          </p:nvPr>
+        </p:nvSpPr>
+        <p:spPr/>
+        <p:txBody>
+          <a:bodyPr/>
+          <a:lstStyle/>
+          <a:p>
+            <a:fld id="{629637A9-119A-49DA-BD12-AAC58B377D80}" type="slidenum">
+              <a:rPr lang="en-US" smtClean="0"/>
+              <a:t>11</a:t>
+            </a:fld>
+            <a:endParaRPr lang="en-US" dirty="0"/>
+          </a:p>
+        </p:txBody>
+      </p:sp>
+      <p:pic>
+        <p:nvPicPr>
+          <p:cNvPr id="6" name="Picture 5">
+            <a:extLst>
+              <a:ext uri="{FF2B5EF4-FFF2-40B4-BE49-F238E27FC236}">
+                <a16:creationId xmlns:a16="http://schemas.microsoft.com/office/drawing/2014/main" id="{CEFF5452-282B-87C1-47EA-E46A6826996D}"/>
+              </a:ext>
+            </a:extLst>
+          </p:cNvPr>
+          <p:cNvPicPr>
+            <a:picLocks noChangeAspect="1"/>
+          </p:cNvPicPr>
+          <p:nvPr/>
+        </p:nvPicPr>
+        <p:blipFill>
+          <a:blip r:embed="rId3"/>
+          <a:stretch>
+            <a:fillRect/>
+          </a:stretch>
+        </p:blipFill>
+        <p:spPr>
+          <a:xfrm>
+            <a:off x="4895152" y="536859"/>
+            <a:ext cx="7157215" cy="4877746"/>
+          </a:xfrm>
+          <a:prstGeom prst="rect">
+            <a:avLst/>
+          </a:prstGeom>
+        </p:spPr>
+      </p:pic>
+    </p:spTree>
+    <p:extLst>
+      <p:ext uri="{BB962C8B-B14F-4D97-AF65-F5344CB8AC3E}">
+        <p14:creationId xmlns:p14="http://schemas.microsoft.com/office/powerpoint/2010/main" val="2386204723"/>
+      </p:ext>
+    </p:extLst>
+  </p:cSld>
+  <p:clrMapOvr>
+    <a:masterClrMapping/>
+  </p:clrMapOvr>
+</p:sld>
+</file>
+
+<file path=ppt/slides/slide12.xml><?xml version="1.0" encoding="utf-8"?>
+<p:sld xmlns:a="http://schemas.openxmlformats.org/drawingml/2006/main" xmlns:r="http://schemas.openxmlformats.org/officeDocument/2006/relationships" xmlns:p="http://schemas.openxmlformats.org/presentationml/2006/main">
+  <p:cSld>
+    <p:spTree>
+      <p:nvGrpSpPr>
+        <p:cNvPr id="1" name=""/>
+        <p:cNvGrpSpPr/>
+        <p:nvPr/>
+      </p:nvGrpSpPr>
+      <p:grpSpPr>
+        <a:xfrm>
+          <a:off x="0" y="0"/>
+          <a:ext cx="0" cy="0"/>
+          <a:chOff x="0" y="0"/>
+          <a:chExt cx="0" cy="0"/>
+        </a:xfrm>
+      </p:grpSpPr>
+      <p:sp>
+        <p:nvSpPr>
+          <p:cNvPr id="2" name="Title 1">
+            <a:extLst>
+              <a:ext uri="{FF2B5EF4-FFF2-40B4-BE49-F238E27FC236}">
+                <a16:creationId xmlns:a16="http://schemas.microsoft.com/office/drawing/2014/main" id="{B315364D-9978-6A04-C9F5-A9C557EA8018}"/>
+              </a:ext>
+            </a:extLst>
+          </p:cNvPr>
+          <p:cNvSpPr>
+            <a:spLocks noGrp="1"/>
+          </p:cNvSpPr>
+          <p:nvPr>
+            <p:ph type="title"/>
+          </p:nvPr>
+        </p:nvSpPr>
+        <p:spPr/>
+        <p:txBody>
+          <a:bodyPr/>
+          <a:lstStyle/>
+          <a:p>
+            <a:r>
+              <a:rPr lang="en-US" dirty="0"/>
+              <a:t>Using AI</a:t>
+            </a:r>
+          </a:p>
+        </p:txBody>
+      </p:sp>
+      <p:sp>
+        <p:nvSpPr>
+          <p:cNvPr id="3" name="Content Placeholder 2">
+            <a:extLst>
+              <a:ext uri="{FF2B5EF4-FFF2-40B4-BE49-F238E27FC236}">
+                <a16:creationId xmlns:a16="http://schemas.microsoft.com/office/drawing/2014/main" id="{6D51529F-348E-A27A-8167-2D4D321BAB0B}"/>
+              </a:ext>
+            </a:extLst>
+          </p:cNvPr>
+          <p:cNvSpPr>
+            <a:spLocks noGrp="1"/>
+          </p:cNvSpPr>
+          <p:nvPr>
+            <p:ph idx="1"/>
+          </p:nvPr>
+        </p:nvSpPr>
+        <p:spPr>
+          <a:xfrm>
+            <a:off x="1097280" y="1539277"/>
+            <a:ext cx="5800212" cy="4329817"/>
+          </a:xfrm>
+        </p:spPr>
+        <p:txBody>
+          <a:bodyPr>
+            <a:normAutofit/>
+          </a:bodyPr>
+          <a:lstStyle/>
+          <a:p>
+            <a:r>
+              <a:rPr lang="en-US" sz="2400" dirty="0">
+                <a:solidFill>
+                  <a:schemeClr val="accent1"/>
+                </a:solidFill>
+              </a:rPr>
+              <a:t>It is encouraged! </a:t>
+            </a:r>
+          </a:p>
+          <a:p>
+            <a:pPr lvl="1"/>
+            <a:r>
+              <a:rPr lang="en-US" sz="2200" dirty="0"/>
+              <a:t>Use it for labs, problems, projects</a:t>
+            </a:r>
+          </a:p>
+          <a:p>
+            <a:r>
+              <a:rPr lang="en-US" sz="2400" dirty="0"/>
+              <a:t>But learn to use it well:</a:t>
+            </a:r>
+          </a:p>
+          <a:p>
+            <a:pPr lvl="1"/>
+            <a:r>
+              <a:rPr lang="en-US" sz="2200" dirty="0"/>
+              <a:t>It still makes mistakes.</a:t>
+            </a:r>
+          </a:p>
+          <a:p>
+            <a:pPr lvl="1"/>
+            <a:r>
+              <a:rPr lang="en-US" sz="2200" dirty="0"/>
+              <a:t>Learn to test the results</a:t>
+            </a:r>
+          </a:p>
+          <a:p>
+            <a:pPr lvl="1"/>
+            <a:r>
+              <a:rPr lang="en-US" sz="2200" dirty="0"/>
+              <a:t>Write clear, specific prompts</a:t>
+            </a:r>
+          </a:p>
+          <a:p>
+            <a:pPr lvl="1"/>
+            <a:r>
+              <a:rPr lang="en-US" sz="2200" dirty="0"/>
+              <a:t>Use it as a tutor</a:t>
+            </a:r>
+          </a:p>
+          <a:p>
+            <a:pPr lvl="1"/>
+            <a:r>
+              <a:rPr lang="en-US" sz="2200" dirty="0"/>
+              <a:t>Have it generate questions</a:t>
+            </a:r>
+          </a:p>
+          <a:p>
+            <a:pPr lvl="1"/>
+            <a:r>
+              <a:rPr lang="en-US" sz="2200" dirty="0"/>
+              <a:t>Explain results</a:t>
+            </a:r>
+          </a:p>
+          <a:p>
+            <a:r>
+              <a:rPr lang="en-US" sz="2400" dirty="0"/>
+              <a:t>On the midterm &amp; final there are </a:t>
+            </a:r>
+            <a:r>
+              <a:rPr lang="en-US" sz="2400" dirty="0">
+                <a:solidFill>
+                  <a:schemeClr val="accent1">
+                    <a:lumMod val="75000"/>
+                  </a:schemeClr>
+                </a:solidFill>
+              </a:rPr>
+              <a:t>no aids</a:t>
+            </a:r>
+            <a:r>
+              <a:rPr lang="en-US" sz="2400" dirty="0"/>
+              <a:t>!</a:t>
+            </a:r>
+          </a:p>
+        </p:txBody>
+      </p:sp>
+      <p:sp>
+        <p:nvSpPr>
+          <p:cNvPr id="4" name="Slide Number Placeholder 3">
+            <a:extLst>
+              <a:ext uri="{FF2B5EF4-FFF2-40B4-BE49-F238E27FC236}">
+                <a16:creationId xmlns:a16="http://schemas.microsoft.com/office/drawing/2014/main" id="{69DEE8DA-A9AA-7730-E9CB-A591A192E087}"/>
+              </a:ext>
+            </a:extLst>
+          </p:cNvPr>
+          <p:cNvSpPr>
+            <a:spLocks noGrp="1"/>
+          </p:cNvSpPr>
+          <p:nvPr>
+            <p:ph type="sldNum" sz="quarter" idx="12"/>
+          </p:nvPr>
+        </p:nvSpPr>
+        <p:spPr/>
+        <p:txBody>
+          <a:bodyPr/>
+          <a:lstStyle/>
+          <a:p>
+            <a:fld id="{629637A9-119A-49DA-BD12-AAC58B377D80}" type="slidenum">
+              <a:rPr lang="en-US" smtClean="0"/>
+              <a:t>12</a:t>
+            </a:fld>
+            <a:endParaRPr lang="en-US" dirty="0"/>
+          </a:p>
+        </p:txBody>
+      </p:sp>
+      <p:pic>
+        <p:nvPicPr>
+          <p:cNvPr id="6" name="Picture 5">
+            <a:extLst>
+              <a:ext uri="{FF2B5EF4-FFF2-40B4-BE49-F238E27FC236}">
+                <a16:creationId xmlns:a16="http://schemas.microsoft.com/office/drawing/2014/main" id="{6603A549-734E-A848-927E-67B41A9963B4}"/>
+              </a:ext>
+            </a:extLst>
+          </p:cNvPr>
+          <p:cNvPicPr>
+            <a:picLocks noChangeAspect="1"/>
+          </p:cNvPicPr>
+          <p:nvPr/>
+        </p:nvPicPr>
+        <p:blipFill>
+          <a:blip r:embed="rId2"/>
+          <a:stretch>
+            <a:fillRect/>
+          </a:stretch>
+        </p:blipFill>
+        <p:spPr>
+          <a:xfrm>
+            <a:off x="6915588" y="470266"/>
+            <a:ext cx="4525563" cy="636529"/>
+          </a:xfrm>
+          <a:prstGeom prst="rect">
+            <a:avLst/>
+          </a:prstGeom>
+        </p:spPr>
+      </p:pic>
+      <p:pic>
+        <p:nvPicPr>
+          <p:cNvPr id="8" name="Picture 7">
+            <a:extLst>
+              <a:ext uri="{FF2B5EF4-FFF2-40B4-BE49-F238E27FC236}">
+                <a16:creationId xmlns:a16="http://schemas.microsoft.com/office/drawing/2014/main" id="{0B1FB749-33A9-D03F-9B82-6BBE0F404778}"/>
+              </a:ext>
+            </a:extLst>
+          </p:cNvPr>
+          <p:cNvPicPr>
+            <a:picLocks noChangeAspect="1"/>
+          </p:cNvPicPr>
+          <p:nvPr/>
+        </p:nvPicPr>
+        <p:blipFill>
+          <a:blip r:embed="rId3"/>
+          <a:stretch>
+            <a:fillRect/>
+          </a:stretch>
+        </p:blipFill>
+        <p:spPr>
+          <a:xfrm>
+            <a:off x="6897492" y="1326814"/>
+            <a:ext cx="4543659" cy="4496031"/>
+          </a:xfrm>
+          <a:prstGeom prst="rect">
+            <a:avLst/>
+          </a:prstGeom>
+        </p:spPr>
+      </p:pic>
+      <p:pic>
+        <p:nvPicPr>
+          <p:cNvPr id="3074" name="Picture 2" descr="Microsoft Copilot Icon | Dashboard Icons">
+            <a:extLst>
+              <a:ext uri="{FF2B5EF4-FFF2-40B4-BE49-F238E27FC236}">
+                <a16:creationId xmlns:a16="http://schemas.microsoft.com/office/drawing/2014/main" id="{D5159984-BBBE-2871-4051-9B819EB70C1D}"/>
+              </a:ext>
+            </a:extLst>
+          </p:cNvPr>
+          <p:cNvPicPr>
+            <a:picLocks noChangeAspect="1" noChangeArrowheads="1"/>
+          </p:cNvPicPr>
+          <p:nvPr/>
+        </p:nvPicPr>
+        <p:blipFill>
+          <a:blip r:embed="rId4">
+            <a:extLst>
+              <a:ext uri="{28A0092B-C50C-407E-A947-70E740481C1C}">
+                <a14:useLocalDpi xmlns:a14="http://schemas.microsoft.com/office/drawing/2010/main" val="0"/>
+              </a:ext>
+            </a:extLst>
+          </a:blip>
+          <a:srcRect/>
+          <a:stretch>
+            <a:fillRect/>
+          </a:stretch>
+        </p:blipFill>
+        <p:spPr bwMode="auto">
+          <a:xfrm>
+            <a:off x="10476338" y="3372290"/>
+            <a:ext cx="1543050" cy="1409700"/>
+          </a:xfrm>
+          <a:prstGeom prst="rect">
+            <a:avLst/>
+          </a:prstGeom>
+          <a:noFill/>
+          <a:extLst>
+            <a:ext uri="{909E8E84-426E-40DD-AFC4-6F175D3DCCD1}">
+              <a14:hiddenFill xmlns:a14="http://schemas.microsoft.com/office/drawing/2010/main">
+                <a:solidFill>
+                  <a:srgbClr val="FFFFFF"/>
+                </a:solidFill>
+              </a14:hiddenFill>
+            </a:ext>
+          </a:extLst>
+        </p:spPr>
+      </p:pic>
+    </p:spTree>
+    <p:extLst>
+      <p:ext uri="{BB962C8B-B14F-4D97-AF65-F5344CB8AC3E}">
+        <p14:creationId xmlns:p14="http://schemas.microsoft.com/office/powerpoint/2010/main" val="2250657855"/>
+      </p:ext>
+    </p:extLst>
+  </p:cSld>
+  <p:clrMapOvr>
+    <a:masterClrMapping/>
+  </p:clrMapOvr>
+</p:sld>
+</file>
+
+<file path=ppt/slides/slide13.xml><?xml version="1.0" encoding="utf-8"?>
+<p:sld xmlns:a="http://schemas.openxmlformats.org/drawingml/2006/main" xmlns:r="http://schemas.openxmlformats.org/officeDocument/2006/relationships" xmlns:p="http://schemas.openxmlformats.org/presentationml/2006/main">
+  <p:cSld>
+    <p:spTree>
+      <p:nvGrpSpPr>
+        <p:cNvPr id="1" name=""/>
+        <p:cNvGrpSpPr/>
+        <p:nvPr/>
+      </p:nvGrpSpPr>
+      <p:grpSpPr>
+        <a:xfrm>
+          <a:off x="0" y="0"/>
+          <a:ext cx="0" cy="0"/>
+          <a:chOff x="0" y="0"/>
+          <a:chExt cx="0" cy="0"/>
+        </a:xfrm>
+      </p:grpSpPr>
+      <p:sp>
+        <p:nvSpPr>
+          <p:cNvPr id="2" name="Title 1">
+            <a:extLst>
+              <a:ext uri="{FF2B5EF4-FFF2-40B4-BE49-F238E27FC236}">
                 <a16:creationId xmlns:a16="http://schemas.microsoft.com/office/drawing/2014/main" id="{834FDD44-B2BF-8B90-2BE0-A070DE05E9FB}"/>
               </a:ext>
             </a:extLst>
@@ -4483,7 +4905,7 @@
             <p:ph idx="1"/>
             <p:extLst>
               <p:ext uri="{D42A27DB-BD31-4B8C-83A1-F6EECF244321}">
-                <p14:modId xmlns:p14="http://schemas.microsoft.com/office/powerpoint/2010/main" val="2970400399"/>
+                <p14:modId xmlns:p14="http://schemas.microsoft.com/office/powerpoint/2010/main" val="2992037384"/>
               </p:ext>
             </p:extLst>
           </p:nvPr>
@@ -4610,7 +5032,7 @@
                         <a:buNone/>
                       </a:pPr>
                       <a:r>
-                        <a:rPr lang="en-US" sz="2000">
+                        <a:rPr lang="en-US" sz="2000" dirty="0">
                           <a:effectLst/>
                         </a:rPr>
                         <a:t>1/20/2026</a:t>
@@ -4628,21 +5050,21 @@
                         <a:buNone/>
                       </a:pPr>
                       <a:r>
-                        <a:rPr lang="en-US" sz="2000">
+                        <a:rPr lang="en-US" sz="2000" dirty="0">
                           <a:effectLst/>
                         </a:rPr>
                         <a:t>Course Admin</a:t>
                       </a:r>
                       <a:br>
-                        <a:rPr lang="en-US" sz="2000">
+                        <a:rPr lang="en-US" sz="2000" dirty="0">
                           <a:effectLst/>
                         </a:rPr>
                       </a:br>
                       <a:r>
-                        <a:rPr lang="en-US" sz="2000">
+                        <a:rPr lang="en-US" sz="2000" dirty="0">
                           <a:effectLst/>
                         </a:rPr>
-                        <a:t>Unit 1. Basic digital logic</a:t>
+                        <a:t>Unit 1. Data Types and Combinational Logic</a:t>
                       </a:r>
                     </a:p>
                   </a:txBody>
@@ -4703,7 +5125,7 @@
                         <a:rPr lang="en-US" sz="2000" dirty="0">
                           <a:effectLst/>
                         </a:rPr>
-                        <a:t>Unit 2. Arithmetic representations</a:t>
+                        <a:t>Unit 2. Sequential Logic and Finite State Machines</a:t>
                       </a:r>
                     </a:p>
                   </a:txBody>
@@ -4764,7 +5186,7 @@
                         <a:rPr lang="en-US" sz="2000" dirty="0">
                           <a:effectLst/>
                         </a:rPr>
-                        <a:t>Unit 3. Bus basics and processor interface</a:t>
+                        <a:t>Unit 3. Floating and Fixed Point</a:t>
                       </a:r>
                     </a:p>
                   </a:txBody>
@@ -4825,7 +5247,7 @@
                         <a:rPr lang="en-US" sz="2000" dirty="0">
                           <a:effectLst/>
                         </a:rPr>
-                        <a:t>Unit 4. FIFO and streaming interfaces</a:t>
+                        <a:t>Unit 4. Bus Basics and Memory Mapped Interfaces</a:t>
                       </a:r>
                     </a:p>
                   </a:txBody>
@@ -4886,7 +5308,7 @@
                         <a:rPr lang="en-US" sz="2000" dirty="0">
                           <a:effectLst/>
                         </a:rPr>
-                        <a:t>Unit 5. Timing analysis</a:t>
+                        <a:t>Unit 5. FIFO and Streaming Interfaces</a:t>
                       </a:r>
                     </a:p>
                   </a:txBody>
@@ -5123,7 +5545,7 @@
           <a:p>
             <a:fld id="{629637A9-119A-49DA-BD12-AAC58B377D80}" type="slidenum">
               <a:rPr lang="en-US" smtClean="0"/>
-              <a:t>11</a:t>
+              <a:t>13</a:t>
             </a:fld>
             <a:endParaRPr lang="en-US" dirty="0"/>
           </a:p>
@@ -5142,7 +5564,7 @@
 </p:sld>
 </file>
 
-<file path=ppt/slides/slide12.xml><?xml version="1.0" encoding="utf-8"?>
+<file path=ppt/slides/slide14.xml><?xml version="1.0" encoding="utf-8"?>
 <p:sld xmlns:a="http://schemas.openxmlformats.org/drawingml/2006/main" xmlns:r="http://schemas.openxmlformats.org/officeDocument/2006/relationships" xmlns:p="http://schemas.openxmlformats.org/presentationml/2006/main">
   <p:cSld>
     <p:spTree>
@@ -5850,7 +6272,7 @@
           <a:p>
             <a:fld id="{629637A9-119A-49DA-BD12-AAC58B377D80}" type="slidenum">
               <a:rPr lang="en-US" smtClean="0"/>
-              <a:t>12</a:t>
+              <a:t>14</a:t>
             </a:fld>
             <a:endParaRPr lang="en-US" dirty="0"/>
           </a:p>
@@ -5860,641 +6282,6 @@
     <p:extLst>
       <p:ext uri="{BB962C8B-B14F-4D97-AF65-F5344CB8AC3E}">
         <p14:creationId xmlns:p14="http://schemas.microsoft.com/office/powerpoint/2010/main" val="2055579322"/>
-      </p:ext>
-    </p:extLst>
-  </p:cSld>
-  <p:clrMapOvr>
-    <a:masterClrMapping/>
-  </p:clrMapOvr>
-</p:sld>
-</file>
-
-<file path=ppt/slides/slide13.xml><?xml version="1.0" encoding="utf-8"?>
-<p:sld xmlns:a="http://schemas.openxmlformats.org/drawingml/2006/main" xmlns:r="http://schemas.openxmlformats.org/officeDocument/2006/relationships" xmlns:p="http://schemas.openxmlformats.org/presentationml/2006/main">
-  <p:cSld>
-    <p:spTree>
-      <p:nvGrpSpPr>
-        <p:cNvPr id="1" name=""/>
-        <p:cNvGrpSpPr/>
-        <p:nvPr/>
-      </p:nvGrpSpPr>
-      <p:grpSpPr>
-        <a:xfrm>
-          <a:off x="0" y="0"/>
-          <a:ext cx="0" cy="0"/>
-          <a:chOff x="0" y="0"/>
-          <a:chExt cx="0" cy="0"/>
-        </a:xfrm>
-      </p:grpSpPr>
-      <p:sp>
-        <p:nvSpPr>
-          <p:cNvPr id="2" name="Title 1">
-            <a:extLst>
-              <a:ext uri="{FF2B5EF4-FFF2-40B4-BE49-F238E27FC236}">
-                <a16:creationId xmlns:a16="http://schemas.microsoft.com/office/drawing/2014/main" id="{B1FFA4C1-71AC-123B-B99F-699DEB5D92CF}"/>
-              </a:ext>
-            </a:extLst>
-          </p:cNvPr>
-          <p:cNvSpPr>
-            <a:spLocks noGrp="1"/>
-          </p:cNvSpPr>
-          <p:nvPr>
-            <p:ph type="title"/>
-          </p:nvPr>
-        </p:nvSpPr>
-        <p:spPr/>
-        <p:txBody>
-          <a:bodyPr/>
-          <a:lstStyle/>
-          <a:p>
-            <a:r>
-              <a:rPr lang="en-US" dirty="0"/>
-              <a:t>AI </a:t>
-            </a:r>
-            <a:r>
-              <a:rPr lang="en-US" dirty="0" err="1"/>
-              <a:t>Autograder</a:t>
-            </a:r>
-            <a:endParaRPr lang="en-US" dirty="0"/>
-          </a:p>
-        </p:txBody>
-      </p:sp>
-      <p:sp>
-        <p:nvSpPr>
-          <p:cNvPr id="3" name="Content Placeholder 2">
-            <a:extLst>
-              <a:ext uri="{FF2B5EF4-FFF2-40B4-BE49-F238E27FC236}">
-                <a16:creationId xmlns:a16="http://schemas.microsoft.com/office/drawing/2014/main" id="{4130ADDC-09C9-7DE9-3FE9-C059D43BFD30}"/>
-              </a:ext>
-            </a:extLst>
-          </p:cNvPr>
-          <p:cNvSpPr>
-            <a:spLocks noGrp="1"/>
-          </p:cNvSpPr>
-          <p:nvPr>
-            <p:ph idx="1"/>
-          </p:nvPr>
-        </p:nvSpPr>
-        <p:spPr>
-          <a:xfrm>
-            <a:off x="1097280" y="1539277"/>
-            <a:ext cx="5070862" cy="4329817"/>
-          </a:xfrm>
-        </p:spPr>
-        <p:txBody>
-          <a:bodyPr/>
-          <a:lstStyle/>
-          <a:p>
-            <a:r>
-              <a:rPr lang="en-US" dirty="0"/>
-              <a:t>An </a:t>
-            </a:r>
-            <a:r>
-              <a:rPr lang="en-US" dirty="0">
-                <a:hlinkClick r:id="rId2"/>
-              </a:rPr>
-              <a:t>LLM-automated grader</a:t>
-            </a:r>
-            <a:endParaRPr lang="en-US" dirty="0"/>
-          </a:p>
-          <a:p>
-            <a:r>
-              <a:rPr lang="en-US" dirty="0"/>
-              <a:t>Will use for:</a:t>
-            </a:r>
-          </a:p>
-          <a:p>
-            <a:pPr lvl="1"/>
-            <a:r>
-              <a:rPr lang="en-US" dirty="0"/>
-              <a:t>In class exercises</a:t>
-            </a:r>
-          </a:p>
-          <a:p>
-            <a:pPr lvl="1"/>
-            <a:r>
-              <a:rPr lang="en-US" dirty="0"/>
-              <a:t>For </a:t>
-            </a:r>
-            <a:r>
-              <a:rPr lang="en-US" dirty="0" err="1"/>
-              <a:t>Gradescrope</a:t>
-            </a:r>
-            <a:r>
-              <a:rPr lang="en-US" dirty="0"/>
-              <a:t> submissions</a:t>
-            </a:r>
-          </a:p>
-          <a:p>
-            <a:r>
-              <a:rPr lang="en-US" dirty="0"/>
-              <a:t>Provides</a:t>
-            </a:r>
-          </a:p>
-          <a:p>
-            <a:pPr lvl="1"/>
-            <a:r>
-              <a:rPr lang="en-US" dirty="0"/>
-              <a:t>Instant, detailed feedback</a:t>
-            </a:r>
-          </a:p>
-          <a:p>
-            <a:r>
-              <a:rPr lang="en-US" dirty="0"/>
-              <a:t>But</a:t>
-            </a:r>
-          </a:p>
-          <a:p>
-            <a:pPr lvl="1"/>
-            <a:r>
-              <a:rPr lang="en-US" dirty="0"/>
-              <a:t>May make mistakes</a:t>
-            </a:r>
-          </a:p>
-          <a:p>
-            <a:r>
-              <a:rPr lang="en-US" dirty="0"/>
-              <a:t>Still experimental</a:t>
-            </a:r>
-          </a:p>
-          <a:p>
-            <a:pPr lvl="1"/>
-            <a:r>
-              <a:rPr lang="en-US" dirty="0"/>
-              <a:t>Need your feedback</a:t>
-            </a:r>
-          </a:p>
-        </p:txBody>
-      </p:sp>
-      <p:sp>
-        <p:nvSpPr>
-          <p:cNvPr id="4" name="Slide Number Placeholder 3">
-            <a:extLst>
-              <a:ext uri="{FF2B5EF4-FFF2-40B4-BE49-F238E27FC236}">
-                <a16:creationId xmlns:a16="http://schemas.microsoft.com/office/drawing/2014/main" id="{199BE6A3-ED12-515F-1028-F85F299E3CE2}"/>
-              </a:ext>
-            </a:extLst>
-          </p:cNvPr>
-          <p:cNvSpPr>
-            <a:spLocks noGrp="1"/>
-          </p:cNvSpPr>
-          <p:nvPr>
-            <p:ph type="sldNum" sz="quarter" idx="12"/>
-          </p:nvPr>
-        </p:nvSpPr>
-        <p:spPr/>
-        <p:txBody>
-          <a:bodyPr/>
-          <a:lstStyle/>
-          <a:p>
-            <a:fld id="{629637A9-119A-49DA-BD12-AAC58B377D80}" type="slidenum">
-              <a:rPr lang="en-US" smtClean="0"/>
-              <a:t>13</a:t>
-            </a:fld>
-            <a:endParaRPr lang="en-US" dirty="0"/>
-          </a:p>
-        </p:txBody>
-      </p:sp>
-      <p:pic>
-        <p:nvPicPr>
-          <p:cNvPr id="6" name="Picture 5">
-            <a:extLst>
-              <a:ext uri="{FF2B5EF4-FFF2-40B4-BE49-F238E27FC236}">
-                <a16:creationId xmlns:a16="http://schemas.microsoft.com/office/drawing/2014/main" id="{CEFF5452-282B-87C1-47EA-E46A6826996D}"/>
-              </a:ext>
-            </a:extLst>
-          </p:cNvPr>
-          <p:cNvPicPr>
-            <a:picLocks noChangeAspect="1"/>
-          </p:cNvPicPr>
-          <p:nvPr/>
-        </p:nvPicPr>
-        <p:blipFill>
-          <a:blip r:embed="rId3"/>
-          <a:stretch>
-            <a:fillRect/>
-          </a:stretch>
-        </p:blipFill>
-        <p:spPr>
-          <a:xfrm>
-            <a:off x="4895152" y="536859"/>
-            <a:ext cx="7157215" cy="4877746"/>
-          </a:xfrm>
-          <a:prstGeom prst="rect">
-            <a:avLst/>
-          </a:prstGeom>
-        </p:spPr>
-      </p:pic>
-    </p:spTree>
-    <p:extLst>
-      <p:ext uri="{BB962C8B-B14F-4D97-AF65-F5344CB8AC3E}">
-        <p14:creationId xmlns:p14="http://schemas.microsoft.com/office/powerpoint/2010/main" val="2386204723"/>
-      </p:ext>
-    </p:extLst>
-  </p:cSld>
-  <p:clrMapOvr>
-    <a:masterClrMapping/>
-  </p:clrMapOvr>
-</p:sld>
-</file>
-
-<file path=ppt/slides/slide14.xml><?xml version="1.0" encoding="utf-8"?>
-<p:sld xmlns:a="http://schemas.openxmlformats.org/drawingml/2006/main" xmlns:r="http://schemas.openxmlformats.org/officeDocument/2006/relationships" xmlns:p="http://schemas.openxmlformats.org/presentationml/2006/main">
-  <p:cSld>
-    <p:spTree>
-      <p:nvGrpSpPr>
-        <p:cNvPr id="1" name=""/>
-        <p:cNvGrpSpPr/>
-        <p:nvPr/>
-      </p:nvGrpSpPr>
-      <p:grpSpPr>
-        <a:xfrm>
-          <a:off x="0" y="0"/>
-          <a:ext cx="0" cy="0"/>
-          <a:chOff x="0" y="0"/>
-          <a:chExt cx="0" cy="0"/>
-        </a:xfrm>
-      </p:grpSpPr>
-      <p:sp>
-        <p:nvSpPr>
-          <p:cNvPr id="2" name="Title 1">
-            <a:extLst>
-              <a:ext uri="{FF2B5EF4-FFF2-40B4-BE49-F238E27FC236}">
-                <a16:creationId xmlns:a16="http://schemas.microsoft.com/office/drawing/2014/main" id="{ED15BDE0-DB38-CCE7-08CF-D58ABC2828FD}"/>
-              </a:ext>
-            </a:extLst>
-          </p:cNvPr>
-          <p:cNvSpPr>
-            <a:spLocks noGrp="1"/>
-          </p:cNvSpPr>
-          <p:nvPr>
-            <p:ph type="title"/>
-          </p:nvPr>
-        </p:nvSpPr>
-        <p:spPr/>
-        <p:txBody>
-          <a:bodyPr/>
-          <a:lstStyle/>
-          <a:p>
-            <a:r>
-              <a:rPr lang="en-US" dirty="0"/>
-              <a:t>Project</a:t>
-            </a:r>
-          </a:p>
-        </p:txBody>
-      </p:sp>
-      <p:sp>
-        <p:nvSpPr>
-          <p:cNvPr id="3" name="Content Placeholder 2">
-            <a:extLst>
-              <a:ext uri="{FF2B5EF4-FFF2-40B4-BE49-F238E27FC236}">
-                <a16:creationId xmlns:a16="http://schemas.microsoft.com/office/drawing/2014/main" id="{0AA42AEA-049B-D207-24AB-B2B8F15C2808}"/>
-              </a:ext>
-            </a:extLst>
-          </p:cNvPr>
-          <p:cNvSpPr>
-            <a:spLocks noGrp="1"/>
-          </p:cNvSpPr>
-          <p:nvPr>
-            <p:ph idx="1"/>
-          </p:nvPr>
-        </p:nvSpPr>
-        <p:spPr>
-          <a:xfrm>
-            <a:off x="1097280" y="1539277"/>
-            <a:ext cx="6733953" cy="4329817"/>
-          </a:xfrm>
-        </p:spPr>
-        <p:txBody>
-          <a:bodyPr/>
-          <a:lstStyle/>
-          <a:p>
-            <a:r>
-              <a:rPr lang="en-US" dirty="0"/>
-              <a:t>Build your own IP</a:t>
-            </a:r>
-          </a:p>
-          <a:p>
-            <a:r>
-              <a:rPr lang="en-US" dirty="0"/>
-              <a:t>You must provide:</a:t>
-            </a:r>
-          </a:p>
-          <a:p>
-            <a:pPr lvl="1"/>
-            <a:r>
-              <a:rPr lang="en-US" dirty="0"/>
-              <a:t>A clearly defined hardware IP block (RTL or HLS)</a:t>
-            </a:r>
-          </a:p>
-          <a:p>
-            <a:pPr lvl="1"/>
-            <a:r>
-              <a:rPr lang="en-US" dirty="0"/>
-              <a:t>A well‑specified interface and integration model with a host system</a:t>
-            </a:r>
-          </a:p>
-          <a:p>
-            <a:pPr lvl="1"/>
-            <a:r>
-              <a:rPr lang="en-US" dirty="0"/>
-              <a:t>A testbench and evaluation methodology</a:t>
-            </a:r>
-          </a:p>
-          <a:p>
-            <a:pPr lvl="1"/>
-            <a:r>
-              <a:rPr lang="en-US" dirty="0"/>
-              <a:t>Documentation that allows others to reproduce your result</a:t>
-            </a:r>
-          </a:p>
-          <a:p>
-            <a:r>
-              <a:rPr lang="en-US" dirty="0"/>
-              <a:t>Any topic of choice</a:t>
-            </a:r>
-          </a:p>
-          <a:p>
-            <a:pPr lvl="1"/>
-            <a:r>
-              <a:rPr lang="en-US" dirty="0"/>
-              <a:t>Computer vision, communications, computing, …</a:t>
-            </a:r>
-          </a:p>
-          <a:p>
-            <a:r>
-              <a:rPr lang="en-US" dirty="0"/>
-              <a:t>Work in groups of 2 to 4</a:t>
-            </a:r>
-          </a:p>
-          <a:p>
-            <a:pPr lvl="1"/>
-            <a:r>
-              <a:rPr lang="en-US" dirty="0"/>
-              <a:t>Individual projects require instructor permission</a:t>
-            </a:r>
-          </a:p>
-          <a:p>
-            <a:endParaRPr lang="en-US" dirty="0"/>
-          </a:p>
-        </p:txBody>
-      </p:sp>
-      <p:sp>
-        <p:nvSpPr>
-          <p:cNvPr id="4" name="Slide Number Placeholder 3">
-            <a:extLst>
-              <a:ext uri="{FF2B5EF4-FFF2-40B4-BE49-F238E27FC236}">
-                <a16:creationId xmlns:a16="http://schemas.microsoft.com/office/drawing/2014/main" id="{834B9AC8-B9AB-9076-444E-5FDC01E51B62}"/>
-              </a:ext>
-            </a:extLst>
-          </p:cNvPr>
-          <p:cNvSpPr>
-            <a:spLocks noGrp="1"/>
-          </p:cNvSpPr>
-          <p:nvPr>
-            <p:ph type="sldNum" sz="quarter" idx="12"/>
-          </p:nvPr>
-        </p:nvSpPr>
-        <p:spPr/>
-        <p:txBody>
-          <a:bodyPr/>
-          <a:lstStyle/>
-          <a:p>
-            <a:fld id="{629637A9-119A-49DA-BD12-AAC58B377D80}" type="slidenum">
-              <a:rPr lang="en-US" smtClean="0"/>
-              <a:t>14</a:t>
-            </a:fld>
-            <a:endParaRPr lang="en-US" dirty="0"/>
-          </a:p>
-        </p:txBody>
-      </p:sp>
-      <p:pic>
-        <p:nvPicPr>
-          <p:cNvPr id="2050" name="Picture 2" descr="Asic - Free icons">
-            <a:extLst>
-              <a:ext uri="{FF2B5EF4-FFF2-40B4-BE49-F238E27FC236}">
-                <a16:creationId xmlns:a16="http://schemas.microsoft.com/office/drawing/2014/main" id="{78C6B843-6476-291A-BDC6-42E605379353}"/>
-              </a:ext>
-            </a:extLst>
-          </p:cNvPr>
-          <p:cNvPicPr>
-            <a:picLocks noChangeAspect="1" noChangeArrowheads="1"/>
-          </p:cNvPicPr>
-          <p:nvPr/>
-        </p:nvPicPr>
-        <p:blipFill>
-          <a:blip r:embed="rId2">
-            <a:extLst>
-              <a:ext uri="{28A0092B-C50C-407E-A947-70E740481C1C}">
-                <a14:useLocalDpi xmlns:a14="http://schemas.microsoft.com/office/drawing/2010/main" val="0"/>
-              </a:ext>
-            </a:extLst>
-          </a:blip>
-          <a:srcRect/>
-          <a:stretch>
-            <a:fillRect/>
-          </a:stretch>
-        </p:blipFill>
-        <p:spPr bwMode="auto">
-          <a:xfrm>
-            <a:off x="10558299" y="2438042"/>
-            <a:ext cx="1072840" cy="1072840"/>
-          </a:xfrm>
-          <a:prstGeom prst="rect">
-            <a:avLst/>
-          </a:prstGeom>
-          <a:noFill/>
-          <a:extLst>
-            <a:ext uri="{909E8E84-426E-40DD-AFC4-6F175D3DCCD1}">
-              <a14:hiddenFill xmlns:a14="http://schemas.microsoft.com/office/drawing/2010/main">
-                <a:solidFill>
-                  <a:srgbClr val="FFFFFF"/>
-                </a:solidFill>
-              </a14:hiddenFill>
-            </a:ext>
-          </a:extLst>
-        </p:spPr>
-      </p:pic>
-      <p:sp>
-        <p:nvSpPr>
-          <p:cNvPr id="5" name="TextBox 4">
-            <a:extLst>
-              <a:ext uri="{FF2B5EF4-FFF2-40B4-BE49-F238E27FC236}">
-                <a16:creationId xmlns:a16="http://schemas.microsoft.com/office/drawing/2014/main" id="{2F680FE2-22BB-E33C-50B1-4220C555D317}"/>
-              </a:ext>
-            </a:extLst>
-          </p:cNvPr>
-          <p:cNvSpPr txBox="1"/>
-          <p:nvPr/>
-        </p:nvSpPr>
-        <p:spPr>
-          <a:xfrm>
-            <a:off x="10410668" y="3747530"/>
-            <a:ext cx="1490023" cy="646331"/>
-          </a:xfrm>
-          <a:prstGeom prst="rect">
-            <a:avLst/>
-          </a:prstGeom>
-          <a:noFill/>
-        </p:spPr>
-        <p:txBody>
-          <a:bodyPr wrap="none" rtlCol="0">
-            <a:spAutoFit/>
-          </a:bodyPr>
-          <a:lstStyle/>
-          <a:p>
-            <a:r>
-              <a:rPr lang="en-US" dirty="0"/>
-              <a:t>Hardware IP</a:t>
-            </a:r>
-            <a:br>
-              <a:rPr lang="en-US" dirty="0"/>
-            </a:br>
-            <a:r>
-              <a:rPr lang="en-US" dirty="0"/>
-              <a:t>or accelerator</a:t>
-            </a:r>
-          </a:p>
-        </p:txBody>
-      </p:sp>
-      <p:pic>
-        <p:nvPicPr>
-          <p:cNvPr id="2054" name="Picture 6" descr="Desktop Computer Icon Computer PNG &amp; SVG Design For T-Shirts">
-            <a:extLst>
-              <a:ext uri="{FF2B5EF4-FFF2-40B4-BE49-F238E27FC236}">
-                <a16:creationId xmlns:a16="http://schemas.microsoft.com/office/drawing/2014/main" id="{8BECE664-233D-F17B-EE19-DAFD81484017}"/>
-              </a:ext>
-            </a:extLst>
-          </p:cNvPr>
-          <p:cNvPicPr>
-            <a:picLocks noChangeAspect="1" noChangeArrowheads="1"/>
-          </p:cNvPicPr>
-          <p:nvPr/>
-        </p:nvPicPr>
-        <p:blipFill>
-          <a:blip r:embed="rId3">
-            <a:extLst>
-              <a:ext uri="{28A0092B-C50C-407E-A947-70E740481C1C}">
-                <a14:useLocalDpi xmlns:a14="http://schemas.microsoft.com/office/drawing/2010/main" val="0"/>
-              </a:ext>
-            </a:extLst>
-          </a:blip>
-          <a:srcRect/>
-          <a:stretch>
-            <a:fillRect/>
-          </a:stretch>
-        </p:blipFill>
-        <p:spPr bwMode="auto">
-          <a:xfrm>
-            <a:off x="7926275" y="2153619"/>
-            <a:ext cx="1872753" cy="1872753"/>
-          </a:xfrm>
-          <a:prstGeom prst="rect">
-            <a:avLst/>
-          </a:prstGeom>
-          <a:noFill/>
-          <a:extLst>
-            <a:ext uri="{909E8E84-426E-40DD-AFC4-6F175D3DCCD1}">
-              <a14:hiddenFill xmlns:a14="http://schemas.microsoft.com/office/drawing/2010/main">
-                <a:solidFill>
-                  <a:srgbClr val="FFFFFF"/>
-                </a:solidFill>
-              </a14:hiddenFill>
-            </a:ext>
-          </a:extLst>
-        </p:spPr>
-      </p:pic>
-      <p:sp>
-        <p:nvSpPr>
-          <p:cNvPr id="6" name="Arrow: Left-Right 5">
-            <a:extLst>
-              <a:ext uri="{FF2B5EF4-FFF2-40B4-BE49-F238E27FC236}">
-                <a16:creationId xmlns:a16="http://schemas.microsoft.com/office/drawing/2014/main" id="{91434D6A-6C17-B593-8155-ABB0406CDF06}"/>
-              </a:ext>
-            </a:extLst>
-          </p:cNvPr>
-          <p:cNvSpPr/>
-          <p:nvPr/>
-        </p:nvSpPr>
-        <p:spPr>
-          <a:xfrm>
-            <a:off x="9799028" y="2932771"/>
-            <a:ext cx="629035" cy="314450"/>
-          </a:xfrm>
-          <a:prstGeom prst="leftRightArrow">
-            <a:avLst/>
-          </a:prstGeom>
-          <a:solidFill>
-            <a:schemeClr val="accent1">
-              <a:lumMod val="20000"/>
-              <a:lumOff val="80000"/>
-            </a:schemeClr>
-          </a:solidFill>
-        </p:spPr>
-        <p:style>
-          <a:lnRef idx="2">
-            <a:schemeClr val="accent1">
-              <a:shade val="15000"/>
-            </a:schemeClr>
-          </a:lnRef>
-          <a:fillRef idx="1">
-            <a:schemeClr val="accent1"/>
-          </a:fillRef>
-          <a:effectRef idx="0">
-            <a:schemeClr val="accent1"/>
-          </a:effectRef>
-          <a:fontRef idx="minor">
-            <a:schemeClr val="lt1"/>
-          </a:fontRef>
-        </p:style>
-        <p:txBody>
-          <a:bodyPr rtlCol="0" anchor="ctr"/>
-          <a:lstStyle/>
-          <a:p>
-            <a:pPr algn="ctr"/>
-            <a:endParaRPr lang="en-US"/>
-          </a:p>
-        </p:txBody>
-      </p:sp>
-      <p:sp>
-        <p:nvSpPr>
-          <p:cNvPr id="7" name="TextBox 6">
-            <a:extLst>
-              <a:ext uri="{FF2B5EF4-FFF2-40B4-BE49-F238E27FC236}">
-                <a16:creationId xmlns:a16="http://schemas.microsoft.com/office/drawing/2014/main" id="{D7AE51BA-1953-9205-B7E6-3A975352BE85}"/>
-              </a:ext>
-            </a:extLst>
-          </p:cNvPr>
-          <p:cNvSpPr txBox="1"/>
-          <p:nvPr/>
-        </p:nvSpPr>
-        <p:spPr>
-          <a:xfrm>
-            <a:off x="8195994" y="3972747"/>
-            <a:ext cx="1316899" cy="369332"/>
-          </a:xfrm>
-          <a:prstGeom prst="rect">
-            <a:avLst/>
-          </a:prstGeom>
-          <a:noFill/>
-        </p:spPr>
-        <p:txBody>
-          <a:bodyPr wrap="none" rtlCol="0">
-            <a:spAutoFit/>
-          </a:bodyPr>
-          <a:lstStyle/>
-          <a:p>
-            <a:r>
-              <a:rPr lang="en-US" dirty="0"/>
-              <a:t>Host system</a:t>
-            </a:r>
-          </a:p>
-        </p:txBody>
-      </p:sp>
-    </p:spTree>
-    <p:extLst>
-      <p:ext uri="{BB962C8B-B14F-4D97-AF65-F5344CB8AC3E}">
-        <p14:creationId xmlns:p14="http://schemas.microsoft.com/office/powerpoint/2010/main" val="3106628324"/>
       </p:ext>
     </p:extLst>
   </p:cSld>
@@ -6526,6 +6313,412 @@
           <p:cNvPr id="2" name="Title 1">
             <a:extLst>
               <a:ext uri="{FF2B5EF4-FFF2-40B4-BE49-F238E27FC236}">
+                <a16:creationId xmlns:a16="http://schemas.microsoft.com/office/drawing/2014/main" id="{ED15BDE0-DB38-CCE7-08CF-D58ABC2828FD}"/>
+              </a:ext>
+            </a:extLst>
+          </p:cNvPr>
+          <p:cNvSpPr>
+            <a:spLocks noGrp="1"/>
+          </p:cNvSpPr>
+          <p:nvPr>
+            <p:ph type="title"/>
+          </p:nvPr>
+        </p:nvSpPr>
+        <p:spPr/>
+        <p:txBody>
+          <a:bodyPr/>
+          <a:lstStyle/>
+          <a:p>
+            <a:r>
+              <a:rPr lang="en-US" dirty="0"/>
+              <a:t>Project</a:t>
+            </a:r>
+          </a:p>
+        </p:txBody>
+      </p:sp>
+      <p:sp>
+        <p:nvSpPr>
+          <p:cNvPr id="3" name="Content Placeholder 2">
+            <a:extLst>
+              <a:ext uri="{FF2B5EF4-FFF2-40B4-BE49-F238E27FC236}">
+                <a16:creationId xmlns:a16="http://schemas.microsoft.com/office/drawing/2014/main" id="{0AA42AEA-049B-D207-24AB-B2B8F15C2808}"/>
+              </a:ext>
+            </a:extLst>
+          </p:cNvPr>
+          <p:cNvSpPr>
+            <a:spLocks noGrp="1"/>
+          </p:cNvSpPr>
+          <p:nvPr>
+            <p:ph idx="1"/>
+          </p:nvPr>
+        </p:nvSpPr>
+        <p:spPr>
+          <a:xfrm>
+            <a:off x="1097280" y="1539277"/>
+            <a:ext cx="6733953" cy="4329817"/>
+          </a:xfrm>
+        </p:spPr>
+        <p:txBody>
+          <a:bodyPr/>
+          <a:lstStyle/>
+          <a:p>
+            <a:r>
+              <a:rPr lang="en-US" dirty="0"/>
+              <a:t>Build your own IP</a:t>
+            </a:r>
+          </a:p>
+          <a:p>
+            <a:r>
+              <a:rPr lang="en-US" dirty="0"/>
+              <a:t>You must provide:</a:t>
+            </a:r>
+          </a:p>
+          <a:p>
+            <a:pPr lvl="1"/>
+            <a:r>
+              <a:rPr lang="en-US" dirty="0"/>
+              <a:t>A clearly defined hardware IP block (RTL or HLS)</a:t>
+            </a:r>
+          </a:p>
+          <a:p>
+            <a:pPr lvl="1"/>
+            <a:r>
+              <a:rPr lang="en-US" dirty="0"/>
+              <a:t>A well‑specified interface and integration model with a host system</a:t>
+            </a:r>
+          </a:p>
+          <a:p>
+            <a:pPr lvl="1"/>
+            <a:r>
+              <a:rPr lang="en-US" dirty="0"/>
+              <a:t>A testbench and evaluation methodology</a:t>
+            </a:r>
+          </a:p>
+          <a:p>
+            <a:pPr lvl="1"/>
+            <a:r>
+              <a:rPr lang="en-US" dirty="0"/>
+              <a:t>Documentation that allows others to reproduce your result</a:t>
+            </a:r>
+          </a:p>
+          <a:p>
+            <a:r>
+              <a:rPr lang="en-US" dirty="0"/>
+              <a:t>Any topic of choice</a:t>
+            </a:r>
+          </a:p>
+          <a:p>
+            <a:pPr lvl="1"/>
+            <a:r>
+              <a:rPr lang="en-US" dirty="0"/>
+              <a:t>Computer vision, communications, computing, …</a:t>
+            </a:r>
+          </a:p>
+          <a:p>
+            <a:r>
+              <a:rPr lang="en-US" dirty="0"/>
+              <a:t>Work in groups of 2 to 4</a:t>
+            </a:r>
+          </a:p>
+          <a:p>
+            <a:pPr lvl="1"/>
+            <a:r>
+              <a:rPr lang="en-US" dirty="0"/>
+              <a:t>Individual projects require instructor permission</a:t>
+            </a:r>
+          </a:p>
+          <a:p>
+            <a:endParaRPr lang="en-US" dirty="0"/>
+          </a:p>
+        </p:txBody>
+      </p:sp>
+      <p:sp>
+        <p:nvSpPr>
+          <p:cNvPr id="4" name="Slide Number Placeholder 3">
+            <a:extLst>
+              <a:ext uri="{FF2B5EF4-FFF2-40B4-BE49-F238E27FC236}">
+                <a16:creationId xmlns:a16="http://schemas.microsoft.com/office/drawing/2014/main" id="{834B9AC8-B9AB-9076-444E-5FDC01E51B62}"/>
+              </a:ext>
+            </a:extLst>
+          </p:cNvPr>
+          <p:cNvSpPr>
+            <a:spLocks noGrp="1"/>
+          </p:cNvSpPr>
+          <p:nvPr>
+            <p:ph type="sldNum" sz="quarter" idx="12"/>
+          </p:nvPr>
+        </p:nvSpPr>
+        <p:spPr/>
+        <p:txBody>
+          <a:bodyPr/>
+          <a:lstStyle/>
+          <a:p>
+            <a:fld id="{629637A9-119A-49DA-BD12-AAC58B377D80}" type="slidenum">
+              <a:rPr lang="en-US" smtClean="0"/>
+              <a:t>15</a:t>
+            </a:fld>
+            <a:endParaRPr lang="en-US" dirty="0"/>
+          </a:p>
+        </p:txBody>
+      </p:sp>
+      <p:pic>
+        <p:nvPicPr>
+          <p:cNvPr id="2050" name="Picture 2" descr="Asic - Free icons">
+            <a:extLst>
+              <a:ext uri="{FF2B5EF4-FFF2-40B4-BE49-F238E27FC236}">
+                <a16:creationId xmlns:a16="http://schemas.microsoft.com/office/drawing/2014/main" id="{78C6B843-6476-291A-BDC6-42E605379353}"/>
+              </a:ext>
+            </a:extLst>
+          </p:cNvPr>
+          <p:cNvPicPr>
+            <a:picLocks noChangeAspect="1" noChangeArrowheads="1"/>
+          </p:cNvPicPr>
+          <p:nvPr/>
+        </p:nvPicPr>
+        <p:blipFill>
+          <a:blip r:embed="rId2">
+            <a:extLst>
+              <a:ext uri="{28A0092B-C50C-407E-A947-70E740481C1C}">
+                <a14:useLocalDpi xmlns:a14="http://schemas.microsoft.com/office/drawing/2010/main" val="0"/>
+              </a:ext>
+            </a:extLst>
+          </a:blip>
+          <a:srcRect/>
+          <a:stretch>
+            <a:fillRect/>
+          </a:stretch>
+        </p:blipFill>
+        <p:spPr bwMode="auto">
+          <a:xfrm>
+            <a:off x="10558299" y="2438042"/>
+            <a:ext cx="1072840" cy="1072840"/>
+          </a:xfrm>
+          <a:prstGeom prst="rect">
+            <a:avLst/>
+          </a:prstGeom>
+          <a:noFill/>
+          <a:extLst>
+            <a:ext uri="{909E8E84-426E-40DD-AFC4-6F175D3DCCD1}">
+              <a14:hiddenFill xmlns:a14="http://schemas.microsoft.com/office/drawing/2010/main">
+                <a:solidFill>
+                  <a:srgbClr val="FFFFFF"/>
+                </a:solidFill>
+              </a14:hiddenFill>
+            </a:ext>
+          </a:extLst>
+        </p:spPr>
+      </p:pic>
+      <p:sp>
+        <p:nvSpPr>
+          <p:cNvPr id="5" name="TextBox 4">
+            <a:extLst>
+              <a:ext uri="{FF2B5EF4-FFF2-40B4-BE49-F238E27FC236}">
+                <a16:creationId xmlns:a16="http://schemas.microsoft.com/office/drawing/2014/main" id="{2F680FE2-22BB-E33C-50B1-4220C555D317}"/>
+              </a:ext>
+            </a:extLst>
+          </p:cNvPr>
+          <p:cNvSpPr txBox="1"/>
+          <p:nvPr/>
+        </p:nvSpPr>
+        <p:spPr>
+          <a:xfrm>
+            <a:off x="10410668" y="3747530"/>
+            <a:ext cx="1490023" cy="646331"/>
+          </a:xfrm>
+          <a:prstGeom prst="rect">
+            <a:avLst/>
+          </a:prstGeom>
+          <a:noFill/>
+        </p:spPr>
+        <p:txBody>
+          <a:bodyPr wrap="none" rtlCol="0">
+            <a:spAutoFit/>
+          </a:bodyPr>
+          <a:lstStyle/>
+          <a:p>
+            <a:r>
+              <a:rPr lang="en-US" dirty="0"/>
+              <a:t>Hardware IP</a:t>
+            </a:r>
+            <a:br>
+              <a:rPr lang="en-US" dirty="0"/>
+            </a:br>
+            <a:r>
+              <a:rPr lang="en-US" dirty="0"/>
+              <a:t>or accelerator</a:t>
+            </a:r>
+          </a:p>
+        </p:txBody>
+      </p:sp>
+      <p:pic>
+        <p:nvPicPr>
+          <p:cNvPr id="2054" name="Picture 6" descr="Desktop Computer Icon Computer PNG &amp; SVG Design For T-Shirts">
+            <a:extLst>
+              <a:ext uri="{FF2B5EF4-FFF2-40B4-BE49-F238E27FC236}">
+                <a16:creationId xmlns:a16="http://schemas.microsoft.com/office/drawing/2014/main" id="{8BECE664-233D-F17B-EE19-DAFD81484017}"/>
+              </a:ext>
+            </a:extLst>
+          </p:cNvPr>
+          <p:cNvPicPr>
+            <a:picLocks noChangeAspect="1" noChangeArrowheads="1"/>
+          </p:cNvPicPr>
+          <p:nvPr/>
+        </p:nvPicPr>
+        <p:blipFill>
+          <a:blip r:embed="rId3">
+            <a:extLst>
+              <a:ext uri="{28A0092B-C50C-407E-A947-70E740481C1C}">
+                <a14:useLocalDpi xmlns:a14="http://schemas.microsoft.com/office/drawing/2010/main" val="0"/>
+              </a:ext>
+            </a:extLst>
+          </a:blip>
+          <a:srcRect/>
+          <a:stretch>
+            <a:fillRect/>
+          </a:stretch>
+        </p:blipFill>
+        <p:spPr bwMode="auto">
+          <a:xfrm>
+            <a:off x="7926275" y="2153619"/>
+            <a:ext cx="1872753" cy="1872753"/>
+          </a:xfrm>
+          <a:prstGeom prst="rect">
+            <a:avLst/>
+          </a:prstGeom>
+          <a:noFill/>
+          <a:extLst>
+            <a:ext uri="{909E8E84-426E-40DD-AFC4-6F175D3DCCD1}">
+              <a14:hiddenFill xmlns:a14="http://schemas.microsoft.com/office/drawing/2010/main">
+                <a:solidFill>
+                  <a:srgbClr val="FFFFFF"/>
+                </a:solidFill>
+              </a14:hiddenFill>
+            </a:ext>
+          </a:extLst>
+        </p:spPr>
+      </p:pic>
+      <p:sp>
+        <p:nvSpPr>
+          <p:cNvPr id="6" name="Arrow: Left-Right 5">
+            <a:extLst>
+              <a:ext uri="{FF2B5EF4-FFF2-40B4-BE49-F238E27FC236}">
+                <a16:creationId xmlns:a16="http://schemas.microsoft.com/office/drawing/2014/main" id="{91434D6A-6C17-B593-8155-ABB0406CDF06}"/>
+              </a:ext>
+            </a:extLst>
+          </p:cNvPr>
+          <p:cNvSpPr/>
+          <p:nvPr/>
+        </p:nvSpPr>
+        <p:spPr>
+          <a:xfrm>
+            <a:off x="9799028" y="2932771"/>
+            <a:ext cx="629035" cy="314450"/>
+          </a:xfrm>
+          <a:prstGeom prst="leftRightArrow">
+            <a:avLst/>
+          </a:prstGeom>
+          <a:solidFill>
+            <a:schemeClr val="accent1">
+              <a:lumMod val="20000"/>
+              <a:lumOff val="80000"/>
+            </a:schemeClr>
+          </a:solidFill>
+        </p:spPr>
+        <p:style>
+          <a:lnRef idx="2">
+            <a:schemeClr val="accent1">
+              <a:shade val="15000"/>
+            </a:schemeClr>
+          </a:lnRef>
+          <a:fillRef idx="1">
+            <a:schemeClr val="accent1"/>
+          </a:fillRef>
+          <a:effectRef idx="0">
+            <a:schemeClr val="accent1"/>
+          </a:effectRef>
+          <a:fontRef idx="minor">
+            <a:schemeClr val="lt1"/>
+          </a:fontRef>
+        </p:style>
+        <p:txBody>
+          <a:bodyPr rtlCol="0" anchor="ctr"/>
+          <a:lstStyle/>
+          <a:p>
+            <a:pPr algn="ctr"/>
+            <a:endParaRPr lang="en-US"/>
+          </a:p>
+        </p:txBody>
+      </p:sp>
+      <p:sp>
+        <p:nvSpPr>
+          <p:cNvPr id="7" name="TextBox 6">
+            <a:extLst>
+              <a:ext uri="{FF2B5EF4-FFF2-40B4-BE49-F238E27FC236}">
+                <a16:creationId xmlns:a16="http://schemas.microsoft.com/office/drawing/2014/main" id="{D7AE51BA-1953-9205-B7E6-3A975352BE85}"/>
+              </a:ext>
+            </a:extLst>
+          </p:cNvPr>
+          <p:cNvSpPr txBox="1"/>
+          <p:nvPr/>
+        </p:nvSpPr>
+        <p:spPr>
+          <a:xfrm>
+            <a:off x="8195994" y="3972747"/>
+            <a:ext cx="1316899" cy="369332"/>
+          </a:xfrm>
+          <a:prstGeom prst="rect">
+            <a:avLst/>
+          </a:prstGeom>
+          <a:noFill/>
+        </p:spPr>
+        <p:txBody>
+          <a:bodyPr wrap="none" rtlCol="0">
+            <a:spAutoFit/>
+          </a:bodyPr>
+          <a:lstStyle/>
+          <a:p>
+            <a:r>
+              <a:rPr lang="en-US" dirty="0"/>
+              <a:t>Host system</a:t>
+            </a:r>
+          </a:p>
+        </p:txBody>
+      </p:sp>
+    </p:spTree>
+    <p:extLst>
+      <p:ext uri="{BB962C8B-B14F-4D97-AF65-F5344CB8AC3E}">
+        <p14:creationId xmlns:p14="http://schemas.microsoft.com/office/powerpoint/2010/main" val="3106628324"/>
+      </p:ext>
+    </p:extLst>
+  </p:cSld>
+  <p:clrMapOvr>
+    <a:masterClrMapping/>
+  </p:clrMapOvr>
+</p:sld>
+</file>
+
+<file path=ppt/slides/slide16.xml><?xml version="1.0" encoding="utf-8"?>
+<p:sld xmlns:a="http://schemas.openxmlformats.org/drawingml/2006/main" xmlns:r="http://schemas.openxmlformats.org/officeDocument/2006/relationships" xmlns:p="http://schemas.openxmlformats.org/presentationml/2006/main">
+  <p:cSld>
+    <p:spTree>
+      <p:nvGrpSpPr>
+        <p:cNvPr id="1" name=""/>
+        <p:cNvGrpSpPr/>
+        <p:nvPr/>
+      </p:nvGrpSpPr>
+      <p:grpSpPr>
+        <a:xfrm>
+          <a:off x="0" y="0"/>
+          <a:ext cx="0" cy="0"/>
+          <a:chOff x="0" y="0"/>
+          <a:chExt cx="0" cy="0"/>
+        </a:xfrm>
+      </p:grpSpPr>
+      <p:sp>
+        <p:nvSpPr>
+          <p:cNvPr id="2" name="Title 1">
+            <a:extLst>
+              <a:ext uri="{FF2B5EF4-FFF2-40B4-BE49-F238E27FC236}">
                 <a16:creationId xmlns:a16="http://schemas.microsoft.com/office/drawing/2014/main" id="{8D570F3B-5DBC-8099-0474-17F5B6270702}"/>
               </a:ext>
             </a:extLst>
@@ -6743,7 +6936,7 @@
           <a:p>
             <a:fld id="{629637A9-119A-49DA-BD12-AAC58B377D80}" type="slidenum">
               <a:rPr lang="en-US" smtClean="0"/>
-              <a:t>15</a:t>
+              <a:t>16</a:t>
             </a:fld>
             <a:endParaRPr lang="en-US" dirty="0"/>
           </a:p>
@@ -6762,7 +6955,7 @@
 </p:sld>
 </file>
 
-<file path=ppt/slides/slide16.xml><?xml version="1.0" encoding="utf-8"?>
+<file path=ppt/slides/slide17.xml><?xml version="1.0" encoding="utf-8"?>
 <p:sld xmlns:a="http://schemas.openxmlformats.org/drawingml/2006/main" xmlns:r="http://schemas.openxmlformats.org/officeDocument/2006/relationships" xmlns:p="http://schemas.openxmlformats.org/presentationml/2006/main">
   <p:cSld>
     <p:spTree>
@@ -6875,7 +7068,7 @@
           <a:p>
             <a:fld id="{629637A9-119A-49DA-BD12-AAC58B377D80}" type="slidenum">
               <a:rPr lang="en-US" smtClean="0"/>
-              <a:t>16</a:t>
+              <a:t>17</a:t>
             </a:fld>
             <a:endParaRPr lang="en-US" dirty="0"/>
           </a:p>
@@ -6946,7 +7139,7 @@
 </p:sld>
 </file>
 
-<file path=ppt/slides/slide17.xml><?xml version="1.0" encoding="utf-8"?>
+<file path=ppt/slides/slide18.xml><?xml version="1.0" encoding="utf-8"?>
 <p:sld xmlns:a="http://schemas.openxmlformats.org/drawingml/2006/main" xmlns:r="http://schemas.openxmlformats.org/officeDocument/2006/relationships" xmlns:p="http://schemas.openxmlformats.org/presentationml/2006/main">
   <p:cSld>
     <p:spTree>
@@ -7073,7 +7266,7 @@
           <a:p>
             <a:fld id="{629637A9-119A-49DA-BD12-AAC58B377D80}" type="slidenum">
               <a:rPr lang="en-US" smtClean="0"/>
-              <a:t>17</a:t>
+              <a:t>18</a:t>
             </a:fld>
             <a:endParaRPr lang="en-US" dirty="0"/>
           </a:p>
@@ -7487,7 +7680,7 @@
 </p:sld>
 </file>
 
-<file path=ppt/slides/slide18.xml><?xml version="1.0" encoding="utf-8"?>
+<file path=ppt/slides/slide19.xml><?xml version="1.0" encoding="utf-8"?>
 <p:sld xmlns:a="http://schemas.openxmlformats.org/drawingml/2006/main" xmlns:r="http://schemas.openxmlformats.org/officeDocument/2006/relationships" xmlns:p="http://schemas.openxmlformats.org/presentationml/2006/main">
   <p:cSld>
     <p:spTree>
@@ -7555,7 +7748,7 @@
           <a:p>
             <a:fld id="{629637A9-119A-49DA-BD12-AAC58B377D80}" type="slidenum">
               <a:rPr lang="en-US" smtClean="0"/>
-              <a:t>18</a:t>
+              <a:t>19</a:t>
             </a:fld>
             <a:endParaRPr lang="en-US" dirty="0"/>
           </a:p>
@@ -8096,896 +8289,6 @@
     <p:extLst>
       <p:ext uri="{BB962C8B-B14F-4D97-AF65-F5344CB8AC3E}">
         <p14:creationId xmlns:p14="http://schemas.microsoft.com/office/powerpoint/2010/main" val="3263513524"/>
-      </p:ext>
-    </p:extLst>
-  </p:cSld>
-  <p:clrMapOvr>
-    <a:masterClrMapping/>
-  </p:clrMapOvr>
-</p:sld>
-</file>
-
-<file path=ppt/slides/slide19.xml><?xml version="1.0" encoding="utf-8"?>
-<p:sld xmlns:a="http://schemas.openxmlformats.org/drawingml/2006/main" xmlns:r="http://schemas.openxmlformats.org/officeDocument/2006/relationships" xmlns:p="http://schemas.openxmlformats.org/presentationml/2006/main">
-  <p:cSld>
-    <p:spTree>
-      <p:nvGrpSpPr>
-        <p:cNvPr id="1" name="">
-          <a:extLst>
-            <a:ext uri="{FF2B5EF4-FFF2-40B4-BE49-F238E27FC236}">
-              <a16:creationId xmlns:a16="http://schemas.microsoft.com/office/drawing/2014/main" id="{4B8C3C52-335B-29E0-BE43-B8BD413685EF}"/>
-            </a:ext>
-          </a:extLst>
-        </p:cNvPr>
-        <p:cNvGrpSpPr/>
-        <p:nvPr/>
-      </p:nvGrpSpPr>
-      <p:grpSpPr>
-        <a:xfrm>
-          <a:off x="0" y="0"/>
-          <a:ext cx="0" cy="0"/>
-          <a:chOff x="0" y="0"/>
-          <a:chExt cx="0" cy="0"/>
-        </a:xfrm>
-      </p:grpSpPr>
-      <p:sp>
-        <p:nvSpPr>
-          <p:cNvPr id="2" name="Title 1">
-            <a:extLst>
-              <a:ext uri="{FF2B5EF4-FFF2-40B4-BE49-F238E27FC236}">
-                <a16:creationId xmlns:a16="http://schemas.microsoft.com/office/drawing/2014/main" id="{749CD7CA-21FA-EDF3-BA4C-1A7999F5AD9F}"/>
-              </a:ext>
-            </a:extLst>
-          </p:cNvPr>
-          <p:cNvSpPr>
-            <a:spLocks noGrp="1"/>
-          </p:cNvSpPr>
-          <p:nvPr>
-            <p:ph type="title"/>
-          </p:nvPr>
-        </p:nvSpPr>
-        <p:spPr/>
-        <p:txBody>
-          <a:bodyPr/>
-          <a:lstStyle/>
-          <a:p>
-            <a:r>
-              <a:rPr lang="en-US" dirty="0"/>
-              <a:t>General Purpose vs. Custom</a:t>
-            </a:r>
-          </a:p>
-        </p:txBody>
-      </p:sp>
-      <p:sp>
-        <p:nvSpPr>
-          <p:cNvPr id="4" name="Slide Number Placeholder 3">
-            <a:extLst>
-              <a:ext uri="{FF2B5EF4-FFF2-40B4-BE49-F238E27FC236}">
-                <a16:creationId xmlns:a16="http://schemas.microsoft.com/office/drawing/2014/main" id="{133CA96F-A1F5-2FD8-28A7-6310F3D7EB84}"/>
-              </a:ext>
-            </a:extLst>
-          </p:cNvPr>
-          <p:cNvSpPr>
-            <a:spLocks noGrp="1"/>
-          </p:cNvSpPr>
-          <p:nvPr>
-            <p:ph type="sldNum" sz="quarter" idx="12"/>
-          </p:nvPr>
-        </p:nvSpPr>
-        <p:spPr/>
-        <p:txBody>
-          <a:bodyPr/>
-          <a:lstStyle/>
-          <a:p>
-            <a:fld id="{629637A9-119A-49DA-BD12-AAC58B377D80}" type="slidenum">
-              <a:rPr lang="en-US" smtClean="0"/>
-              <a:t>19</a:t>
-            </a:fld>
-            <a:endParaRPr lang="en-US" dirty="0"/>
-          </a:p>
-        </p:txBody>
-      </p:sp>
-      <p:pic>
-        <p:nvPicPr>
-          <p:cNvPr id="2050" name="Picture 2" descr="A Beginner's Guide to NVIDIA GPUs in ...">
-            <a:extLst>
-              <a:ext uri="{FF2B5EF4-FFF2-40B4-BE49-F238E27FC236}">
-                <a16:creationId xmlns:a16="http://schemas.microsoft.com/office/drawing/2014/main" id="{6E334859-4FD4-1613-91B8-E7708AD4427E}"/>
-              </a:ext>
-            </a:extLst>
-          </p:cNvPr>
-          <p:cNvPicPr>
-            <a:picLocks noChangeAspect="1" noChangeArrowheads="1"/>
-          </p:cNvPicPr>
-          <p:nvPr/>
-        </p:nvPicPr>
-        <p:blipFill rotWithShape="1">
-          <a:blip r:embed="rId2">
-            <a:extLst>
-              <a:ext uri="{28A0092B-C50C-407E-A947-70E740481C1C}">
-                <a14:useLocalDpi xmlns:a14="http://schemas.microsoft.com/office/drawing/2010/main" val="0"/>
-              </a:ext>
-            </a:extLst>
-          </a:blip>
-          <a:srcRect l="18341" r="19919"/>
-          <a:stretch>
-            <a:fillRect/>
-          </a:stretch>
-        </p:blipFill>
-        <p:spPr bwMode="auto">
-          <a:xfrm>
-            <a:off x="5155614" y="1573634"/>
-            <a:ext cx="1143011" cy="1040212"/>
-          </a:xfrm>
-          <a:prstGeom prst="rect">
-            <a:avLst/>
-          </a:prstGeom>
-          <a:noFill/>
-          <a:extLst>
-            <a:ext uri="{909E8E84-426E-40DD-AFC4-6F175D3DCCD1}">
-              <a14:hiddenFill xmlns:a14="http://schemas.microsoft.com/office/drawing/2010/main">
-                <a:solidFill>
-                  <a:srgbClr val="FFFFFF"/>
-                </a:solidFill>
-              </a14:hiddenFill>
-            </a:ext>
-          </a:extLst>
-        </p:spPr>
-      </p:pic>
-      <p:pic>
-        <p:nvPicPr>
-          <p:cNvPr id="2052" name="Picture 4" descr="Intel BX80673I97940X Core Processor ...">
-            <a:extLst>
-              <a:ext uri="{FF2B5EF4-FFF2-40B4-BE49-F238E27FC236}">
-                <a16:creationId xmlns:a16="http://schemas.microsoft.com/office/drawing/2014/main" id="{0D83F79C-FD65-CAB2-F43B-CF5013B1FB24}"/>
-              </a:ext>
-            </a:extLst>
-          </p:cNvPr>
-          <p:cNvPicPr>
-            <a:picLocks noChangeAspect="1" noChangeArrowheads="1"/>
-          </p:cNvPicPr>
-          <p:nvPr/>
-        </p:nvPicPr>
-        <p:blipFill>
-          <a:blip r:embed="rId3">
-            <a:extLst>
-              <a:ext uri="{28A0092B-C50C-407E-A947-70E740481C1C}">
-                <a14:useLocalDpi xmlns:a14="http://schemas.microsoft.com/office/drawing/2010/main" val="0"/>
-              </a:ext>
-            </a:extLst>
-          </a:blip>
-          <a:srcRect/>
-          <a:stretch>
-            <a:fillRect/>
-          </a:stretch>
-        </p:blipFill>
-        <p:spPr bwMode="auto">
-          <a:xfrm>
-            <a:off x="1102533" y="1744548"/>
-            <a:ext cx="1044724" cy="836612"/>
-          </a:xfrm>
-          <a:prstGeom prst="rect">
-            <a:avLst/>
-          </a:prstGeom>
-          <a:noFill/>
-          <a:extLst>
-            <a:ext uri="{909E8E84-426E-40DD-AFC4-6F175D3DCCD1}">
-              <a14:hiddenFill xmlns:a14="http://schemas.microsoft.com/office/drawing/2010/main">
-                <a:solidFill>
-                  <a:srgbClr val="FFFFFF"/>
-                </a:solidFill>
-              </a14:hiddenFill>
-            </a:ext>
-          </a:extLst>
-        </p:spPr>
-      </p:pic>
-      <p:sp>
-        <p:nvSpPr>
-          <p:cNvPr id="5" name="TextBox 4">
-            <a:extLst>
-              <a:ext uri="{FF2B5EF4-FFF2-40B4-BE49-F238E27FC236}">
-                <a16:creationId xmlns:a16="http://schemas.microsoft.com/office/drawing/2014/main" id="{44CC9FA8-D877-BBB0-41E7-9B89EF5CADDC}"/>
-              </a:ext>
-            </a:extLst>
-          </p:cNvPr>
-          <p:cNvSpPr txBox="1"/>
-          <p:nvPr/>
-        </p:nvSpPr>
-        <p:spPr>
-          <a:xfrm>
-            <a:off x="503295" y="2579435"/>
-            <a:ext cx="2269808" cy="369332"/>
-          </a:xfrm>
-          <a:prstGeom prst="rect">
-            <a:avLst/>
-          </a:prstGeom>
-          <a:noFill/>
-        </p:spPr>
-        <p:txBody>
-          <a:bodyPr wrap="square" rtlCol="0">
-            <a:spAutoFit/>
-          </a:bodyPr>
-          <a:lstStyle/>
-          <a:p>
-            <a:r>
-              <a:rPr lang="en-US" dirty="0">
-                <a:solidFill>
-                  <a:schemeClr val="accent1">
-                    <a:lumMod val="75000"/>
-                  </a:schemeClr>
-                </a:solidFill>
-              </a:rPr>
-              <a:t>General purpose CPU</a:t>
-            </a:r>
-            <a:endParaRPr lang="en-US" dirty="0"/>
-          </a:p>
-        </p:txBody>
-      </p:sp>
-      <p:sp>
-        <p:nvSpPr>
-          <p:cNvPr id="6" name="TextBox 5">
-            <a:extLst>
-              <a:ext uri="{FF2B5EF4-FFF2-40B4-BE49-F238E27FC236}">
-                <a16:creationId xmlns:a16="http://schemas.microsoft.com/office/drawing/2014/main" id="{2F5C6E09-37A7-CBBA-791C-161838250DC1}"/>
-              </a:ext>
-            </a:extLst>
-          </p:cNvPr>
-          <p:cNvSpPr txBox="1"/>
-          <p:nvPr/>
-        </p:nvSpPr>
-        <p:spPr>
-          <a:xfrm>
-            <a:off x="5479586" y="2579435"/>
-            <a:ext cx="979171" cy="369332"/>
-          </a:xfrm>
-          <a:prstGeom prst="rect">
-            <a:avLst/>
-          </a:prstGeom>
-          <a:noFill/>
-        </p:spPr>
-        <p:txBody>
-          <a:bodyPr wrap="square" rtlCol="0">
-            <a:spAutoFit/>
-          </a:bodyPr>
-          <a:lstStyle/>
-          <a:p>
-            <a:r>
-              <a:rPr lang="en-US" dirty="0">
-                <a:solidFill>
-                  <a:schemeClr val="accent1">
-                    <a:lumMod val="75000"/>
-                  </a:schemeClr>
-                </a:solidFill>
-              </a:rPr>
-              <a:t>GPU</a:t>
-            </a:r>
-            <a:endParaRPr lang="en-US" dirty="0"/>
-          </a:p>
-        </p:txBody>
-      </p:sp>
-      <p:sp>
-        <p:nvSpPr>
-          <p:cNvPr id="7" name="TextBox 6">
-            <a:extLst>
-              <a:ext uri="{FF2B5EF4-FFF2-40B4-BE49-F238E27FC236}">
-                <a16:creationId xmlns:a16="http://schemas.microsoft.com/office/drawing/2014/main" id="{D5E7CD8A-9092-E70C-0C59-0DDE5D74161F}"/>
-              </a:ext>
-            </a:extLst>
-          </p:cNvPr>
-          <p:cNvSpPr txBox="1"/>
-          <p:nvPr/>
-        </p:nvSpPr>
-        <p:spPr>
-          <a:xfrm>
-            <a:off x="7580081" y="2579435"/>
-            <a:ext cx="1471772" cy="369332"/>
-          </a:xfrm>
-          <a:prstGeom prst="rect">
-            <a:avLst/>
-          </a:prstGeom>
-          <a:noFill/>
-        </p:spPr>
-        <p:txBody>
-          <a:bodyPr wrap="square" rtlCol="0">
-            <a:spAutoFit/>
-          </a:bodyPr>
-          <a:lstStyle/>
-          <a:p>
-            <a:r>
-              <a:rPr lang="en-US" dirty="0">
-                <a:solidFill>
-                  <a:schemeClr val="accent1">
-                    <a:lumMod val="75000"/>
-                  </a:schemeClr>
-                </a:solidFill>
-              </a:rPr>
-              <a:t>FPGA</a:t>
-            </a:r>
-            <a:endParaRPr lang="en-US" dirty="0"/>
-          </a:p>
-        </p:txBody>
-      </p:sp>
-      <p:sp>
-        <p:nvSpPr>
-          <p:cNvPr id="8" name="TextBox 7">
-            <a:extLst>
-              <a:ext uri="{FF2B5EF4-FFF2-40B4-BE49-F238E27FC236}">
-                <a16:creationId xmlns:a16="http://schemas.microsoft.com/office/drawing/2014/main" id="{72A1919C-A593-0E2B-5C81-1E50887CCCB1}"/>
-              </a:ext>
-            </a:extLst>
-          </p:cNvPr>
-          <p:cNvSpPr txBox="1"/>
-          <p:nvPr/>
-        </p:nvSpPr>
-        <p:spPr>
-          <a:xfrm>
-            <a:off x="9929016" y="2579435"/>
-            <a:ext cx="1642040" cy="369332"/>
-          </a:xfrm>
-          <a:prstGeom prst="rect">
-            <a:avLst/>
-          </a:prstGeom>
-          <a:noFill/>
-        </p:spPr>
-        <p:txBody>
-          <a:bodyPr wrap="square" rtlCol="0">
-            <a:spAutoFit/>
-          </a:bodyPr>
-          <a:lstStyle/>
-          <a:p>
-            <a:r>
-              <a:rPr lang="en-US" dirty="0">
-                <a:solidFill>
-                  <a:schemeClr val="accent1">
-                    <a:lumMod val="75000"/>
-                  </a:schemeClr>
-                </a:solidFill>
-              </a:rPr>
-              <a:t>Custom ASIC</a:t>
-            </a:r>
-          </a:p>
-        </p:txBody>
-      </p:sp>
-      <p:sp>
-        <p:nvSpPr>
-          <p:cNvPr id="9" name="TextBox 8">
-            <a:extLst>
-              <a:ext uri="{FF2B5EF4-FFF2-40B4-BE49-F238E27FC236}">
-                <a16:creationId xmlns:a16="http://schemas.microsoft.com/office/drawing/2014/main" id="{A533AE82-8F47-477F-4A6B-66CF37FE473E}"/>
-              </a:ext>
-            </a:extLst>
-          </p:cNvPr>
-          <p:cNvSpPr txBox="1"/>
-          <p:nvPr/>
-        </p:nvSpPr>
-        <p:spPr>
-          <a:xfrm>
-            <a:off x="3448923" y="2579435"/>
-            <a:ext cx="979172" cy="369332"/>
-          </a:xfrm>
-          <a:prstGeom prst="rect">
-            <a:avLst/>
-          </a:prstGeom>
-          <a:noFill/>
-        </p:spPr>
-        <p:txBody>
-          <a:bodyPr wrap="square" rtlCol="0">
-            <a:spAutoFit/>
-          </a:bodyPr>
-          <a:lstStyle/>
-          <a:p>
-            <a:r>
-              <a:rPr lang="en-US" dirty="0">
-                <a:solidFill>
-                  <a:schemeClr val="accent1">
-                    <a:lumMod val="75000"/>
-                  </a:schemeClr>
-                </a:solidFill>
-              </a:rPr>
-              <a:t>DSP</a:t>
-            </a:r>
-            <a:endParaRPr lang="en-US" dirty="0"/>
-          </a:p>
-        </p:txBody>
-      </p:sp>
-      <p:pic>
-        <p:nvPicPr>
-          <p:cNvPr id="4098" name="Picture 2" descr="What is a DSP chip？-Perceptive Electronic Components">
-            <a:extLst>
-              <a:ext uri="{FF2B5EF4-FFF2-40B4-BE49-F238E27FC236}">
-                <a16:creationId xmlns:a16="http://schemas.microsoft.com/office/drawing/2014/main" id="{BDD208B4-800C-FB6B-C35C-D1A90AE72DF1}"/>
-              </a:ext>
-            </a:extLst>
-          </p:cNvPr>
-          <p:cNvPicPr>
-            <a:picLocks noChangeAspect="1" noChangeArrowheads="1"/>
-          </p:cNvPicPr>
-          <p:nvPr/>
-        </p:nvPicPr>
-        <p:blipFill>
-          <a:blip r:embed="rId4">
-            <a:extLst>
-              <a:ext uri="{28A0092B-C50C-407E-A947-70E740481C1C}">
-                <a14:useLocalDpi xmlns:a14="http://schemas.microsoft.com/office/drawing/2010/main" val="0"/>
-              </a:ext>
-            </a:extLst>
-          </a:blip>
-          <a:srcRect/>
-          <a:stretch>
-            <a:fillRect/>
-          </a:stretch>
-        </p:blipFill>
-        <p:spPr bwMode="auto">
-          <a:xfrm>
-            <a:off x="3296832" y="1744548"/>
-            <a:ext cx="957920" cy="698385"/>
-          </a:xfrm>
-          <a:prstGeom prst="rect">
-            <a:avLst/>
-          </a:prstGeom>
-          <a:noFill/>
-          <a:extLst>
-            <a:ext uri="{909E8E84-426E-40DD-AFC4-6F175D3DCCD1}">
-              <a14:hiddenFill xmlns:a14="http://schemas.microsoft.com/office/drawing/2010/main">
-                <a:solidFill>
-                  <a:srgbClr val="FFFFFF"/>
-                </a:solidFill>
-              </a14:hiddenFill>
-            </a:ext>
-          </a:extLst>
-        </p:spPr>
-      </p:pic>
-      <p:pic>
-        <p:nvPicPr>
-          <p:cNvPr id="4100" name="Picture 4" descr="A Guide to Xilinx FPGA Naming Standards">
-            <a:extLst>
-              <a:ext uri="{FF2B5EF4-FFF2-40B4-BE49-F238E27FC236}">
-                <a16:creationId xmlns:a16="http://schemas.microsoft.com/office/drawing/2014/main" id="{379B6A6B-825D-56F0-B37B-E4098A17FC79}"/>
-              </a:ext>
-            </a:extLst>
-          </p:cNvPr>
-          <p:cNvPicPr>
-            <a:picLocks noChangeAspect="1" noChangeArrowheads="1"/>
-          </p:cNvPicPr>
-          <p:nvPr/>
-        </p:nvPicPr>
-        <p:blipFill>
-          <a:blip r:embed="rId5">
-            <a:extLst>
-              <a:ext uri="{28A0092B-C50C-407E-A947-70E740481C1C}">
-                <a14:useLocalDpi xmlns:a14="http://schemas.microsoft.com/office/drawing/2010/main" val="0"/>
-              </a:ext>
-            </a:extLst>
-          </a:blip>
-          <a:srcRect/>
-          <a:stretch>
-            <a:fillRect/>
-          </a:stretch>
-        </p:blipFill>
-        <p:spPr bwMode="auto">
-          <a:xfrm>
-            <a:off x="7497190" y="1744548"/>
-            <a:ext cx="1029614" cy="682679"/>
-          </a:xfrm>
-          <a:prstGeom prst="rect">
-            <a:avLst/>
-          </a:prstGeom>
-          <a:noFill/>
-          <a:extLst>
-            <a:ext uri="{909E8E84-426E-40DD-AFC4-6F175D3DCCD1}">
-              <a14:hiddenFill xmlns:a14="http://schemas.microsoft.com/office/drawing/2010/main">
-                <a:solidFill>
-                  <a:srgbClr val="FFFFFF"/>
-                </a:solidFill>
-              </a14:hiddenFill>
-            </a:ext>
-          </a:extLst>
-        </p:spPr>
-      </p:pic>
-      <p:pic>
-        <p:nvPicPr>
-          <p:cNvPr id="4102" name="Picture 6" descr="Plot of ASIC layout submitted for ...">
-            <a:extLst>
-              <a:ext uri="{FF2B5EF4-FFF2-40B4-BE49-F238E27FC236}">
-                <a16:creationId xmlns:a16="http://schemas.microsoft.com/office/drawing/2014/main" id="{B5A80F2A-32AD-2542-7937-F35192C891B2}"/>
-              </a:ext>
-            </a:extLst>
-          </p:cNvPr>
-          <p:cNvPicPr>
-            <a:picLocks noChangeAspect="1" noChangeArrowheads="1"/>
-          </p:cNvPicPr>
-          <p:nvPr/>
-        </p:nvPicPr>
-        <p:blipFill>
-          <a:blip r:embed="rId6">
-            <a:extLst>
-              <a:ext uri="{28A0092B-C50C-407E-A947-70E740481C1C}">
-                <a14:useLocalDpi xmlns:a14="http://schemas.microsoft.com/office/drawing/2010/main" val="0"/>
-              </a:ext>
-            </a:extLst>
-          </a:blip>
-          <a:srcRect/>
-          <a:stretch>
-            <a:fillRect/>
-          </a:stretch>
-        </p:blipFill>
-        <p:spPr bwMode="auto">
-          <a:xfrm>
-            <a:off x="10151658" y="1573634"/>
-            <a:ext cx="880762" cy="876848"/>
-          </a:xfrm>
-          <a:prstGeom prst="rect">
-            <a:avLst/>
-          </a:prstGeom>
-          <a:noFill/>
-          <a:extLst>
-            <a:ext uri="{909E8E84-426E-40DD-AFC4-6F175D3DCCD1}">
-              <a14:hiddenFill xmlns:a14="http://schemas.microsoft.com/office/drawing/2010/main">
-                <a:solidFill>
-                  <a:srgbClr val="FFFFFF"/>
-                </a:solidFill>
-              </a14:hiddenFill>
-            </a:ext>
-          </a:extLst>
-        </p:spPr>
-      </p:pic>
-      <p:sp>
-        <p:nvSpPr>
-          <p:cNvPr id="3" name="Arrow: Right 2">
-            <a:extLst>
-              <a:ext uri="{FF2B5EF4-FFF2-40B4-BE49-F238E27FC236}">
-                <a16:creationId xmlns:a16="http://schemas.microsoft.com/office/drawing/2014/main" id="{6E15B4DD-4CE7-2A33-BAA3-5B6DC78D2AE2}"/>
-              </a:ext>
-            </a:extLst>
-          </p:cNvPr>
-          <p:cNvSpPr/>
-          <p:nvPr/>
-        </p:nvSpPr>
-        <p:spPr>
-          <a:xfrm rot="10800000">
-            <a:off x="1838458" y="3272918"/>
-            <a:ext cx="978408" cy="484632"/>
-          </a:xfrm>
-          <a:prstGeom prst="rightArrow">
-            <a:avLst/>
-          </a:prstGeom>
-          <a:gradFill flip="none" rotWithShape="1">
-            <a:gsLst>
-              <a:gs pos="0">
-                <a:schemeClr val="accent1">
-                  <a:tint val="66000"/>
-                  <a:satMod val="160000"/>
-                </a:schemeClr>
-              </a:gs>
-              <a:gs pos="50000">
-                <a:schemeClr val="accent1">
-                  <a:tint val="44500"/>
-                  <a:satMod val="160000"/>
-                </a:schemeClr>
-              </a:gs>
-              <a:gs pos="100000">
-                <a:schemeClr val="accent1">
-                  <a:tint val="23500"/>
-                  <a:satMod val="160000"/>
-                </a:schemeClr>
-              </a:gs>
-            </a:gsLst>
-            <a:lin ang="10800000" scaled="1"/>
-            <a:tileRect/>
-          </a:gradFill>
-          <a:ln w="9525"/>
-        </p:spPr>
-        <p:style>
-          <a:lnRef idx="2">
-            <a:schemeClr val="accent1">
-              <a:shade val="15000"/>
-            </a:schemeClr>
-          </a:lnRef>
-          <a:fillRef idx="1">
-            <a:schemeClr val="accent1"/>
-          </a:fillRef>
-          <a:effectRef idx="0">
-            <a:schemeClr val="accent1"/>
-          </a:effectRef>
-          <a:fontRef idx="minor">
-            <a:schemeClr val="lt1"/>
-          </a:fontRef>
-        </p:style>
-        <p:txBody>
-          <a:bodyPr rtlCol="0" anchor="ctr"/>
-          <a:lstStyle/>
-          <a:p>
-            <a:pPr algn="ctr"/>
-            <a:endParaRPr lang="en-US"/>
-          </a:p>
-        </p:txBody>
-      </p:sp>
-      <p:sp>
-        <p:nvSpPr>
-          <p:cNvPr id="10" name="Arrow: Right 9">
-            <a:extLst>
-              <a:ext uri="{FF2B5EF4-FFF2-40B4-BE49-F238E27FC236}">
-                <a16:creationId xmlns:a16="http://schemas.microsoft.com/office/drawing/2014/main" id="{55706709-DF52-47C8-7657-7A6CADEA268B}"/>
-              </a:ext>
-            </a:extLst>
-          </p:cNvPr>
-          <p:cNvSpPr/>
-          <p:nvPr/>
-        </p:nvSpPr>
-        <p:spPr>
-          <a:xfrm>
-            <a:off x="8614135" y="3275875"/>
-            <a:ext cx="978408" cy="484632"/>
-          </a:xfrm>
-          <a:prstGeom prst="rightArrow">
-            <a:avLst/>
-          </a:prstGeom>
-          <a:gradFill flip="none" rotWithShape="1">
-            <a:gsLst>
-              <a:gs pos="0">
-                <a:schemeClr val="accent1">
-                  <a:tint val="66000"/>
-                  <a:satMod val="160000"/>
-                </a:schemeClr>
-              </a:gs>
-              <a:gs pos="50000">
-                <a:schemeClr val="accent1">
-                  <a:tint val="44500"/>
-                  <a:satMod val="160000"/>
-                </a:schemeClr>
-              </a:gs>
-              <a:gs pos="100000">
-                <a:schemeClr val="accent1">
-                  <a:tint val="23500"/>
-                  <a:satMod val="160000"/>
-                </a:schemeClr>
-              </a:gs>
-            </a:gsLst>
-            <a:lin ang="10800000" scaled="1"/>
-            <a:tileRect/>
-          </a:gradFill>
-          <a:ln w="9525"/>
-        </p:spPr>
-        <p:style>
-          <a:lnRef idx="2">
-            <a:schemeClr val="accent1">
-              <a:shade val="15000"/>
-            </a:schemeClr>
-          </a:lnRef>
-          <a:fillRef idx="1">
-            <a:schemeClr val="accent1"/>
-          </a:fillRef>
-          <a:effectRef idx="0">
-            <a:schemeClr val="accent1"/>
-          </a:effectRef>
-          <a:fontRef idx="minor">
-            <a:schemeClr val="lt1"/>
-          </a:fontRef>
-        </p:style>
-        <p:txBody>
-          <a:bodyPr rtlCol="0" anchor="ctr"/>
-          <a:lstStyle/>
-          <a:p>
-            <a:pPr algn="ctr"/>
-            <a:endParaRPr lang="en-US"/>
-          </a:p>
-        </p:txBody>
-      </p:sp>
-      <p:sp>
-        <p:nvSpPr>
-          <p:cNvPr id="11" name="TextBox 10">
-            <a:extLst>
-              <a:ext uri="{FF2B5EF4-FFF2-40B4-BE49-F238E27FC236}">
-                <a16:creationId xmlns:a16="http://schemas.microsoft.com/office/drawing/2014/main" id="{964AC2C1-B658-1CDD-25BC-E1EEAB5DB3EE}"/>
-              </a:ext>
-            </a:extLst>
-          </p:cNvPr>
-          <p:cNvSpPr txBox="1"/>
-          <p:nvPr/>
-        </p:nvSpPr>
-        <p:spPr>
-          <a:xfrm>
-            <a:off x="908046" y="3880575"/>
-            <a:ext cx="4660904" cy="1077218"/>
-          </a:xfrm>
-          <a:prstGeom prst="rect">
-            <a:avLst/>
-          </a:prstGeom>
-          <a:noFill/>
-        </p:spPr>
-        <p:txBody>
-          <a:bodyPr wrap="square" rtlCol="0">
-            <a:spAutoFit/>
-          </a:bodyPr>
-          <a:lstStyle/>
-          <a:p>
-            <a:r>
-              <a:rPr lang="en-US" sz="1600" dirty="0"/>
-              <a:t>General purpose,</a:t>
-            </a:r>
-            <a:br>
-              <a:rPr lang="en-US" sz="1600" dirty="0"/>
-            </a:br>
-            <a:r>
-              <a:rPr lang="en-US" sz="1600" dirty="0"/>
-              <a:t>Applies in many domains,</a:t>
-            </a:r>
-            <a:br>
-              <a:rPr lang="en-US" sz="1600" dirty="0"/>
-            </a:br>
-            <a:r>
-              <a:rPr lang="en-US" sz="1600" dirty="0"/>
-              <a:t>Re-programmed with software,</a:t>
-            </a:r>
-            <a:br>
-              <a:rPr lang="en-US" sz="1600" dirty="0"/>
-            </a:br>
-            <a:r>
-              <a:rPr lang="en-US" sz="1600" dirty="0"/>
-              <a:t>Performance via SW optimization, multi-cores</a:t>
-            </a:r>
-          </a:p>
-        </p:txBody>
-      </p:sp>
-      <p:sp>
-        <p:nvSpPr>
-          <p:cNvPr id="13" name="TextBox 12">
-            <a:extLst>
-              <a:ext uri="{FF2B5EF4-FFF2-40B4-BE49-F238E27FC236}">
-                <a16:creationId xmlns:a16="http://schemas.microsoft.com/office/drawing/2014/main" id="{BE6FF7D6-23CC-6A53-696A-72A0EE800819}"/>
-              </a:ext>
-            </a:extLst>
-          </p:cNvPr>
-          <p:cNvSpPr txBox="1"/>
-          <p:nvPr/>
-        </p:nvSpPr>
-        <p:spPr>
-          <a:xfrm>
-            <a:off x="7724989" y="3960927"/>
-            <a:ext cx="3155263" cy="1323439"/>
-          </a:xfrm>
-          <a:prstGeom prst="rect">
-            <a:avLst/>
-          </a:prstGeom>
-          <a:noFill/>
-        </p:spPr>
-        <p:txBody>
-          <a:bodyPr wrap="square" rtlCol="0">
-            <a:spAutoFit/>
-          </a:bodyPr>
-          <a:lstStyle/>
-          <a:p>
-            <a:r>
-              <a:rPr lang="en-US" sz="1600" dirty="0"/>
-              <a:t>Domain specific,</a:t>
-            </a:r>
-            <a:br>
-              <a:rPr lang="en-US" sz="1600" dirty="0"/>
-            </a:br>
-            <a:r>
-              <a:rPr lang="en-US" sz="1600" dirty="0"/>
-              <a:t>HW optimized for specific task,</a:t>
-            </a:r>
-            <a:br>
-              <a:rPr lang="en-US" sz="1600" dirty="0"/>
-            </a:br>
-            <a:r>
-              <a:rPr lang="en-US" sz="1600" dirty="0"/>
-              <a:t>Can enable:</a:t>
-            </a:r>
-          </a:p>
-          <a:p>
-            <a:pPr marL="285750" indent="-285750">
-              <a:buFont typeface="Arial" panose="020B0604020202020204" pitchFamily="34" charset="0"/>
-              <a:buChar char="•"/>
-            </a:pPr>
-            <a:r>
-              <a:rPr lang="en-US" sz="1600" dirty="0"/>
-              <a:t>Higher performance, </a:t>
-            </a:r>
-          </a:p>
-          <a:p>
-            <a:pPr marL="285750" indent="-285750">
-              <a:buFont typeface="Arial" panose="020B0604020202020204" pitchFamily="34" charset="0"/>
-              <a:buChar char="•"/>
-            </a:pPr>
-            <a:r>
-              <a:rPr lang="en-US" sz="1600" dirty="0"/>
-              <a:t>Lower power / OP, size</a:t>
-            </a:r>
-          </a:p>
-        </p:txBody>
-      </p:sp>
-      <p:sp>
-        <p:nvSpPr>
-          <p:cNvPr id="14" name="TextBox 13">
-            <a:extLst>
-              <a:ext uri="{FF2B5EF4-FFF2-40B4-BE49-F238E27FC236}">
-                <a16:creationId xmlns:a16="http://schemas.microsoft.com/office/drawing/2014/main" id="{FEF30264-AAC2-89FE-38BD-3F6B9C214ADC}"/>
-              </a:ext>
-            </a:extLst>
-          </p:cNvPr>
-          <p:cNvSpPr txBox="1"/>
-          <p:nvPr/>
-        </p:nvSpPr>
-        <p:spPr>
-          <a:xfrm>
-            <a:off x="8202649" y="5633785"/>
-            <a:ext cx="2288290" cy="369332"/>
-          </a:xfrm>
-          <a:prstGeom prst="rect">
-            <a:avLst/>
-          </a:prstGeom>
-          <a:noFill/>
-        </p:spPr>
-        <p:txBody>
-          <a:bodyPr wrap="square" rtlCol="0">
-            <a:spAutoFit/>
-          </a:bodyPr>
-          <a:lstStyle/>
-          <a:p>
-            <a:r>
-              <a:rPr lang="en-US" dirty="0">
-                <a:solidFill>
-                  <a:schemeClr val="tx2">
-                    <a:lumMod val="60000"/>
-                    <a:lumOff val="40000"/>
-                  </a:schemeClr>
-                </a:solidFill>
-              </a:rPr>
-              <a:t>Focus of this course</a:t>
-            </a:r>
-          </a:p>
-        </p:txBody>
-      </p:sp>
-      <p:sp>
-        <p:nvSpPr>
-          <p:cNvPr id="15" name="Left Brace 14">
-            <a:extLst>
-              <a:ext uri="{FF2B5EF4-FFF2-40B4-BE49-F238E27FC236}">
-                <a16:creationId xmlns:a16="http://schemas.microsoft.com/office/drawing/2014/main" id="{D2512B1A-E24A-F751-05D0-C1A07CEC2CBB}"/>
-              </a:ext>
-            </a:extLst>
-          </p:cNvPr>
-          <p:cNvSpPr/>
-          <p:nvPr/>
-        </p:nvSpPr>
-        <p:spPr>
-          <a:xfrm rot="16200000">
-            <a:off x="9264362" y="3546560"/>
-            <a:ext cx="311150" cy="3786763"/>
-          </a:xfrm>
-          <a:prstGeom prst="leftBrace">
-            <a:avLst/>
-          </a:prstGeom>
-        </p:spPr>
-        <p:style>
-          <a:lnRef idx="1">
-            <a:schemeClr val="accent1"/>
-          </a:lnRef>
-          <a:fillRef idx="0">
-            <a:schemeClr val="accent1"/>
-          </a:fillRef>
-          <a:effectRef idx="0">
-            <a:schemeClr val="accent1"/>
-          </a:effectRef>
-          <a:fontRef idx="minor">
-            <a:schemeClr val="tx1"/>
-          </a:fontRef>
-        </p:style>
-        <p:txBody>
-          <a:bodyPr rtlCol="0" anchor="ctr"/>
-          <a:lstStyle/>
-          <a:p>
-            <a:pPr algn="ctr"/>
-            <a:endParaRPr lang="en-US" dirty="0"/>
-          </a:p>
-        </p:txBody>
-      </p:sp>
-    </p:spTree>
-    <p:extLst>
-      <p:ext uri="{BB962C8B-B14F-4D97-AF65-F5344CB8AC3E}">
-        <p14:creationId xmlns:p14="http://schemas.microsoft.com/office/powerpoint/2010/main" val="534400385"/>
       </p:ext>
     </p:extLst>
   </p:cSld>
@@ -9184,7 +8487,13 @@
   <p:cSld>
     <p:spTree>
       <p:nvGrpSpPr>
-        <p:cNvPr id="1" name=""/>
+        <p:cNvPr id="1" name="">
+          <a:extLst>
+            <a:ext uri="{FF2B5EF4-FFF2-40B4-BE49-F238E27FC236}">
+              <a16:creationId xmlns:a16="http://schemas.microsoft.com/office/drawing/2014/main" id="{4B8C3C52-335B-29E0-BE43-B8BD413685EF}"/>
+            </a:ext>
+          </a:extLst>
+        </p:cNvPr>
         <p:cNvGrpSpPr/>
         <p:nvPr/>
       </p:nvGrpSpPr>
@@ -9201,7 +8510,7 @@
           <p:cNvPr id="2" name="Title 1">
             <a:extLst>
               <a:ext uri="{FF2B5EF4-FFF2-40B4-BE49-F238E27FC236}">
-                <a16:creationId xmlns:a16="http://schemas.microsoft.com/office/drawing/2014/main" id="{D3438B30-FC83-FD9A-583F-510175BC5943}"/>
+                <a16:creationId xmlns:a16="http://schemas.microsoft.com/office/drawing/2014/main" id="{749CD7CA-21FA-EDF3-BA4C-1A7999F5AD9F}"/>
               </a:ext>
             </a:extLst>
           </p:cNvPr>
@@ -9219,7 +8528,7 @@
           <a:p>
             <a:r>
               <a:rPr lang="en-US" dirty="0"/>
-              <a:t>Accelerator or IP Model</a:t>
+              <a:t>General Purpose vs. Custom</a:t>
             </a:r>
           </a:p>
         </p:txBody>
@@ -9229,7 +8538,7 @@
           <p:cNvPr id="4" name="Slide Number Placeholder 3">
             <a:extLst>
               <a:ext uri="{FF2B5EF4-FFF2-40B4-BE49-F238E27FC236}">
-                <a16:creationId xmlns:a16="http://schemas.microsoft.com/office/drawing/2014/main" id="{4C480D9B-BAD9-C35E-A10A-2ADCD901A484}"/>
+                <a16:creationId xmlns:a16="http://schemas.microsoft.com/office/drawing/2014/main" id="{133CA96F-A1F5-2FD8-28A7-6310F3D7EB84}"/>
               </a:ext>
             </a:extLst>
           </p:cNvPr>
@@ -9255,10 +8564,10 @@
       </p:sp>
       <p:pic>
         <p:nvPicPr>
-          <p:cNvPr id="5" name="Picture 2" descr="Asic - Free icons">
-            <a:extLst>
-              <a:ext uri="{FF2B5EF4-FFF2-40B4-BE49-F238E27FC236}">
-                <a16:creationId xmlns:a16="http://schemas.microsoft.com/office/drawing/2014/main" id="{2D198A59-C386-E6F1-2136-1EB5E3DA232A}"/>
+          <p:cNvPr id="2050" name="Picture 2" descr="A Beginner's Guide to NVIDIA GPUs in ...">
+            <a:extLst>
+              <a:ext uri="{FF2B5EF4-FFF2-40B4-BE49-F238E27FC236}">
+                <a16:creationId xmlns:a16="http://schemas.microsoft.com/office/drawing/2014/main" id="{6E334859-4FD4-1613-91B8-E7708AD4427E}"/>
               </a:ext>
             </a:extLst>
           </p:cNvPr>
@@ -9267,7 +8576,7 @@
           </p:cNvPicPr>
           <p:nvPr/>
         </p:nvPicPr>
-        <p:blipFill>
+        <p:blipFill rotWithShape="1">
           <a:blip r:embed="rId2">
             <a:extLst>
               <a:ext uri="{28A0092B-C50C-407E-A947-70E740481C1C}">
@@ -9275,15 +8584,15 @@
               </a:ext>
             </a:extLst>
           </a:blip>
-          <a:srcRect/>
+          <a:srcRect l="18341" r="19919"/>
           <a:stretch>
             <a:fillRect/>
           </a:stretch>
         </p:blipFill>
         <p:spPr bwMode="auto">
           <a:xfrm>
-            <a:off x="6951922" y="2229558"/>
-            <a:ext cx="1072840" cy="1072840"/>
+            <a:off x="5155614" y="1573634"/>
+            <a:ext cx="1143011" cy="1040212"/>
           </a:xfrm>
           <a:prstGeom prst="rect">
             <a:avLst/>
@@ -9300,67 +8609,12 @@
           </a:extLst>
         </p:spPr>
       </p:pic>
-      <p:sp>
-        <p:nvSpPr>
-          <p:cNvPr id="6" name="TextBox 5">
-            <a:extLst>
-              <a:ext uri="{FF2B5EF4-FFF2-40B4-BE49-F238E27FC236}">
-                <a16:creationId xmlns:a16="http://schemas.microsoft.com/office/drawing/2014/main" id="{69364BE1-B536-A9DB-31A1-CC63C0C6092E}"/>
-              </a:ext>
-            </a:extLst>
-          </p:cNvPr>
-          <p:cNvSpPr txBox="1"/>
-          <p:nvPr/>
-        </p:nvSpPr>
-        <p:spPr>
-          <a:xfrm>
-            <a:off x="6339119" y="3541953"/>
-            <a:ext cx="2691571" cy="800219"/>
-          </a:xfrm>
-          <a:prstGeom prst="rect">
-            <a:avLst/>
-          </a:prstGeom>
-          <a:noFill/>
-        </p:spPr>
-        <p:txBody>
-          <a:bodyPr wrap="none" rtlCol="0">
-            <a:spAutoFit/>
-          </a:bodyPr>
-          <a:lstStyle/>
-          <a:p>
-            <a:r>
-              <a:rPr lang="en-US" dirty="0">
-                <a:solidFill>
-                  <a:schemeClr val="tx2">
-                    <a:lumMod val="60000"/>
-                    <a:lumOff val="40000"/>
-                  </a:schemeClr>
-                </a:solidFill>
-              </a:rPr>
-              <a:t>Hardware IP or accelerator</a:t>
-            </a:r>
-            <a:br>
-              <a:rPr lang="en-US" dirty="0"/>
-            </a:br>
-            <a:r>
-              <a:rPr lang="en-US" sz="1400" dirty="0"/>
-              <a:t>Compute intensive tasks</a:t>
-            </a:r>
-          </a:p>
-          <a:p>
-            <a:r>
-              <a:rPr lang="en-US" sz="1400" dirty="0"/>
-              <a:t>Domain specific</a:t>
-            </a:r>
-          </a:p>
-        </p:txBody>
-      </p:sp>
       <p:pic>
         <p:nvPicPr>
-          <p:cNvPr id="7" name="Picture 6" descr="Desktop Computer Icon Computer PNG &amp; SVG Design For T-Shirts">
-            <a:extLst>
-              <a:ext uri="{FF2B5EF4-FFF2-40B4-BE49-F238E27FC236}">
-                <a16:creationId xmlns:a16="http://schemas.microsoft.com/office/drawing/2014/main" id="{582F8914-FDA1-332F-1F34-58FC78D7B8EC}"/>
+          <p:cNvPr id="2052" name="Picture 4" descr="Intel BX80673I97940X Core Processor ...">
+            <a:extLst>
+              <a:ext uri="{FF2B5EF4-FFF2-40B4-BE49-F238E27FC236}">
+                <a16:creationId xmlns:a16="http://schemas.microsoft.com/office/drawing/2014/main" id="{0D83F79C-FD65-CAB2-F43B-CF5013B1FB24}"/>
               </a:ext>
             </a:extLst>
           </p:cNvPr>
@@ -9384,8 +8638,8 @@
         </p:blipFill>
         <p:spPr bwMode="auto">
           <a:xfrm>
-            <a:off x="670438" y="1948043"/>
-            <a:ext cx="1606455" cy="1606455"/>
+            <a:off x="1102533" y="1744548"/>
+            <a:ext cx="1044724" cy="836612"/>
           </a:xfrm>
           <a:prstGeom prst="rect">
             <a:avLst/>
@@ -9404,10 +8658,360 @@
       </p:pic>
       <p:sp>
         <p:nvSpPr>
-          <p:cNvPr id="8" name="Arrow: Left-Right 7">
-            <a:extLst>
-              <a:ext uri="{FF2B5EF4-FFF2-40B4-BE49-F238E27FC236}">
-                <a16:creationId xmlns:a16="http://schemas.microsoft.com/office/drawing/2014/main" id="{CC71A5C9-D584-DF02-58FB-2DA2DA0B1EDC}"/>
+          <p:cNvPr id="5" name="TextBox 4">
+            <a:extLst>
+              <a:ext uri="{FF2B5EF4-FFF2-40B4-BE49-F238E27FC236}">
+                <a16:creationId xmlns:a16="http://schemas.microsoft.com/office/drawing/2014/main" id="{44CC9FA8-D877-BBB0-41E7-9B89EF5CADDC}"/>
+              </a:ext>
+            </a:extLst>
+          </p:cNvPr>
+          <p:cNvSpPr txBox="1"/>
+          <p:nvPr/>
+        </p:nvSpPr>
+        <p:spPr>
+          <a:xfrm>
+            <a:off x="503295" y="2579435"/>
+            <a:ext cx="2269808" cy="369332"/>
+          </a:xfrm>
+          <a:prstGeom prst="rect">
+            <a:avLst/>
+          </a:prstGeom>
+          <a:noFill/>
+        </p:spPr>
+        <p:txBody>
+          <a:bodyPr wrap="square" rtlCol="0">
+            <a:spAutoFit/>
+          </a:bodyPr>
+          <a:lstStyle/>
+          <a:p>
+            <a:r>
+              <a:rPr lang="en-US" dirty="0">
+                <a:solidFill>
+                  <a:schemeClr val="accent1">
+                    <a:lumMod val="75000"/>
+                  </a:schemeClr>
+                </a:solidFill>
+              </a:rPr>
+              <a:t>General purpose CPU</a:t>
+            </a:r>
+            <a:endParaRPr lang="en-US" dirty="0"/>
+          </a:p>
+        </p:txBody>
+      </p:sp>
+      <p:sp>
+        <p:nvSpPr>
+          <p:cNvPr id="6" name="TextBox 5">
+            <a:extLst>
+              <a:ext uri="{FF2B5EF4-FFF2-40B4-BE49-F238E27FC236}">
+                <a16:creationId xmlns:a16="http://schemas.microsoft.com/office/drawing/2014/main" id="{2F5C6E09-37A7-CBBA-791C-161838250DC1}"/>
+              </a:ext>
+            </a:extLst>
+          </p:cNvPr>
+          <p:cNvSpPr txBox="1"/>
+          <p:nvPr/>
+        </p:nvSpPr>
+        <p:spPr>
+          <a:xfrm>
+            <a:off x="5479586" y="2579435"/>
+            <a:ext cx="979171" cy="369332"/>
+          </a:xfrm>
+          <a:prstGeom prst="rect">
+            <a:avLst/>
+          </a:prstGeom>
+          <a:noFill/>
+        </p:spPr>
+        <p:txBody>
+          <a:bodyPr wrap="square" rtlCol="0">
+            <a:spAutoFit/>
+          </a:bodyPr>
+          <a:lstStyle/>
+          <a:p>
+            <a:r>
+              <a:rPr lang="en-US" dirty="0">
+                <a:solidFill>
+                  <a:schemeClr val="accent1">
+                    <a:lumMod val="75000"/>
+                  </a:schemeClr>
+                </a:solidFill>
+              </a:rPr>
+              <a:t>GPU</a:t>
+            </a:r>
+            <a:endParaRPr lang="en-US" dirty="0"/>
+          </a:p>
+        </p:txBody>
+      </p:sp>
+      <p:sp>
+        <p:nvSpPr>
+          <p:cNvPr id="7" name="TextBox 6">
+            <a:extLst>
+              <a:ext uri="{FF2B5EF4-FFF2-40B4-BE49-F238E27FC236}">
+                <a16:creationId xmlns:a16="http://schemas.microsoft.com/office/drawing/2014/main" id="{D5E7CD8A-9092-E70C-0C59-0DDE5D74161F}"/>
+              </a:ext>
+            </a:extLst>
+          </p:cNvPr>
+          <p:cNvSpPr txBox="1"/>
+          <p:nvPr/>
+        </p:nvSpPr>
+        <p:spPr>
+          <a:xfrm>
+            <a:off x="7580081" y="2579435"/>
+            <a:ext cx="1471772" cy="369332"/>
+          </a:xfrm>
+          <a:prstGeom prst="rect">
+            <a:avLst/>
+          </a:prstGeom>
+          <a:noFill/>
+        </p:spPr>
+        <p:txBody>
+          <a:bodyPr wrap="square" rtlCol="0">
+            <a:spAutoFit/>
+          </a:bodyPr>
+          <a:lstStyle/>
+          <a:p>
+            <a:r>
+              <a:rPr lang="en-US" dirty="0">
+                <a:solidFill>
+                  <a:schemeClr val="accent1">
+                    <a:lumMod val="75000"/>
+                  </a:schemeClr>
+                </a:solidFill>
+              </a:rPr>
+              <a:t>FPGA</a:t>
+            </a:r>
+            <a:endParaRPr lang="en-US" dirty="0"/>
+          </a:p>
+        </p:txBody>
+      </p:sp>
+      <p:sp>
+        <p:nvSpPr>
+          <p:cNvPr id="8" name="TextBox 7">
+            <a:extLst>
+              <a:ext uri="{FF2B5EF4-FFF2-40B4-BE49-F238E27FC236}">
+                <a16:creationId xmlns:a16="http://schemas.microsoft.com/office/drawing/2014/main" id="{72A1919C-A593-0E2B-5C81-1E50887CCCB1}"/>
+              </a:ext>
+            </a:extLst>
+          </p:cNvPr>
+          <p:cNvSpPr txBox="1"/>
+          <p:nvPr/>
+        </p:nvSpPr>
+        <p:spPr>
+          <a:xfrm>
+            <a:off x="9929016" y="2579435"/>
+            <a:ext cx="1642040" cy="369332"/>
+          </a:xfrm>
+          <a:prstGeom prst="rect">
+            <a:avLst/>
+          </a:prstGeom>
+          <a:noFill/>
+        </p:spPr>
+        <p:txBody>
+          <a:bodyPr wrap="square" rtlCol="0">
+            <a:spAutoFit/>
+          </a:bodyPr>
+          <a:lstStyle/>
+          <a:p>
+            <a:r>
+              <a:rPr lang="en-US" dirty="0">
+                <a:solidFill>
+                  <a:schemeClr val="accent1">
+                    <a:lumMod val="75000"/>
+                  </a:schemeClr>
+                </a:solidFill>
+              </a:rPr>
+              <a:t>Custom ASIC</a:t>
+            </a:r>
+          </a:p>
+        </p:txBody>
+      </p:sp>
+      <p:sp>
+        <p:nvSpPr>
+          <p:cNvPr id="9" name="TextBox 8">
+            <a:extLst>
+              <a:ext uri="{FF2B5EF4-FFF2-40B4-BE49-F238E27FC236}">
+                <a16:creationId xmlns:a16="http://schemas.microsoft.com/office/drawing/2014/main" id="{A533AE82-8F47-477F-4A6B-66CF37FE473E}"/>
+              </a:ext>
+            </a:extLst>
+          </p:cNvPr>
+          <p:cNvSpPr txBox="1"/>
+          <p:nvPr/>
+        </p:nvSpPr>
+        <p:spPr>
+          <a:xfrm>
+            <a:off x="3448923" y="2579435"/>
+            <a:ext cx="979172" cy="369332"/>
+          </a:xfrm>
+          <a:prstGeom prst="rect">
+            <a:avLst/>
+          </a:prstGeom>
+          <a:noFill/>
+        </p:spPr>
+        <p:txBody>
+          <a:bodyPr wrap="square" rtlCol="0">
+            <a:spAutoFit/>
+          </a:bodyPr>
+          <a:lstStyle/>
+          <a:p>
+            <a:r>
+              <a:rPr lang="en-US" dirty="0">
+                <a:solidFill>
+                  <a:schemeClr val="accent1">
+                    <a:lumMod val="75000"/>
+                  </a:schemeClr>
+                </a:solidFill>
+              </a:rPr>
+              <a:t>DSP</a:t>
+            </a:r>
+            <a:endParaRPr lang="en-US" dirty="0"/>
+          </a:p>
+        </p:txBody>
+      </p:sp>
+      <p:pic>
+        <p:nvPicPr>
+          <p:cNvPr id="4098" name="Picture 2" descr="What is a DSP chip？-Perceptive Electronic Components">
+            <a:extLst>
+              <a:ext uri="{FF2B5EF4-FFF2-40B4-BE49-F238E27FC236}">
+                <a16:creationId xmlns:a16="http://schemas.microsoft.com/office/drawing/2014/main" id="{BDD208B4-800C-FB6B-C35C-D1A90AE72DF1}"/>
+              </a:ext>
+            </a:extLst>
+          </p:cNvPr>
+          <p:cNvPicPr>
+            <a:picLocks noChangeAspect="1" noChangeArrowheads="1"/>
+          </p:cNvPicPr>
+          <p:nvPr/>
+        </p:nvPicPr>
+        <p:blipFill>
+          <a:blip r:embed="rId4">
+            <a:extLst>
+              <a:ext uri="{28A0092B-C50C-407E-A947-70E740481C1C}">
+                <a14:useLocalDpi xmlns:a14="http://schemas.microsoft.com/office/drawing/2010/main" val="0"/>
+              </a:ext>
+            </a:extLst>
+          </a:blip>
+          <a:srcRect/>
+          <a:stretch>
+            <a:fillRect/>
+          </a:stretch>
+        </p:blipFill>
+        <p:spPr bwMode="auto">
+          <a:xfrm>
+            <a:off x="3296832" y="1744548"/>
+            <a:ext cx="957920" cy="698385"/>
+          </a:xfrm>
+          <a:prstGeom prst="rect">
+            <a:avLst/>
+          </a:prstGeom>
+          <a:noFill/>
+          <a:extLst>
+            <a:ext uri="{909E8E84-426E-40DD-AFC4-6F175D3DCCD1}">
+              <a14:hiddenFill xmlns:a14="http://schemas.microsoft.com/office/drawing/2010/main">
+                <a:solidFill>
+                  <a:srgbClr val="FFFFFF"/>
+                </a:solidFill>
+              </a14:hiddenFill>
+            </a:ext>
+          </a:extLst>
+        </p:spPr>
+      </p:pic>
+      <p:pic>
+        <p:nvPicPr>
+          <p:cNvPr id="4100" name="Picture 4" descr="A Guide to Xilinx FPGA Naming Standards">
+            <a:extLst>
+              <a:ext uri="{FF2B5EF4-FFF2-40B4-BE49-F238E27FC236}">
+                <a16:creationId xmlns:a16="http://schemas.microsoft.com/office/drawing/2014/main" id="{379B6A6B-825D-56F0-B37B-E4098A17FC79}"/>
+              </a:ext>
+            </a:extLst>
+          </p:cNvPr>
+          <p:cNvPicPr>
+            <a:picLocks noChangeAspect="1" noChangeArrowheads="1"/>
+          </p:cNvPicPr>
+          <p:nvPr/>
+        </p:nvPicPr>
+        <p:blipFill>
+          <a:blip r:embed="rId5">
+            <a:extLst>
+              <a:ext uri="{28A0092B-C50C-407E-A947-70E740481C1C}">
+                <a14:useLocalDpi xmlns:a14="http://schemas.microsoft.com/office/drawing/2010/main" val="0"/>
+              </a:ext>
+            </a:extLst>
+          </a:blip>
+          <a:srcRect/>
+          <a:stretch>
+            <a:fillRect/>
+          </a:stretch>
+        </p:blipFill>
+        <p:spPr bwMode="auto">
+          <a:xfrm>
+            <a:off x="7497190" y="1744548"/>
+            <a:ext cx="1029614" cy="682679"/>
+          </a:xfrm>
+          <a:prstGeom prst="rect">
+            <a:avLst/>
+          </a:prstGeom>
+          <a:noFill/>
+          <a:extLst>
+            <a:ext uri="{909E8E84-426E-40DD-AFC4-6F175D3DCCD1}">
+              <a14:hiddenFill xmlns:a14="http://schemas.microsoft.com/office/drawing/2010/main">
+                <a:solidFill>
+                  <a:srgbClr val="FFFFFF"/>
+                </a:solidFill>
+              </a14:hiddenFill>
+            </a:ext>
+          </a:extLst>
+        </p:spPr>
+      </p:pic>
+      <p:pic>
+        <p:nvPicPr>
+          <p:cNvPr id="4102" name="Picture 6" descr="Plot of ASIC layout submitted for ...">
+            <a:extLst>
+              <a:ext uri="{FF2B5EF4-FFF2-40B4-BE49-F238E27FC236}">
+                <a16:creationId xmlns:a16="http://schemas.microsoft.com/office/drawing/2014/main" id="{B5A80F2A-32AD-2542-7937-F35192C891B2}"/>
+              </a:ext>
+            </a:extLst>
+          </p:cNvPr>
+          <p:cNvPicPr>
+            <a:picLocks noChangeAspect="1" noChangeArrowheads="1"/>
+          </p:cNvPicPr>
+          <p:nvPr/>
+        </p:nvPicPr>
+        <p:blipFill>
+          <a:blip r:embed="rId6">
+            <a:extLst>
+              <a:ext uri="{28A0092B-C50C-407E-A947-70E740481C1C}">
+                <a14:useLocalDpi xmlns:a14="http://schemas.microsoft.com/office/drawing/2010/main" val="0"/>
+              </a:ext>
+            </a:extLst>
+          </a:blip>
+          <a:srcRect/>
+          <a:stretch>
+            <a:fillRect/>
+          </a:stretch>
+        </p:blipFill>
+        <p:spPr bwMode="auto">
+          <a:xfrm>
+            <a:off x="10151658" y="1573634"/>
+            <a:ext cx="880762" cy="876848"/>
+          </a:xfrm>
+          <a:prstGeom prst="rect">
+            <a:avLst/>
+          </a:prstGeom>
+          <a:noFill/>
+          <a:extLst>
+            <a:ext uri="{909E8E84-426E-40DD-AFC4-6F175D3DCCD1}">
+              <a14:hiddenFill xmlns:a14="http://schemas.microsoft.com/office/drawing/2010/main">
+                <a:solidFill>
+                  <a:srgbClr val="FFFFFF"/>
+                </a:solidFill>
+              </a14:hiddenFill>
+            </a:ext>
+          </a:extLst>
+        </p:spPr>
+      </p:pic>
+      <p:sp>
+        <p:nvSpPr>
+          <p:cNvPr id="3" name="Arrow: Right 2">
+            <a:extLst>
+              <a:ext uri="{FF2B5EF4-FFF2-40B4-BE49-F238E27FC236}">
+                <a16:creationId xmlns:a16="http://schemas.microsoft.com/office/drawing/2014/main" id="{6E15B4DD-4CE7-2A33-BAA3-5B6DC78D2AE2}"/>
               </a:ext>
             </a:extLst>
           </p:cNvPr>
@@ -9415,19 +9019,38 @@
           <p:nvPr/>
         </p:nvSpPr>
         <p:spPr>
-          <a:xfrm>
-            <a:off x="5900982" y="2589821"/>
-            <a:ext cx="629035" cy="314450"/>
-          </a:xfrm>
-          <a:prstGeom prst="leftRightArrow">
+          <a:xfrm rot="10800000">
+            <a:off x="1838458" y="3272918"/>
+            <a:ext cx="978408" cy="484632"/>
+          </a:xfrm>
+          <a:prstGeom prst="rightArrow">
             <a:avLst/>
           </a:prstGeom>
-          <a:solidFill>
-            <a:schemeClr val="accent1">
-              <a:lumMod val="20000"/>
-              <a:lumOff val="80000"/>
-            </a:schemeClr>
-          </a:solidFill>
+          <a:gradFill flip="none" rotWithShape="1">
+            <a:gsLst>
+              <a:gs pos="0">
+                <a:schemeClr val="accent1">
+                  <a:tint val="66000"/>
+                  <a:satMod val="160000"/>
+                </a:schemeClr>
+              </a:gs>
+              <a:gs pos="50000">
+                <a:schemeClr val="accent1">
+                  <a:tint val="44500"/>
+                  <a:satMod val="160000"/>
+                </a:schemeClr>
+              </a:gs>
+              <a:gs pos="100000">
+                <a:schemeClr val="accent1">
+                  <a:tint val="23500"/>
+                  <a:satMod val="160000"/>
+                </a:schemeClr>
+              </a:gs>
+            </a:gsLst>
+            <a:lin ang="10800000" scaled="1"/>
+            <a:tileRect/>
+          </a:gradFill>
+          <a:ln w="9525"/>
         </p:spPr>
         <p:style>
           <a:lnRef idx="2">
@@ -9456,320 +9079,49 @@
       </p:sp>
       <p:sp>
         <p:nvSpPr>
-          <p:cNvPr id="9" name="TextBox 8">
-            <a:extLst>
-              <a:ext uri="{FF2B5EF4-FFF2-40B4-BE49-F238E27FC236}">
-                <a16:creationId xmlns:a16="http://schemas.microsoft.com/office/drawing/2014/main" id="{BECA358E-D56C-FFD2-9565-B5F5EAC15C78}"/>
-              </a:ext>
-            </a:extLst>
-          </p:cNvPr>
-          <p:cNvSpPr txBox="1"/>
+          <p:cNvPr id="10" name="Arrow: Right 9">
+            <a:extLst>
+              <a:ext uri="{FF2B5EF4-FFF2-40B4-BE49-F238E27FC236}">
+                <a16:creationId xmlns:a16="http://schemas.microsoft.com/office/drawing/2014/main" id="{55706709-DF52-47C8-7657-7A6CADEA268B}"/>
+              </a:ext>
+            </a:extLst>
+          </p:cNvPr>
+          <p:cNvSpPr/>
           <p:nvPr/>
         </p:nvSpPr>
         <p:spPr>
           <a:xfrm>
-            <a:off x="3547478" y="3541952"/>
-            <a:ext cx="1944635" cy="1200329"/>
-          </a:xfrm>
-          <a:prstGeom prst="rect">
+            <a:off x="8614135" y="3275875"/>
+            <a:ext cx="978408" cy="484632"/>
+          </a:xfrm>
+          <a:prstGeom prst="rightArrow">
             <a:avLst/>
           </a:prstGeom>
-          <a:noFill/>
-        </p:spPr>
-        <p:txBody>
-          <a:bodyPr wrap="none" rtlCol="0">
-            <a:spAutoFit/>
-          </a:bodyPr>
-          <a:lstStyle/>
-          <a:p>
-            <a:r>
-              <a:rPr lang="en-US" sz="1600" dirty="0">
-                <a:solidFill>
-                  <a:schemeClr val="tx2">
-                    <a:lumMod val="60000"/>
-                    <a:lumOff val="40000"/>
-                  </a:schemeClr>
-                </a:solidFill>
-              </a:rPr>
-              <a:t>Embedded Processor</a:t>
-            </a:r>
-            <a:br>
-              <a:rPr lang="en-US" sz="1600" dirty="0"/>
-            </a:br>
-            <a:r>
-              <a:rPr lang="en-US" sz="1400" dirty="0"/>
-              <a:t>(DSP, ARM,…)</a:t>
-            </a:r>
-            <a:br>
-              <a:rPr lang="en-US" sz="1400" dirty="0"/>
-            </a:br>
-            <a:r>
-              <a:rPr lang="en-US" sz="1400" dirty="0"/>
-              <a:t>Configures HW,</a:t>
-            </a:r>
-            <a:br>
-              <a:rPr lang="en-US" sz="1400" dirty="0"/>
-            </a:br>
-            <a:r>
-              <a:rPr lang="en-US" sz="1400" dirty="0"/>
-              <a:t>Manages data transfer,</a:t>
-            </a:r>
-            <a:br>
-              <a:rPr lang="en-US" sz="1400" dirty="0"/>
-            </a:br>
-            <a:r>
-              <a:rPr lang="en-US" sz="1400" dirty="0"/>
-              <a:t>Performs some DSP</a:t>
-            </a:r>
-          </a:p>
-        </p:txBody>
-      </p:sp>
-      <p:pic>
-        <p:nvPicPr>
-          <p:cNvPr id="10" name="Picture 2" descr="What is a DSP chip？-Perceptive Electronic Components">
-            <a:extLst>
-              <a:ext uri="{FF2B5EF4-FFF2-40B4-BE49-F238E27FC236}">
-                <a16:creationId xmlns:a16="http://schemas.microsoft.com/office/drawing/2014/main" id="{1A2093CD-7818-780C-D674-5FC9CF4B5254}"/>
-              </a:ext>
-            </a:extLst>
-          </p:cNvPr>
-          <p:cNvPicPr>
-            <a:picLocks noChangeAspect="1" noChangeArrowheads="1"/>
-          </p:cNvPicPr>
-          <p:nvPr/>
-        </p:nvPicPr>
-        <p:blipFill>
-          <a:blip r:embed="rId4">
-            <a:extLst>
-              <a:ext uri="{28A0092B-C50C-407E-A947-70E740481C1C}">
-                <a14:useLocalDpi xmlns:a14="http://schemas.microsoft.com/office/drawing/2010/main" val="0"/>
-              </a:ext>
-            </a:extLst>
-          </a:blip>
-          <a:srcRect/>
-          <a:stretch>
-            <a:fillRect/>
-          </a:stretch>
-        </p:blipFill>
-        <p:spPr bwMode="auto">
-          <a:xfrm>
-            <a:off x="3638551" y="2215909"/>
-            <a:ext cx="1508972" cy="1100137"/>
-          </a:xfrm>
-          <a:prstGeom prst="rect">
-            <a:avLst/>
-          </a:prstGeom>
-          <a:noFill/>
-          <a:extLst>
-            <a:ext uri="{909E8E84-426E-40DD-AFC4-6F175D3DCCD1}">
-              <a14:hiddenFill xmlns:a14="http://schemas.microsoft.com/office/drawing/2010/main">
-                <a:solidFill>
-                  <a:srgbClr val="FFFFFF"/>
-                </a:solidFill>
-              </a14:hiddenFill>
-            </a:ext>
-          </a:extLst>
-        </p:spPr>
-      </p:pic>
-      <p:sp>
-        <p:nvSpPr>
-          <p:cNvPr id="11" name="TextBox 10">
-            <a:extLst>
-              <a:ext uri="{FF2B5EF4-FFF2-40B4-BE49-F238E27FC236}">
-                <a16:creationId xmlns:a16="http://schemas.microsoft.com/office/drawing/2014/main" id="{A1A5ED07-1D32-CB91-D927-26E7A0349461}"/>
-              </a:ext>
-            </a:extLst>
-          </p:cNvPr>
-          <p:cNvSpPr txBox="1"/>
-          <p:nvPr/>
-        </p:nvSpPr>
-        <p:spPr>
-          <a:xfrm>
-            <a:off x="744162" y="3575562"/>
-            <a:ext cx="2095317" cy="1200329"/>
-          </a:xfrm>
-          <a:prstGeom prst="rect">
-            <a:avLst/>
-          </a:prstGeom>
-          <a:noFill/>
-        </p:spPr>
-        <p:txBody>
-          <a:bodyPr wrap="none" rtlCol="0">
-            <a:spAutoFit/>
-          </a:bodyPr>
-          <a:lstStyle/>
-          <a:p>
-            <a:r>
-              <a:rPr lang="en-US" sz="1600" dirty="0">
-                <a:solidFill>
-                  <a:schemeClr val="tx2">
-                    <a:lumMod val="60000"/>
-                    <a:lumOff val="40000"/>
-                  </a:schemeClr>
-                </a:solidFill>
-              </a:rPr>
-              <a:t>Host system</a:t>
-            </a:r>
-            <a:br>
-              <a:rPr lang="en-US" sz="1600" dirty="0"/>
-            </a:br>
-            <a:r>
-              <a:rPr lang="en-US" sz="1400" dirty="0"/>
-              <a:t>Runs main application,</a:t>
-            </a:r>
-            <a:br>
-              <a:rPr lang="en-US" sz="1400" dirty="0"/>
-            </a:br>
-            <a:r>
-              <a:rPr lang="en-US" sz="1400" dirty="0"/>
-              <a:t>User interface,</a:t>
-            </a:r>
-            <a:br>
-              <a:rPr lang="en-US" sz="1400" dirty="0"/>
-            </a:br>
-            <a:r>
-              <a:rPr lang="en-US" sz="1400" dirty="0"/>
-              <a:t>May be embedded as well</a:t>
-            </a:r>
-            <a:br>
-              <a:rPr lang="en-US" sz="1400" dirty="0"/>
-            </a:br>
-            <a:r>
-              <a:rPr lang="en-US" sz="1400" dirty="0"/>
-              <a:t>(e.g., smartphone)</a:t>
-            </a:r>
-          </a:p>
-        </p:txBody>
-      </p:sp>
-      <p:pic>
-        <p:nvPicPr>
-          <p:cNvPr id="8194" name="Picture 2">
-            <a:extLst>
-              <a:ext uri="{FF2B5EF4-FFF2-40B4-BE49-F238E27FC236}">
-                <a16:creationId xmlns:a16="http://schemas.microsoft.com/office/drawing/2014/main" id="{53BBBF18-AD9C-4F40-5760-91B5328C3A0D}"/>
-              </a:ext>
-            </a:extLst>
-          </p:cNvPr>
-          <p:cNvPicPr>
-            <a:picLocks noChangeAspect="1" noChangeArrowheads="1"/>
-          </p:cNvPicPr>
-          <p:nvPr/>
-        </p:nvPicPr>
-        <p:blipFill>
-          <a:blip r:embed="rId5">
-            <a:extLst>
-              <a:ext uri="{28A0092B-C50C-407E-A947-70E740481C1C}">
-                <a14:useLocalDpi xmlns:a14="http://schemas.microsoft.com/office/drawing/2010/main" val="0"/>
-              </a:ext>
-            </a:extLst>
-          </a:blip>
-          <a:srcRect/>
-          <a:stretch>
-            <a:fillRect/>
-          </a:stretch>
-        </p:blipFill>
-        <p:spPr bwMode="auto">
-          <a:xfrm>
-            <a:off x="9783764" y="2276347"/>
-            <a:ext cx="1061296" cy="1040211"/>
-          </a:xfrm>
-          <a:prstGeom prst="rect">
-            <a:avLst/>
-          </a:prstGeom>
-          <a:noFill/>
-          <a:extLst>
-            <a:ext uri="{909E8E84-426E-40DD-AFC4-6F175D3DCCD1}">
-              <a14:hiddenFill xmlns:a14="http://schemas.microsoft.com/office/drawing/2010/main">
-                <a:solidFill>
-                  <a:srgbClr val="FFFFFF"/>
-                </a:solidFill>
-              </a14:hiddenFill>
-            </a:ext>
-          </a:extLst>
-        </p:spPr>
-      </p:pic>
-      <p:sp>
-        <p:nvSpPr>
-          <p:cNvPr id="12" name="TextBox 11">
-            <a:extLst>
-              <a:ext uri="{FF2B5EF4-FFF2-40B4-BE49-F238E27FC236}">
-                <a16:creationId xmlns:a16="http://schemas.microsoft.com/office/drawing/2014/main" id="{CF430031-78C1-A525-F93A-35EF9DC9AF70}"/>
-              </a:ext>
-            </a:extLst>
-          </p:cNvPr>
-          <p:cNvSpPr txBox="1"/>
-          <p:nvPr/>
-        </p:nvSpPr>
-        <p:spPr>
-          <a:xfrm>
-            <a:off x="9501419" y="3524305"/>
-            <a:ext cx="2190600" cy="800219"/>
-          </a:xfrm>
-          <a:prstGeom prst="rect">
-            <a:avLst/>
-          </a:prstGeom>
-          <a:noFill/>
-        </p:spPr>
-        <p:txBody>
-          <a:bodyPr wrap="none" rtlCol="0">
-            <a:spAutoFit/>
-          </a:bodyPr>
-          <a:lstStyle/>
-          <a:p>
-            <a:r>
-              <a:rPr lang="en-US" dirty="0">
-                <a:solidFill>
-                  <a:schemeClr val="tx2">
-                    <a:lumMod val="60000"/>
-                    <a:lumOff val="40000"/>
-                  </a:schemeClr>
-                </a:solidFill>
-              </a:rPr>
-              <a:t>High-speed IO</a:t>
-            </a:r>
-            <a:br>
-              <a:rPr lang="en-US" dirty="0"/>
-            </a:br>
-            <a:r>
-              <a:rPr lang="en-US" sz="1400" dirty="0"/>
-              <a:t>Network interface,</a:t>
-            </a:r>
-            <a:br>
-              <a:rPr lang="en-US" sz="1400" dirty="0"/>
-            </a:br>
-            <a:r>
-              <a:rPr lang="en-US" sz="1400" dirty="0"/>
-              <a:t>Digital communication data</a:t>
-            </a:r>
-          </a:p>
-        </p:txBody>
-      </p:sp>
-      <p:sp>
-        <p:nvSpPr>
-          <p:cNvPr id="13" name="Arrow: Left-Right 12">
-            <a:extLst>
-              <a:ext uri="{FF2B5EF4-FFF2-40B4-BE49-F238E27FC236}">
-                <a16:creationId xmlns:a16="http://schemas.microsoft.com/office/drawing/2014/main" id="{DAEA89D4-5BC4-1DE4-A51F-6C67BAF270A7}"/>
-              </a:ext>
-            </a:extLst>
-          </p:cNvPr>
-          <p:cNvSpPr/>
-          <p:nvPr/>
-        </p:nvSpPr>
-        <p:spPr>
-          <a:xfrm>
-            <a:off x="8716172" y="2608753"/>
-            <a:ext cx="629035" cy="314450"/>
-          </a:xfrm>
-          <a:prstGeom prst="leftRightArrow">
-            <a:avLst/>
-          </a:prstGeom>
-          <a:solidFill>
-            <a:schemeClr val="accent1">
-              <a:lumMod val="20000"/>
-              <a:lumOff val="80000"/>
-            </a:schemeClr>
-          </a:solidFill>
+          <a:gradFill flip="none" rotWithShape="1">
+            <a:gsLst>
+              <a:gs pos="0">
+                <a:schemeClr val="accent1">
+                  <a:tint val="66000"/>
+                  <a:satMod val="160000"/>
+                </a:schemeClr>
+              </a:gs>
+              <a:gs pos="50000">
+                <a:schemeClr val="accent1">
+                  <a:tint val="44500"/>
+                  <a:satMod val="160000"/>
+                </a:schemeClr>
+              </a:gs>
+              <a:gs pos="100000">
+                <a:schemeClr val="accent1">
+                  <a:tint val="23500"/>
+                  <a:satMod val="160000"/>
+                </a:schemeClr>
+              </a:gs>
+            </a:gsLst>
+            <a:lin ang="10800000" scaled="1"/>
+            <a:tileRect/>
+          </a:gradFill>
+          <a:ln w="9525"/>
         </p:spPr>
         <p:style>
           <a:lnRef idx="2">
@@ -9798,10 +9150,177 @@
       </p:sp>
       <p:sp>
         <p:nvSpPr>
-          <p:cNvPr id="14" name="Arrow: Left-Right 13">
-            <a:extLst>
-              <a:ext uri="{FF2B5EF4-FFF2-40B4-BE49-F238E27FC236}">
-                <a16:creationId xmlns:a16="http://schemas.microsoft.com/office/drawing/2014/main" id="{DE51F192-7062-0ADD-6BFB-59AF2B741A08}"/>
+          <p:cNvPr id="11" name="TextBox 10">
+            <a:extLst>
+              <a:ext uri="{FF2B5EF4-FFF2-40B4-BE49-F238E27FC236}">
+                <a16:creationId xmlns:a16="http://schemas.microsoft.com/office/drawing/2014/main" id="{964AC2C1-B658-1CDD-25BC-E1EEAB5DB3EE}"/>
+              </a:ext>
+            </a:extLst>
+          </p:cNvPr>
+          <p:cNvSpPr txBox="1"/>
+          <p:nvPr/>
+        </p:nvSpPr>
+        <p:spPr>
+          <a:xfrm>
+            <a:off x="908046" y="3880575"/>
+            <a:ext cx="4660904" cy="1077218"/>
+          </a:xfrm>
+          <a:prstGeom prst="rect">
+            <a:avLst/>
+          </a:prstGeom>
+          <a:noFill/>
+        </p:spPr>
+        <p:txBody>
+          <a:bodyPr wrap="square" rtlCol="0">
+            <a:spAutoFit/>
+          </a:bodyPr>
+          <a:lstStyle/>
+          <a:p>
+            <a:r>
+              <a:rPr lang="en-US" sz="1600" dirty="0"/>
+              <a:t>General purpose,</a:t>
+            </a:r>
+            <a:br>
+              <a:rPr lang="en-US" sz="1600" dirty="0"/>
+            </a:br>
+            <a:r>
+              <a:rPr lang="en-US" sz="1600" dirty="0"/>
+              <a:t>Applies in many domains,</a:t>
+            </a:r>
+            <a:br>
+              <a:rPr lang="en-US" sz="1600" dirty="0"/>
+            </a:br>
+            <a:r>
+              <a:rPr lang="en-US" sz="1600" dirty="0"/>
+              <a:t>Re-programmed with software,</a:t>
+            </a:r>
+            <a:br>
+              <a:rPr lang="en-US" sz="1600" dirty="0"/>
+            </a:br>
+            <a:r>
+              <a:rPr lang="en-US" sz="1600" dirty="0"/>
+              <a:t>Performance via SW optimization, multi-cores</a:t>
+            </a:r>
+          </a:p>
+        </p:txBody>
+      </p:sp>
+      <p:sp>
+        <p:nvSpPr>
+          <p:cNvPr id="13" name="TextBox 12">
+            <a:extLst>
+              <a:ext uri="{FF2B5EF4-FFF2-40B4-BE49-F238E27FC236}">
+                <a16:creationId xmlns:a16="http://schemas.microsoft.com/office/drawing/2014/main" id="{BE6FF7D6-23CC-6A53-696A-72A0EE800819}"/>
+              </a:ext>
+            </a:extLst>
+          </p:cNvPr>
+          <p:cNvSpPr txBox="1"/>
+          <p:nvPr/>
+        </p:nvSpPr>
+        <p:spPr>
+          <a:xfrm>
+            <a:off x="7724989" y="3960927"/>
+            <a:ext cx="3155263" cy="1323439"/>
+          </a:xfrm>
+          <a:prstGeom prst="rect">
+            <a:avLst/>
+          </a:prstGeom>
+          <a:noFill/>
+        </p:spPr>
+        <p:txBody>
+          <a:bodyPr wrap="square" rtlCol="0">
+            <a:spAutoFit/>
+          </a:bodyPr>
+          <a:lstStyle/>
+          <a:p>
+            <a:r>
+              <a:rPr lang="en-US" sz="1600" dirty="0"/>
+              <a:t>Domain specific,</a:t>
+            </a:r>
+            <a:br>
+              <a:rPr lang="en-US" sz="1600" dirty="0"/>
+            </a:br>
+            <a:r>
+              <a:rPr lang="en-US" sz="1600" dirty="0"/>
+              <a:t>HW optimized for specific task,</a:t>
+            </a:r>
+            <a:br>
+              <a:rPr lang="en-US" sz="1600" dirty="0"/>
+            </a:br>
+            <a:r>
+              <a:rPr lang="en-US" sz="1600" dirty="0"/>
+              <a:t>Can enable:</a:t>
+            </a:r>
+          </a:p>
+          <a:p>
+            <a:pPr marL="285750" indent="-285750">
+              <a:buFont typeface="Arial" panose="020B0604020202020204" pitchFamily="34" charset="0"/>
+              <a:buChar char="•"/>
+            </a:pPr>
+            <a:r>
+              <a:rPr lang="en-US" sz="1600" dirty="0"/>
+              <a:t>Higher performance, </a:t>
+            </a:r>
+          </a:p>
+          <a:p>
+            <a:pPr marL="285750" indent="-285750">
+              <a:buFont typeface="Arial" panose="020B0604020202020204" pitchFamily="34" charset="0"/>
+              <a:buChar char="•"/>
+            </a:pPr>
+            <a:r>
+              <a:rPr lang="en-US" sz="1600" dirty="0"/>
+              <a:t>Lower power / OP, size</a:t>
+            </a:r>
+          </a:p>
+        </p:txBody>
+      </p:sp>
+      <p:sp>
+        <p:nvSpPr>
+          <p:cNvPr id="14" name="TextBox 13">
+            <a:extLst>
+              <a:ext uri="{FF2B5EF4-FFF2-40B4-BE49-F238E27FC236}">
+                <a16:creationId xmlns:a16="http://schemas.microsoft.com/office/drawing/2014/main" id="{FEF30264-AAC2-89FE-38BD-3F6B9C214ADC}"/>
+              </a:ext>
+            </a:extLst>
+          </p:cNvPr>
+          <p:cNvSpPr txBox="1"/>
+          <p:nvPr/>
+        </p:nvSpPr>
+        <p:spPr>
+          <a:xfrm>
+            <a:off x="8202649" y="5633785"/>
+            <a:ext cx="2288290" cy="369332"/>
+          </a:xfrm>
+          <a:prstGeom prst="rect">
+            <a:avLst/>
+          </a:prstGeom>
+          <a:noFill/>
+        </p:spPr>
+        <p:txBody>
+          <a:bodyPr wrap="square" rtlCol="0">
+            <a:spAutoFit/>
+          </a:bodyPr>
+          <a:lstStyle/>
+          <a:p>
+            <a:r>
+              <a:rPr lang="en-US" dirty="0">
+                <a:solidFill>
+                  <a:schemeClr val="tx2">
+                    <a:lumMod val="60000"/>
+                    <a:lumOff val="40000"/>
+                  </a:schemeClr>
+                </a:solidFill>
+              </a:rPr>
+              <a:t>Focus of this course</a:t>
+            </a:r>
+          </a:p>
+        </p:txBody>
+      </p:sp>
+      <p:sp>
+        <p:nvSpPr>
+          <p:cNvPr id="15" name="Left Brace 14">
+            <a:extLst>
+              <a:ext uri="{FF2B5EF4-FFF2-40B4-BE49-F238E27FC236}">
+                <a16:creationId xmlns:a16="http://schemas.microsoft.com/office/drawing/2014/main" id="{D2512B1A-E24A-F751-05D0-C1A07CEC2CBB}"/>
               </a:ext>
             </a:extLst>
           </p:cNvPr>
@@ -9809,34 +9328,26 @@
           <p:nvPr/>
         </p:nvSpPr>
         <p:spPr>
-          <a:xfrm>
-            <a:off x="2622763" y="2608753"/>
-            <a:ext cx="629035" cy="314450"/>
-          </a:xfrm>
-          <a:prstGeom prst="leftRightArrow">
+          <a:xfrm rot="16200000">
+            <a:off x="9264362" y="3546560"/>
+            <a:ext cx="311150" cy="3786763"/>
+          </a:xfrm>
+          <a:prstGeom prst="leftBrace">
             <a:avLst/>
           </a:prstGeom>
-          <a:solidFill>
-            <a:schemeClr val="accent1">
-              <a:lumMod val="20000"/>
-              <a:lumOff val="80000"/>
-            </a:schemeClr>
-          </a:solidFill>
         </p:spPr>
         <p:style>
-          <a:lnRef idx="2">
-            <a:schemeClr val="accent1">
-              <a:shade val="15000"/>
-            </a:schemeClr>
+          <a:lnRef idx="1">
+            <a:schemeClr val="accent1"/>
           </a:lnRef>
-          <a:fillRef idx="1">
+          <a:fillRef idx="0">
             <a:schemeClr val="accent1"/>
           </a:fillRef>
           <a:effectRef idx="0">
             <a:schemeClr val="accent1"/>
           </a:effectRef>
           <a:fontRef idx="minor">
-            <a:schemeClr val="lt1"/>
+            <a:schemeClr val="tx1"/>
           </a:fontRef>
         </p:style>
         <p:txBody>
@@ -9844,73 +9355,14 @@
           <a:lstStyle/>
           <a:p>
             <a:pPr algn="ctr"/>
-            <a:endParaRPr lang="en-US"/>
-          </a:p>
-        </p:txBody>
-      </p:sp>
-      <p:sp>
-        <p:nvSpPr>
-          <p:cNvPr id="15" name="Rectangle: Rounded Corners 14">
-            <a:extLst>
-              <a:ext uri="{FF2B5EF4-FFF2-40B4-BE49-F238E27FC236}">
-                <a16:creationId xmlns:a16="http://schemas.microsoft.com/office/drawing/2014/main" id="{EC07B97A-280B-AD24-0061-71B4B7686AD6}"/>
-              </a:ext>
-            </a:extLst>
-          </p:cNvPr>
-          <p:cNvSpPr/>
-          <p:nvPr/>
-        </p:nvSpPr>
-        <p:spPr>
-          <a:xfrm>
-            <a:off x="6774787" y="4775891"/>
-            <a:ext cx="1820233" cy="427434"/>
-          </a:xfrm>
-          <a:prstGeom prst="roundRect">
-            <a:avLst/>
-          </a:prstGeom>
-          <a:solidFill>
-            <a:schemeClr val="accent1">
-              <a:lumMod val="20000"/>
-              <a:lumOff val="80000"/>
-            </a:schemeClr>
-          </a:solidFill>
-        </p:spPr>
-        <p:style>
-          <a:lnRef idx="2">
-            <a:schemeClr val="accent1">
-              <a:shade val="15000"/>
-            </a:schemeClr>
-          </a:lnRef>
-          <a:fillRef idx="1">
-            <a:schemeClr val="accent1"/>
-          </a:fillRef>
-          <a:effectRef idx="0">
-            <a:schemeClr val="accent1"/>
-          </a:effectRef>
-          <a:fontRef idx="minor">
-            <a:schemeClr val="lt1"/>
-          </a:fontRef>
-        </p:style>
-        <p:txBody>
-          <a:bodyPr rtlCol="0" anchor="ctr"/>
-          <a:lstStyle/>
-          <a:p>
-            <a:pPr algn="ctr"/>
-            <a:r>
-              <a:rPr lang="en-US" sz="2000" dirty="0">
-                <a:solidFill>
-                  <a:schemeClr val="tx2"/>
-                </a:solidFill>
-              </a:rPr>
-              <a:t>This class</a:t>
-            </a:r>
+            <a:endParaRPr lang="en-US" dirty="0"/>
           </a:p>
         </p:txBody>
       </p:sp>
     </p:spTree>
     <p:extLst>
       <p:ext uri="{BB962C8B-B14F-4D97-AF65-F5344CB8AC3E}">
-        <p14:creationId xmlns:p14="http://schemas.microsoft.com/office/powerpoint/2010/main" val="3869065047"/>
+        <p14:creationId xmlns:p14="http://schemas.microsoft.com/office/powerpoint/2010/main" val="534400385"/>
       </p:ext>
     </p:extLst>
   </p:cSld>
@@ -9942,7 +9394,7 @@
           <p:cNvPr id="2" name="Title 1">
             <a:extLst>
               <a:ext uri="{FF2B5EF4-FFF2-40B4-BE49-F238E27FC236}">
-                <a16:creationId xmlns:a16="http://schemas.microsoft.com/office/drawing/2014/main" id="{F70220A4-5278-111F-CB4E-7533CCDE6AAB}"/>
+                <a16:creationId xmlns:a16="http://schemas.microsoft.com/office/drawing/2014/main" id="{D3438B30-FC83-FD9A-583F-510175BC5943}"/>
               </a:ext>
             </a:extLst>
           </p:cNvPr>
@@ -9960,6 +9412,747 @@
           <a:p>
             <a:r>
               <a:rPr lang="en-US" dirty="0"/>
+              <a:t>Accelerator or IP Model</a:t>
+            </a:r>
+          </a:p>
+        </p:txBody>
+      </p:sp>
+      <p:sp>
+        <p:nvSpPr>
+          <p:cNvPr id="4" name="Slide Number Placeholder 3">
+            <a:extLst>
+              <a:ext uri="{FF2B5EF4-FFF2-40B4-BE49-F238E27FC236}">
+                <a16:creationId xmlns:a16="http://schemas.microsoft.com/office/drawing/2014/main" id="{4C480D9B-BAD9-C35E-A10A-2ADCD901A484}"/>
+              </a:ext>
+            </a:extLst>
+          </p:cNvPr>
+          <p:cNvSpPr>
+            <a:spLocks noGrp="1"/>
+          </p:cNvSpPr>
+          <p:nvPr>
+            <p:ph type="sldNum" sz="quarter" idx="12"/>
+          </p:nvPr>
+        </p:nvSpPr>
+        <p:spPr/>
+        <p:txBody>
+          <a:bodyPr/>
+          <a:lstStyle/>
+          <a:p>
+            <a:fld id="{629637A9-119A-49DA-BD12-AAC58B377D80}" type="slidenum">
+              <a:rPr lang="en-US" smtClean="0"/>
+              <a:t>21</a:t>
+            </a:fld>
+            <a:endParaRPr lang="en-US" dirty="0"/>
+          </a:p>
+        </p:txBody>
+      </p:sp>
+      <p:pic>
+        <p:nvPicPr>
+          <p:cNvPr id="5" name="Picture 2" descr="Asic - Free icons">
+            <a:extLst>
+              <a:ext uri="{FF2B5EF4-FFF2-40B4-BE49-F238E27FC236}">
+                <a16:creationId xmlns:a16="http://schemas.microsoft.com/office/drawing/2014/main" id="{2D198A59-C386-E6F1-2136-1EB5E3DA232A}"/>
+              </a:ext>
+            </a:extLst>
+          </p:cNvPr>
+          <p:cNvPicPr>
+            <a:picLocks noChangeAspect="1" noChangeArrowheads="1"/>
+          </p:cNvPicPr>
+          <p:nvPr/>
+        </p:nvPicPr>
+        <p:blipFill>
+          <a:blip r:embed="rId2">
+            <a:extLst>
+              <a:ext uri="{28A0092B-C50C-407E-A947-70E740481C1C}">
+                <a14:useLocalDpi xmlns:a14="http://schemas.microsoft.com/office/drawing/2010/main" val="0"/>
+              </a:ext>
+            </a:extLst>
+          </a:blip>
+          <a:srcRect/>
+          <a:stretch>
+            <a:fillRect/>
+          </a:stretch>
+        </p:blipFill>
+        <p:spPr bwMode="auto">
+          <a:xfrm>
+            <a:off x="6951922" y="2229558"/>
+            <a:ext cx="1072840" cy="1072840"/>
+          </a:xfrm>
+          <a:prstGeom prst="rect">
+            <a:avLst/>
+          </a:prstGeom>
+          <a:noFill/>
+          <a:extLst>
+            <a:ext uri="{909E8E84-426E-40DD-AFC4-6F175D3DCCD1}">
+              <a14:hiddenFill xmlns:a14="http://schemas.microsoft.com/office/drawing/2010/main">
+                <a:solidFill>
+                  <a:srgbClr val="FFFFFF"/>
+                </a:solidFill>
+              </a14:hiddenFill>
+            </a:ext>
+          </a:extLst>
+        </p:spPr>
+      </p:pic>
+      <p:sp>
+        <p:nvSpPr>
+          <p:cNvPr id="6" name="TextBox 5">
+            <a:extLst>
+              <a:ext uri="{FF2B5EF4-FFF2-40B4-BE49-F238E27FC236}">
+                <a16:creationId xmlns:a16="http://schemas.microsoft.com/office/drawing/2014/main" id="{69364BE1-B536-A9DB-31A1-CC63C0C6092E}"/>
+              </a:ext>
+            </a:extLst>
+          </p:cNvPr>
+          <p:cNvSpPr txBox="1"/>
+          <p:nvPr/>
+        </p:nvSpPr>
+        <p:spPr>
+          <a:xfrm>
+            <a:off x="6339119" y="3541953"/>
+            <a:ext cx="2691571" cy="800219"/>
+          </a:xfrm>
+          <a:prstGeom prst="rect">
+            <a:avLst/>
+          </a:prstGeom>
+          <a:noFill/>
+        </p:spPr>
+        <p:txBody>
+          <a:bodyPr wrap="none" rtlCol="0">
+            <a:spAutoFit/>
+          </a:bodyPr>
+          <a:lstStyle/>
+          <a:p>
+            <a:r>
+              <a:rPr lang="en-US" dirty="0">
+                <a:solidFill>
+                  <a:schemeClr val="tx2">
+                    <a:lumMod val="60000"/>
+                    <a:lumOff val="40000"/>
+                  </a:schemeClr>
+                </a:solidFill>
+              </a:rPr>
+              <a:t>Hardware IP or accelerator</a:t>
+            </a:r>
+            <a:br>
+              <a:rPr lang="en-US" dirty="0"/>
+            </a:br>
+            <a:r>
+              <a:rPr lang="en-US" sz="1400" dirty="0"/>
+              <a:t>Compute intensive tasks</a:t>
+            </a:r>
+          </a:p>
+          <a:p>
+            <a:r>
+              <a:rPr lang="en-US" sz="1400" dirty="0"/>
+              <a:t>Domain specific</a:t>
+            </a:r>
+          </a:p>
+        </p:txBody>
+      </p:sp>
+      <p:pic>
+        <p:nvPicPr>
+          <p:cNvPr id="7" name="Picture 6" descr="Desktop Computer Icon Computer PNG &amp; SVG Design For T-Shirts">
+            <a:extLst>
+              <a:ext uri="{FF2B5EF4-FFF2-40B4-BE49-F238E27FC236}">
+                <a16:creationId xmlns:a16="http://schemas.microsoft.com/office/drawing/2014/main" id="{582F8914-FDA1-332F-1F34-58FC78D7B8EC}"/>
+              </a:ext>
+            </a:extLst>
+          </p:cNvPr>
+          <p:cNvPicPr>
+            <a:picLocks noChangeAspect="1" noChangeArrowheads="1"/>
+          </p:cNvPicPr>
+          <p:nvPr/>
+        </p:nvPicPr>
+        <p:blipFill>
+          <a:blip r:embed="rId3">
+            <a:extLst>
+              <a:ext uri="{28A0092B-C50C-407E-A947-70E740481C1C}">
+                <a14:useLocalDpi xmlns:a14="http://schemas.microsoft.com/office/drawing/2010/main" val="0"/>
+              </a:ext>
+            </a:extLst>
+          </a:blip>
+          <a:srcRect/>
+          <a:stretch>
+            <a:fillRect/>
+          </a:stretch>
+        </p:blipFill>
+        <p:spPr bwMode="auto">
+          <a:xfrm>
+            <a:off x="670438" y="1948043"/>
+            <a:ext cx="1606455" cy="1606455"/>
+          </a:xfrm>
+          <a:prstGeom prst="rect">
+            <a:avLst/>
+          </a:prstGeom>
+          <a:noFill/>
+          <a:extLst>
+            <a:ext uri="{909E8E84-426E-40DD-AFC4-6F175D3DCCD1}">
+              <a14:hiddenFill xmlns:a14="http://schemas.microsoft.com/office/drawing/2010/main">
+                <a:solidFill>
+                  <a:srgbClr val="FFFFFF"/>
+                </a:solidFill>
+              </a14:hiddenFill>
+            </a:ext>
+          </a:extLst>
+        </p:spPr>
+      </p:pic>
+      <p:sp>
+        <p:nvSpPr>
+          <p:cNvPr id="8" name="Arrow: Left-Right 7">
+            <a:extLst>
+              <a:ext uri="{FF2B5EF4-FFF2-40B4-BE49-F238E27FC236}">
+                <a16:creationId xmlns:a16="http://schemas.microsoft.com/office/drawing/2014/main" id="{CC71A5C9-D584-DF02-58FB-2DA2DA0B1EDC}"/>
+              </a:ext>
+            </a:extLst>
+          </p:cNvPr>
+          <p:cNvSpPr/>
+          <p:nvPr/>
+        </p:nvSpPr>
+        <p:spPr>
+          <a:xfrm>
+            <a:off x="5900982" y="2589821"/>
+            <a:ext cx="629035" cy="314450"/>
+          </a:xfrm>
+          <a:prstGeom prst="leftRightArrow">
+            <a:avLst/>
+          </a:prstGeom>
+          <a:solidFill>
+            <a:schemeClr val="accent1">
+              <a:lumMod val="20000"/>
+              <a:lumOff val="80000"/>
+            </a:schemeClr>
+          </a:solidFill>
+        </p:spPr>
+        <p:style>
+          <a:lnRef idx="2">
+            <a:schemeClr val="accent1">
+              <a:shade val="15000"/>
+            </a:schemeClr>
+          </a:lnRef>
+          <a:fillRef idx="1">
+            <a:schemeClr val="accent1"/>
+          </a:fillRef>
+          <a:effectRef idx="0">
+            <a:schemeClr val="accent1"/>
+          </a:effectRef>
+          <a:fontRef idx="minor">
+            <a:schemeClr val="lt1"/>
+          </a:fontRef>
+        </p:style>
+        <p:txBody>
+          <a:bodyPr rtlCol="0" anchor="ctr"/>
+          <a:lstStyle/>
+          <a:p>
+            <a:pPr algn="ctr"/>
+            <a:endParaRPr lang="en-US"/>
+          </a:p>
+        </p:txBody>
+      </p:sp>
+      <p:sp>
+        <p:nvSpPr>
+          <p:cNvPr id="9" name="TextBox 8">
+            <a:extLst>
+              <a:ext uri="{FF2B5EF4-FFF2-40B4-BE49-F238E27FC236}">
+                <a16:creationId xmlns:a16="http://schemas.microsoft.com/office/drawing/2014/main" id="{BECA358E-D56C-FFD2-9565-B5F5EAC15C78}"/>
+              </a:ext>
+            </a:extLst>
+          </p:cNvPr>
+          <p:cNvSpPr txBox="1"/>
+          <p:nvPr/>
+        </p:nvSpPr>
+        <p:spPr>
+          <a:xfrm>
+            <a:off x="3547478" y="3541952"/>
+            <a:ext cx="1944635" cy="1200329"/>
+          </a:xfrm>
+          <a:prstGeom prst="rect">
+            <a:avLst/>
+          </a:prstGeom>
+          <a:noFill/>
+        </p:spPr>
+        <p:txBody>
+          <a:bodyPr wrap="none" rtlCol="0">
+            <a:spAutoFit/>
+          </a:bodyPr>
+          <a:lstStyle/>
+          <a:p>
+            <a:r>
+              <a:rPr lang="en-US" sz="1600" dirty="0">
+                <a:solidFill>
+                  <a:schemeClr val="tx2">
+                    <a:lumMod val="60000"/>
+                    <a:lumOff val="40000"/>
+                  </a:schemeClr>
+                </a:solidFill>
+              </a:rPr>
+              <a:t>Embedded Processor</a:t>
+            </a:r>
+            <a:br>
+              <a:rPr lang="en-US" sz="1600" dirty="0"/>
+            </a:br>
+            <a:r>
+              <a:rPr lang="en-US" sz="1400" dirty="0"/>
+              <a:t>(DSP, ARM,…)</a:t>
+            </a:r>
+            <a:br>
+              <a:rPr lang="en-US" sz="1400" dirty="0"/>
+            </a:br>
+            <a:r>
+              <a:rPr lang="en-US" sz="1400" dirty="0"/>
+              <a:t>Configures HW,</a:t>
+            </a:r>
+            <a:br>
+              <a:rPr lang="en-US" sz="1400" dirty="0"/>
+            </a:br>
+            <a:r>
+              <a:rPr lang="en-US" sz="1400" dirty="0"/>
+              <a:t>Manages data transfer,</a:t>
+            </a:r>
+            <a:br>
+              <a:rPr lang="en-US" sz="1400" dirty="0"/>
+            </a:br>
+            <a:r>
+              <a:rPr lang="en-US" sz="1400" dirty="0"/>
+              <a:t>Performs some DSP</a:t>
+            </a:r>
+          </a:p>
+        </p:txBody>
+      </p:sp>
+      <p:pic>
+        <p:nvPicPr>
+          <p:cNvPr id="10" name="Picture 2" descr="What is a DSP chip？-Perceptive Electronic Components">
+            <a:extLst>
+              <a:ext uri="{FF2B5EF4-FFF2-40B4-BE49-F238E27FC236}">
+                <a16:creationId xmlns:a16="http://schemas.microsoft.com/office/drawing/2014/main" id="{1A2093CD-7818-780C-D674-5FC9CF4B5254}"/>
+              </a:ext>
+            </a:extLst>
+          </p:cNvPr>
+          <p:cNvPicPr>
+            <a:picLocks noChangeAspect="1" noChangeArrowheads="1"/>
+          </p:cNvPicPr>
+          <p:nvPr/>
+        </p:nvPicPr>
+        <p:blipFill>
+          <a:blip r:embed="rId4">
+            <a:extLst>
+              <a:ext uri="{28A0092B-C50C-407E-A947-70E740481C1C}">
+                <a14:useLocalDpi xmlns:a14="http://schemas.microsoft.com/office/drawing/2010/main" val="0"/>
+              </a:ext>
+            </a:extLst>
+          </a:blip>
+          <a:srcRect/>
+          <a:stretch>
+            <a:fillRect/>
+          </a:stretch>
+        </p:blipFill>
+        <p:spPr bwMode="auto">
+          <a:xfrm>
+            <a:off x="3638551" y="2215909"/>
+            <a:ext cx="1508972" cy="1100137"/>
+          </a:xfrm>
+          <a:prstGeom prst="rect">
+            <a:avLst/>
+          </a:prstGeom>
+          <a:noFill/>
+          <a:extLst>
+            <a:ext uri="{909E8E84-426E-40DD-AFC4-6F175D3DCCD1}">
+              <a14:hiddenFill xmlns:a14="http://schemas.microsoft.com/office/drawing/2010/main">
+                <a:solidFill>
+                  <a:srgbClr val="FFFFFF"/>
+                </a:solidFill>
+              </a14:hiddenFill>
+            </a:ext>
+          </a:extLst>
+        </p:spPr>
+      </p:pic>
+      <p:sp>
+        <p:nvSpPr>
+          <p:cNvPr id="11" name="TextBox 10">
+            <a:extLst>
+              <a:ext uri="{FF2B5EF4-FFF2-40B4-BE49-F238E27FC236}">
+                <a16:creationId xmlns:a16="http://schemas.microsoft.com/office/drawing/2014/main" id="{A1A5ED07-1D32-CB91-D927-26E7A0349461}"/>
+              </a:ext>
+            </a:extLst>
+          </p:cNvPr>
+          <p:cNvSpPr txBox="1"/>
+          <p:nvPr/>
+        </p:nvSpPr>
+        <p:spPr>
+          <a:xfrm>
+            <a:off x="744162" y="3575562"/>
+            <a:ext cx="2095317" cy="1200329"/>
+          </a:xfrm>
+          <a:prstGeom prst="rect">
+            <a:avLst/>
+          </a:prstGeom>
+          <a:noFill/>
+        </p:spPr>
+        <p:txBody>
+          <a:bodyPr wrap="none" rtlCol="0">
+            <a:spAutoFit/>
+          </a:bodyPr>
+          <a:lstStyle/>
+          <a:p>
+            <a:r>
+              <a:rPr lang="en-US" sz="1600" dirty="0">
+                <a:solidFill>
+                  <a:schemeClr val="tx2">
+                    <a:lumMod val="60000"/>
+                    <a:lumOff val="40000"/>
+                  </a:schemeClr>
+                </a:solidFill>
+              </a:rPr>
+              <a:t>Host system</a:t>
+            </a:r>
+            <a:br>
+              <a:rPr lang="en-US" sz="1600" dirty="0"/>
+            </a:br>
+            <a:r>
+              <a:rPr lang="en-US" sz="1400" dirty="0"/>
+              <a:t>Runs main application,</a:t>
+            </a:r>
+            <a:br>
+              <a:rPr lang="en-US" sz="1400" dirty="0"/>
+            </a:br>
+            <a:r>
+              <a:rPr lang="en-US" sz="1400" dirty="0"/>
+              <a:t>User interface,</a:t>
+            </a:r>
+            <a:br>
+              <a:rPr lang="en-US" sz="1400" dirty="0"/>
+            </a:br>
+            <a:r>
+              <a:rPr lang="en-US" sz="1400" dirty="0"/>
+              <a:t>May be embedded as well</a:t>
+            </a:r>
+            <a:br>
+              <a:rPr lang="en-US" sz="1400" dirty="0"/>
+            </a:br>
+            <a:r>
+              <a:rPr lang="en-US" sz="1400" dirty="0"/>
+              <a:t>(e.g., smartphone)</a:t>
+            </a:r>
+          </a:p>
+        </p:txBody>
+      </p:sp>
+      <p:pic>
+        <p:nvPicPr>
+          <p:cNvPr id="8194" name="Picture 2">
+            <a:extLst>
+              <a:ext uri="{FF2B5EF4-FFF2-40B4-BE49-F238E27FC236}">
+                <a16:creationId xmlns:a16="http://schemas.microsoft.com/office/drawing/2014/main" id="{53BBBF18-AD9C-4F40-5760-91B5328C3A0D}"/>
+              </a:ext>
+            </a:extLst>
+          </p:cNvPr>
+          <p:cNvPicPr>
+            <a:picLocks noChangeAspect="1" noChangeArrowheads="1"/>
+          </p:cNvPicPr>
+          <p:nvPr/>
+        </p:nvPicPr>
+        <p:blipFill>
+          <a:blip r:embed="rId5">
+            <a:extLst>
+              <a:ext uri="{28A0092B-C50C-407E-A947-70E740481C1C}">
+                <a14:useLocalDpi xmlns:a14="http://schemas.microsoft.com/office/drawing/2010/main" val="0"/>
+              </a:ext>
+            </a:extLst>
+          </a:blip>
+          <a:srcRect/>
+          <a:stretch>
+            <a:fillRect/>
+          </a:stretch>
+        </p:blipFill>
+        <p:spPr bwMode="auto">
+          <a:xfrm>
+            <a:off x="9783764" y="2276347"/>
+            <a:ext cx="1061296" cy="1040211"/>
+          </a:xfrm>
+          <a:prstGeom prst="rect">
+            <a:avLst/>
+          </a:prstGeom>
+          <a:noFill/>
+          <a:extLst>
+            <a:ext uri="{909E8E84-426E-40DD-AFC4-6F175D3DCCD1}">
+              <a14:hiddenFill xmlns:a14="http://schemas.microsoft.com/office/drawing/2010/main">
+                <a:solidFill>
+                  <a:srgbClr val="FFFFFF"/>
+                </a:solidFill>
+              </a14:hiddenFill>
+            </a:ext>
+          </a:extLst>
+        </p:spPr>
+      </p:pic>
+      <p:sp>
+        <p:nvSpPr>
+          <p:cNvPr id="12" name="TextBox 11">
+            <a:extLst>
+              <a:ext uri="{FF2B5EF4-FFF2-40B4-BE49-F238E27FC236}">
+                <a16:creationId xmlns:a16="http://schemas.microsoft.com/office/drawing/2014/main" id="{CF430031-78C1-A525-F93A-35EF9DC9AF70}"/>
+              </a:ext>
+            </a:extLst>
+          </p:cNvPr>
+          <p:cNvSpPr txBox="1"/>
+          <p:nvPr/>
+        </p:nvSpPr>
+        <p:spPr>
+          <a:xfrm>
+            <a:off x="9501419" y="3524305"/>
+            <a:ext cx="2190600" cy="800219"/>
+          </a:xfrm>
+          <a:prstGeom prst="rect">
+            <a:avLst/>
+          </a:prstGeom>
+          <a:noFill/>
+        </p:spPr>
+        <p:txBody>
+          <a:bodyPr wrap="none" rtlCol="0">
+            <a:spAutoFit/>
+          </a:bodyPr>
+          <a:lstStyle/>
+          <a:p>
+            <a:r>
+              <a:rPr lang="en-US" dirty="0">
+                <a:solidFill>
+                  <a:schemeClr val="tx2">
+                    <a:lumMod val="60000"/>
+                    <a:lumOff val="40000"/>
+                  </a:schemeClr>
+                </a:solidFill>
+              </a:rPr>
+              <a:t>High-speed IO</a:t>
+            </a:r>
+            <a:br>
+              <a:rPr lang="en-US" dirty="0"/>
+            </a:br>
+            <a:r>
+              <a:rPr lang="en-US" sz="1400" dirty="0"/>
+              <a:t>Network interface,</a:t>
+            </a:r>
+            <a:br>
+              <a:rPr lang="en-US" sz="1400" dirty="0"/>
+            </a:br>
+            <a:r>
+              <a:rPr lang="en-US" sz="1400" dirty="0"/>
+              <a:t>Digital communication data</a:t>
+            </a:r>
+          </a:p>
+        </p:txBody>
+      </p:sp>
+      <p:sp>
+        <p:nvSpPr>
+          <p:cNvPr id="13" name="Arrow: Left-Right 12">
+            <a:extLst>
+              <a:ext uri="{FF2B5EF4-FFF2-40B4-BE49-F238E27FC236}">
+                <a16:creationId xmlns:a16="http://schemas.microsoft.com/office/drawing/2014/main" id="{DAEA89D4-5BC4-1DE4-A51F-6C67BAF270A7}"/>
+              </a:ext>
+            </a:extLst>
+          </p:cNvPr>
+          <p:cNvSpPr/>
+          <p:nvPr/>
+        </p:nvSpPr>
+        <p:spPr>
+          <a:xfrm>
+            <a:off x="8716172" y="2608753"/>
+            <a:ext cx="629035" cy="314450"/>
+          </a:xfrm>
+          <a:prstGeom prst="leftRightArrow">
+            <a:avLst/>
+          </a:prstGeom>
+          <a:solidFill>
+            <a:schemeClr val="accent1">
+              <a:lumMod val="20000"/>
+              <a:lumOff val="80000"/>
+            </a:schemeClr>
+          </a:solidFill>
+        </p:spPr>
+        <p:style>
+          <a:lnRef idx="2">
+            <a:schemeClr val="accent1">
+              <a:shade val="15000"/>
+            </a:schemeClr>
+          </a:lnRef>
+          <a:fillRef idx="1">
+            <a:schemeClr val="accent1"/>
+          </a:fillRef>
+          <a:effectRef idx="0">
+            <a:schemeClr val="accent1"/>
+          </a:effectRef>
+          <a:fontRef idx="minor">
+            <a:schemeClr val="lt1"/>
+          </a:fontRef>
+        </p:style>
+        <p:txBody>
+          <a:bodyPr rtlCol="0" anchor="ctr"/>
+          <a:lstStyle/>
+          <a:p>
+            <a:pPr algn="ctr"/>
+            <a:endParaRPr lang="en-US"/>
+          </a:p>
+        </p:txBody>
+      </p:sp>
+      <p:sp>
+        <p:nvSpPr>
+          <p:cNvPr id="14" name="Arrow: Left-Right 13">
+            <a:extLst>
+              <a:ext uri="{FF2B5EF4-FFF2-40B4-BE49-F238E27FC236}">
+                <a16:creationId xmlns:a16="http://schemas.microsoft.com/office/drawing/2014/main" id="{DE51F192-7062-0ADD-6BFB-59AF2B741A08}"/>
+              </a:ext>
+            </a:extLst>
+          </p:cNvPr>
+          <p:cNvSpPr/>
+          <p:nvPr/>
+        </p:nvSpPr>
+        <p:spPr>
+          <a:xfrm>
+            <a:off x="2622763" y="2608753"/>
+            <a:ext cx="629035" cy="314450"/>
+          </a:xfrm>
+          <a:prstGeom prst="leftRightArrow">
+            <a:avLst/>
+          </a:prstGeom>
+          <a:solidFill>
+            <a:schemeClr val="accent1">
+              <a:lumMod val="20000"/>
+              <a:lumOff val="80000"/>
+            </a:schemeClr>
+          </a:solidFill>
+        </p:spPr>
+        <p:style>
+          <a:lnRef idx="2">
+            <a:schemeClr val="accent1">
+              <a:shade val="15000"/>
+            </a:schemeClr>
+          </a:lnRef>
+          <a:fillRef idx="1">
+            <a:schemeClr val="accent1"/>
+          </a:fillRef>
+          <a:effectRef idx="0">
+            <a:schemeClr val="accent1"/>
+          </a:effectRef>
+          <a:fontRef idx="minor">
+            <a:schemeClr val="lt1"/>
+          </a:fontRef>
+        </p:style>
+        <p:txBody>
+          <a:bodyPr rtlCol="0" anchor="ctr"/>
+          <a:lstStyle/>
+          <a:p>
+            <a:pPr algn="ctr"/>
+            <a:endParaRPr lang="en-US"/>
+          </a:p>
+        </p:txBody>
+      </p:sp>
+      <p:sp>
+        <p:nvSpPr>
+          <p:cNvPr id="15" name="Rectangle: Rounded Corners 14">
+            <a:extLst>
+              <a:ext uri="{FF2B5EF4-FFF2-40B4-BE49-F238E27FC236}">
+                <a16:creationId xmlns:a16="http://schemas.microsoft.com/office/drawing/2014/main" id="{EC07B97A-280B-AD24-0061-71B4B7686AD6}"/>
+              </a:ext>
+            </a:extLst>
+          </p:cNvPr>
+          <p:cNvSpPr/>
+          <p:nvPr/>
+        </p:nvSpPr>
+        <p:spPr>
+          <a:xfrm>
+            <a:off x="6774787" y="4775891"/>
+            <a:ext cx="1820233" cy="427434"/>
+          </a:xfrm>
+          <a:prstGeom prst="roundRect">
+            <a:avLst/>
+          </a:prstGeom>
+          <a:solidFill>
+            <a:schemeClr val="accent1">
+              <a:lumMod val="20000"/>
+              <a:lumOff val="80000"/>
+            </a:schemeClr>
+          </a:solidFill>
+        </p:spPr>
+        <p:style>
+          <a:lnRef idx="2">
+            <a:schemeClr val="accent1">
+              <a:shade val="15000"/>
+            </a:schemeClr>
+          </a:lnRef>
+          <a:fillRef idx="1">
+            <a:schemeClr val="accent1"/>
+          </a:fillRef>
+          <a:effectRef idx="0">
+            <a:schemeClr val="accent1"/>
+          </a:effectRef>
+          <a:fontRef idx="minor">
+            <a:schemeClr val="lt1"/>
+          </a:fontRef>
+        </p:style>
+        <p:txBody>
+          <a:bodyPr rtlCol="0" anchor="ctr"/>
+          <a:lstStyle/>
+          <a:p>
+            <a:pPr algn="ctr"/>
+            <a:r>
+              <a:rPr lang="en-US" sz="2000" dirty="0">
+                <a:solidFill>
+                  <a:schemeClr val="tx2"/>
+                </a:solidFill>
+              </a:rPr>
+              <a:t>This class</a:t>
+            </a:r>
+          </a:p>
+        </p:txBody>
+      </p:sp>
+    </p:spTree>
+    <p:extLst>
+      <p:ext uri="{BB962C8B-B14F-4D97-AF65-F5344CB8AC3E}">
+        <p14:creationId xmlns:p14="http://schemas.microsoft.com/office/powerpoint/2010/main" val="3869065047"/>
+      </p:ext>
+    </p:extLst>
+  </p:cSld>
+  <p:clrMapOvr>
+    <a:masterClrMapping/>
+  </p:clrMapOvr>
+</p:sld>
+</file>
+
+<file path=ppt/slides/slide22.xml><?xml version="1.0" encoding="utf-8"?>
+<p:sld xmlns:a="http://schemas.openxmlformats.org/drawingml/2006/main" xmlns:r="http://schemas.openxmlformats.org/officeDocument/2006/relationships" xmlns:p="http://schemas.openxmlformats.org/presentationml/2006/main">
+  <p:cSld>
+    <p:spTree>
+      <p:nvGrpSpPr>
+        <p:cNvPr id="1" name=""/>
+        <p:cNvGrpSpPr/>
+        <p:nvPr/>
+      </p:nvGrpSpPr>
+      <p:grpSpPr>
+        <a:xfrm>
+          <a:off x="0" y="0"/>
+          <a:ext cx="0" cy="0"/>
+          <a:chOff x="0" y="0"/>
+          <a:chExt cx="0" cy="0"/>
+        </a:xfrm>
+      </p:grpSpPr>
+      <p:sp>
+        <p:nvSpPr>
+          <p:cNvPr id="2" name="Title 1">
+            <a:extLst>
+              <a:ext uri="{FF2B5EF4-FFF2-40B4-BE49-F238E27FC236}">
+                <a16:creationId xmlns:a16="http://schemas.microsoft.com/office/drawing/2014/main" id="{F70220A4-5278-111F-CB4E-7533CCDE6AAB}"/>
+              </a:ext>
+            </a:extLst>
+          </p:cNvPr>
+          <p:cNvSpPr>
+            <a:spLocks noGrp="1"/>
+          </p:cNvSpPr>
+          <p:nvPr>
+            <p:ph type="title"/>
+          </p:nvPr>
+        </p:nvSpPr>
+        <p:spPr/>
+        <p:txBody>
+          <a:bodyPr/>
+          <a:lstStyle/>
+          <a:p>
+            <a:r>
+              <a:rPr lang="en-US" dirty="0"/>
               <a:t>What is Custom Hardware Good At</a:t>
             </a:r>
           </a:p>
@@ -10102,7 +10295,7 @@
           <a:p>
             <a:fld id="{629637A9-119A-49DA-BD12-AAC58B377D80}" type="slidenum">
               <a:rPr lang="en-US" smtClean="0"/>
-              <a:t>21</a:t>
+              <a:t>22</a:t>
             </a:fld>
             <a:endParaRPr lang="en-US" dirty="0"/>
           </a:p>
@@ -10121,7 +10314,7 @@
 </p:sld>
 </file>
 
-<file path=ppt/slides/slide22.xml><?xml version="1.0" encoding="utf-8"?>
+<file path=ppt/slides/slide23.xml><?xml version="1.0" encoding="utf-8"?>
 <p:sld xmlns:a="http://schemas.openxmlformats.org/drawingml/2006/main" xmlns:r="http://schemas.openxmlformats.org/officeDocument/2006/relationships" xmlns:p="http://schemas.openxmlformats.org/presentationml/2006/main">
   <p:cSld>
     <p:spTree>
@@ -10197,7 +10390,7 @@
           <a:p>
             <a:fld id="{629637A9-119A-49DA-BD12-AAC58B377D80}" type="slidenum">
               <a:rPr lang="en-US" smtClean="0"/>
-              <a:t>22</a:t>
+              <a:t>23</a:t>
             </a:fld>
             <a:endParaRPr lang="en-US" dirty="0"/>
           </a:p>
@@ -10375,809 +10568,6 @@
     <p:extLst>
       <p:ext uri="{BB962C8B-B14F-4D97-AF65-F5344CB8AC3E}">
         <p14:creationId xmlns:p14="http://schemas.microsoft.com/office/powerpoint/2010/main" val="2182659515"/>
-      </p:ext>
-    </p:extLst>
-  </p:cSld>
-  <p:clrMapOvr>
-    <a:masterClrMapping/>
-  </p:clrMapOvr>
-</p:sld>
-</file>
-
-<file path=ppt/slides/slide23.xml><?xml version="1.0" encoding="utf-8"?>
-<p:sld xmlns:a="http://schemas.openxmlformats.org/drawingml/2006/main" xmlns:r="http://schemas.openxmlformats.org/officeDocument/2006/relationships" xmlns:p="http://schemas.openxmlformats.org/presentationml/2006/main">
-  <p:cSld>
-    <p:spTree>
-      <p:nvGrpSpPr>
-        <p:cNvPr id="1" name=""/>
-        <p:cNvGrpSpPr/>
-        <p:nvPr/>
-      </p:nvGrpSpPr>
-      <p:grpSpPr>
-        <a:xfrm>
-          <a:off x="0" y="0"/>
-          <a:ext cx="0" cy="0"/>
-          <a:chOff x="0" y="0"/>
-          <a:chExt cx="0" cy="0"/>
-        </a:xfrm>
-      </p:grpSpPr>
-      <p:sp>
-        <p:nvSpPr>
-          <p:cNvPr id="2" name="Title 1">
-            <a:extLst>
-              <a:ext uri="{FF2B5EF4-FFF2-40B4-BE49-F238E27FC236}">
-                <a16:creationId xmlns:a16="http://schemas.microsoft.com/office/drawing/2014/main" id="{D4600AE6-2F41-432B-A516-6FCFAA54F0C8}"/>
-              </a:ext>
-            </a:extLst>
-          </p:cNvPr>
-          <p:cNvSpPr>
-            <a:spLocks noGrp="1"/>
-          </p:cNvSpPr>
-          <p:nvPr>
-            <p:ph type="title"/>
-          </p:nvPr>
-        </p:nvSpPr>
-        <p:spPr/>
-        <p:txBody>
-          <a:bodyPr/>
-          <a:lstStyle/>
-          <a:p>
-            <a:r>
-              <a:rPr lang="en-US" dirty="0"/>
-              <a:t>Example:  5G Modem Core</a:t>
-            </a:r>
-          </a:p>
-        </p:txBody>
-      </p:sp>
-      <p:sp>
-        <p:nvSpPr>
-          <p:cNvPr id="4" name="Slide Number Placeholder 3">
-            <a:extLst>
-              <a:ext uri="{FF2B5EF4-FFF2-40B4-BE49-F238E27FC236}">
-                <a16:creationId xmlns:a16="http://schemas.microsoft.com/office/drawing/2014/main" id="{057407C1-DF8C-6F6E-34BD-8A9710ADC5CA}"/>
-              </a:ext>
-            </a:extLst>
-          </p:cNvPr>
-          <p:cNvSpPr>
-            <a:spLocks noGrp="1"/>
-          </p:cNvSpPr>
-          <p:nvPr>
-            <p:ph type="sldNum" sz="quarter" idx="12"/>
-          </p:nvPr>
-        </p:nvSpPr>
-        <p:spPr/>
-        <p:txBody>
-          <a:bodyPr/>
-          <a:lstStyle/>
-          <a:p>
-            <a:fld id="{629637A9-119A-49DA-BD12-AAC58B377D80}" type="slidenum">
-              <a:rPr lang="en-US" smtClean="0"/>
-              <a:t>23</a:t>
-            </a:fld>
-            <a:endParaRPr lang="en-US" dirty="0"/>
-          </a:p>
-        </p:txBody>
-      </p:sp>
-      <p:pic>
-        <p:nvPicPr>
-          <p:cNvPr id="5" name="Picture 2" descr="Asic - Free icons">
-            <a:extLst>
-              <a:ext uri="{FF2B5EF4-FFF2-40B4-BE49-F238E27FC236}">
-                <a16:creationId xmlns:a16="http://schemas.microsoft.com/office/drawing/2014/main" id="{6FD48BF5-CE27-38CF-12AF-0BC6447D91E6}"/>
-              </a:ext>
-            </a:extLst>
-          </p:cNvPr>
-          <p:cNvPicPr>
-            <a:picLocks noChangeAspect="1" noChangeArrowheads="1"/>
-          </p:cNvPicPr>
-          <p:nvPr/>
-        </p:nvPicPr>
-        <p:blipFill>
-          <a:blip r:embed="rId2">
-            <a:extLst>
-              <a:ext uri="{28A0092B-C50C-407E-A947-70E740481C1C}">
-                <a14:useLocalDpi xmlns:a14="http://schemas.microsoft.com/office/drawing/2010/main" val="0"/>
-              </a:ext>
-            </a:extLst>
-          </a:blip>
-          <a:srcRect/>
-          <a:stretch>
-            <a:fillRect/>
-          </a:stretch>
-        </p:blipFill>
-        <p:spPr bwMode="auto">
-          <a:xfrm>
-            <a:off x="6648649" y="1877057"/>
-            <a:ext cx="1026051" cy="1026051"/>
-          </a:xfrm>
-          <a:prstGeom prst="rect">
-            <a:avLst/>
-          </a:prstGeom>
-          <a:noFill/>
-          <a:extLst>
-            <a:ext uri="{909E8E84-426E-40DD-AFC4-6F175D3DCCD1}">
-              <a14:hiddenFill xmlns:a14="http://schemas.microsoft.com/office/drawing/2010/main">
-                <a:solidFill>
-                  <a:srgbClr val="FFFFFF"/>
-                </a:solidFill>
-              </a14:hiddenFill>
-            </a:ext>
-          </a:extLst>
-        </p:spPr>
-      </p:pic>
-      <p:sp>
-        <p:nvSpPr>
-          <p:cNvPr id="6" name="TextBox 5">
-            <a:extLst>
-              <a:ext uri="{FF2B5EF4-FFF2-40B4-BE49-F238E27FC236}">
-                <a16:creationId xmlns:a16="http://schemas.microsoft.com/office/drawing/2014/main" id="{BD0FEDF7-409B-2849-2219-B3751594F169}"/>
-              </a:ext>
-            </a:extLst>
-          </p:cNvPr>
-          <p:cNvSpPr txBox="1"/>
-          <p:nvPr/>
-        </p:nvSpPr>
-        <p:spPr>
-          <a:xfrm>
-            <a:off x="6767013" y="3081262"/>
-            <a:ext cx="1118383" cy="1231106"/>
-          </a:xfrm>
-          <a:prstGeom prst="rect">
-            <a:avLst/>
-          </a:prstGeom>
-          <a:noFill/>
-        </p:spPr>
-        <p:txBody>
-          <a:bodyPr wrap="none" rtlCol="0">
-            <a:spAutoFit/>
-          </a:bodyPr>
-          <a:lstStyle/>
-          <a:p>
-            <a:r>
-              <a:rPr lang="en-US" dirty="0">
-                <a:solidFill>
-                  <a:schemeClr val="tx2">
-                    <a:lumMod val="60000"/>
-                    <a:lumOff val="40000"/>
-                  </a:schemeClr>
-                </a:solidFill>
-              </a:rPr>
-              <a:t>5G HW</a:t>
-            </a:r>
-            <a:br>
-              <a:rPr lang="en-US" dirty="0"/>
-            </a:br>
-            <a:r>
-              <a:rPr lang="en-US" sz="1400" dirty="0"/>
-              <a:t>Filtering, </a:t>
-            </a:r>
-          </a:p>
-          <a:p>
-            <a:r>
-              <a:rPr lang="en-US" sz="1400" dirty="0"/>
-              <a:t>Equalization,</a:t>
-            </a:r>
-            <a:br>
-              <a:rPr lang="en-US" sz="1400" dirty="0"/>
-            </a:br>
-            <a:r>
-              <a:rPr lang="en-US" sz="1400" dirty="0"/>
-              <a:t>Decoding,</a:t>
-            </a:r>
-            <a:br>
-              <a:rPr lang="en-US" sz="1400" dirty="0"/>
-            </a:br>
-            <a:r>
-              <a:rPr lang="en-US" sz="1400" dirty="0"/>
-              <a:t>…</a:t>
-            </a:r>
-          </a:p>
-        </p:txBody>
-      </p:sp>
-      <p:sp>
-        <p:nvSpPr>
-          <p:cNvPr id="9" name="TextBox 8">
-            <a:extLst>
-              <a:ext uri="{FF2B5EF4-FFF2-40B4-BE49-F238E27FC236}">
-                <a16:creationId xmlns:a16="http://schemas.microsoft.com/office/drawing/2014/main" id="{9C0DCD87-AA70-17E0-80EC-C6B7EB92CA3B}"/>
-              </a:ext>
-            </a:extLst>
-          </p:cNvPr>
-          <p:cNvSpPr txBox="1"/>
-          <p:nvPr/>
-        </p:nvSpPr>
-        <p:spPr>
-          <a:xfrm>
-            <a:off x="3503601" y="4896899"/>
-            <a:ext cx="1993238" cy="1415772"/>
-          </a:xfrm>
-          <a:prstGeom prst="rect">
-            <a:avLst/>
-          </a:prstGeom>
-          <a:noFill/>
-        </p:spPr>
-        <p:txBody>
-          <a:bodyPr wrap="none" rtlCol="0">
-            <a:spAutoFit/>
-          </a:bodyPr>
-          <a:lstStyle/>
-          <a:p>
-            <a:r>
-              <a:rPr lang="en-US" sz="1600" dirty="0">
-                <a:solidFill>
-                  <a:schemeClr val="tx2">
-                    <a:lumMod val="60000"/>
-                    <a:lumOff val="40000"/>
-                  </a:schemeClr>
-                </a:solidFill>
-              </a:rPr>
-              <a:t>Hexagon DSP</a:t>
-            </a:r>
-            <a:br>
-              <a:rPr lang="en-US" sz="1600" dirty="0">
-                <a:solidFill>
-                  <a:schemeClr val="tx2">
-                    <a:lumMod val="60000"/>
-                    <a:lumOff val="40000"/>
-                  </a:schemeClr>
-                </a:solidFill>
-              </a:rPr>
-            </a:br>
-            <a:r>
-              <a:rPr lang="en-US" sz="1400" dirty="0"/>
-              <a:t>Control channels,</a:t>
-            </a:r>
-            <a:br>
-              <a:rPr lang="en-US" sz="1400" dirty="0"/>
-            </a:br>
-            <a:r>
-              <a:rPr lang="en-US" sz="1400" dirty="0"/>
-              <a:t>Infrequent, but complex,</a:t>
-            </a:r>
-            <a:br>
-              <a:rPr lang="en-US" sz="1400" dirty="0"/>
-            </a:br>
-            <a:r>
-              <a:rPr lang="en-US" sz="1400" dirty="0"/>
-              <a:t>data processing</a:t>
-            </a:r>
-            <a:br>
-              <a:rPr lang="en-US" sz="1400" dirty="0"/>
-            </a:br>
-            <a:br>
-              <a:rPr lang="en-US" sz="1400" dirty="0"/>
-            </a:br>
-            <a:r>
-              <a:rPr lang="en-US" sz="1400" dirty="0"/>
-              <a:t> 	</a:t>
-            </a:r>
-          </a:p>
-        </p:txBody>
-      </p:sp>
-      <p:sp>
-        <p:nvSpPr>
-          <p:cNvPr id="11" name="TextBox 10">
-            <a:extLst>
-              <a:ext uri="{FF2B5EF4-FFF2-40B4-BE49-F238E27FC236}">
-                <a16:creationId xmlns:a16="http://schemas.microsoft.com/office/drawing/2014/main" id="{B524EDC5-2A84-07C5-7094-C505E2BE8E98}"/>
-              </a:ext>
-            </a:extLst>
-          </p:cNvPr>
-          <p:cNvSpPr txBox="1"/>
-          <p:nvPr/>
-        </p:nvSpPr>
-        <p:spPr>
-          <a:xfrm>
-            <a:off x="718762" y="3055106"/>
-            <a:ext cx="1477649" cy="1200329"/>
-          </a:xfrm>
-          <a:prstGeom prst="rect">
-            <a:avLst/>
-          </a:prstGeom>
-          <a:noFill/>
-        </p:spPr>
-        <p:txBody>
-          <a:bodyPr wrap="none" rtlCol="0">
-            <a:spAutoFit/>
-          </a:bodyPr>
-          <a:lstStyle/>
-          <a:p>
-            <a:r>
-              <a:rPr lang="en-US" sz="1600" dirty="0">
-                <a:solidFill>
-                  <a:schemeClr val="tx2">
-                    <a:lumMod val="60000"/>
-                    <a:lumOff val="40000"/>
-                  </a:schemeClr>
-                </a:solidFill>
-              </a:rPr>
-              <a:t>ARM Core</a:t>
-            </a:r>
-            <a:br>
-              <a:rPr lang="en-US" sz="1600" dirty="0"/>
-            </a:br>
-            <a:r>
-              <a:rPr lang="en-US" sz="1400" dirty="0"/>
-              <a:t>Upper layer SW,</a:t>
-            </a:r>
-            <a:br>
-              <a:rPr lang="en-US" sz="1400" dirty="0"/>
-            </a:br>
-            <a:r>
-              <a:rPr lang="en-US" sz="1400" dirty="0"/>
-              <a:t>Configuration,</a:t>
-            </a:r>
-          </a:p>
-          <a:p>
-            <a:r>
-              <a:rPr lang="en-US" sz="1400" dirty="0"/>
-              <a:t>Networking,</a:t>
-            </a:r>
-          </a:p>
-          <a:p>
-            <a:r>
-              <a:rPr lang="en-US" sz="1400" dirty="0"/>
-              <a:t>Packet processing</a:t>
-            </a:r>
-            <a:endParaRPr lang="en-US" sz="1200" dirty="0"/>
-          </a:p>
-        </p:txBody>
-      </p:sp>
-      <p:sp>
-        <p:nvSpPr>
-          <p:cNvPr id="13" name="TextBox 12">
-            <a:extLst>
-              <a:ext uri="{FF2B5EF4-FFF2-40B4-BE49-F238E27FC236}">
-                <a16:creationId xmlns:a16="http://schemas.microsoft.com/office/drawing/2014/main" id="{7D391DB9-042B-F939-7798-298C120B1DA5}"/>
-              </a:ext>
-            </a:extLst>
-          </p:cNvPr>
-          <p:cNvSpPr txBox="1"/>
-          <p:nvPr/>
-        </p:nvSpPr>
-        <p:spPr>
-          <a:xfrm>
-            <a:off x="9673307" y="2986856"/>
-            <a:ext cx="2244845" cy="1015663"/>
-          </a:xfrm>
-          <a:prstGeom prst="rect">
-            <a:avLst/>
-          </a:prstGeom>
-          <a:noFill/>
-        </p:spPr>
-        <p:txBody>
-          <a:bodyPr wrap="none" rtlCol="0">
-            <a:spAutoFit/>
-          </a:bodyPr>
-          <a:lstStyle/>
-          <a:p>
-            <a:r>
-              <a:rPr lang="en-US" dirty="0">
-                <a:solidFill>
-                  <a:schemeClr val="tx2">
-                    <a:lumMod val="60000"/>
-                    <a:lumOff val="40000"/>
-                  </a:schemeClr>
-                </a:solidFill>
-              </a:rPr>
-              <a:t>RFIC</a:t>
-            </a:r>
-            <a:br>
-              <a:rPr lang="en-US" dirty="0"/>
-            </a:br>
-            <a:r>
-              <a:rPr lang="en-US" sz="1400" dirty="0"/>
-              <a:t>Antenna interface,</a:t>
-            </a:r>
-            <a:br>
-              <a:rPr lang="en-US" sz="1400" dirty="0"/>
-            </a:br>
-            <a:r>
-              <a:rPr lang="en-US" sz="1400" dirty="0"/>
-              <a:t>Radio frequency operations,</a:t>
-            </a:r>
-            <a:br>
-              <a:rPr lang="en-US" sz="1400" dirty="0"/>
-            </a:br>
-            <a:r>
-              <a:rPr lang="en-US" sz="1400" dirty="0"/>
-              <a:t>DACs / ADCs</a:t>
-            </a:r>
-          </a:p>
-        </p:txBody>
-      </p:sp>
-      <p:sp>
-        <p:nvSpPr>
-          <p:cNvPr id="15" name="Arrow: Left-Right 14">
-            <a:extLst>
-              <a:ext uri="{FF2B5EF4-FFF2-40B4-BE49-F238E27FC236}">
-                <a16:creationId xmlns:a16="http://schemas.microsoft.com/office/drawing/2014/main" id="{DA58526A-C756-B6C2-09C6-12A7D759E23B}"/>
-              </a:ext>
-            </a:extLst>
-          </p:cNvPr>
-          <p:cNvSpPr/>
-          <p:nvPr/>
-        </p:nvSpPr>
-        <p:spPr>
-          <a:xfrm>
-            <a:off x="2321438" y="2275997"/>
-            <a:ext cx="3977762" cy="246718"/>
-          </a:xfrm>
-          <a:prstGeom prst="leftRightArrow">
-            <a:avLst/>
-          </a:prstGeom>
-          <a:solidFill>
-            <a:schemeClr val="accent1">
-              <a:lumMod val="20000"/>
-              <a:lumOff val="80000"/>
-            </a:schemeClr>
-          </a:solidFill>
-        </p:spPr>
-        <p:style>
-          <a:lnRef idx="2">
-            <a:schemeClr val="accent1">
-              <a:shade val="15000"/>
-            </a:schemeClr>
-          </a:lnRef>
-          <a:fillRef idx="1">
-            <a:schemeClr val="accent1"/>
-          </a:fillRef>
-          <a:effectRef idx="0">
-            <a:schemeClr val="accent1"/>
-          </a:effectRef>
-          <a:fontRef idx="minor">
-            <a:schemeClr val="lt1"/>
-          </a:fontRef>
-        </p:style>
-        <p:txBody>
-          <a:bodyPr rtlCol="0" anchor="ctr"/>
-          <a:lstStyle/>
-          <a:p>
-            <a:pPr algn="ctr"/>
-            <a:endParaRPr lang="en-US"/>
-          </a:p>
-        </p:txBody>
-      </p:sp>
-      <p:pic>
-        <p:nvPicPr>
-          <p:cNvPr id="11266" name="Picture 2" descr="Qualcomm's Hexagon 685 DSP is a Machine Learning Powerhouse">
-            <a:extLst>
-              <a:ext uri="{FF2B5EF4-FFF2-40B4-BE49-F238E27FC236}">
-                <a16:creationId xmlns:a16="http://schemas.microsoft.com/office/drawing/2014/main" id="{8F067635-8F81-BDC4-96A7-7DC5340D1E70}"/>
-              </a:ext>
-            </a:extLst>
-          </p:cNvPr>
-          <p:cNvPicPr>
-            <a:picLocks noChangeAspect="1" noChangeArrowheads="1"/>
-          </p:cNvPicPr>
-          <p:nvPr/>
-        </p:nvPicPr>
-        <p:blipFill>
-          <a:blip r:embed="rId3">
-            <a:extLst>
-              <a:ext uri="{28A0092B-C50C-407E-A947-70E740481C1C}">
-                <a14:useLocalDpi xmlns:a14="http://schemas.microsoft.com/office/drawing/2010/main" val="0"/>
-              </a:ext>
-            </a:extLst>
-          </a:blip>
-          <a:srcRect/>
-          <a:stretch>
-            <a:fillRect/>
-          </a:stretch>
-        </p:blipFill>
-        <p:spPr bwMode="auto">
-          <a:xfrm>
-            <a:off x="3689448" y="3347134"/>
-            <a:ext cx="1621544" cy="1436688"/>
-          </a:xfrm>
-          <a:prstGeom prst="rect">
-            <a:avLst/>
-          </a:prstGeom>
-          <a:noFill/>
-          <a:extLst>
-            <a:ext uri="{909E8E84-426E-40DD-AFC4-6F175D3DCCD1}">
-              <a14:hiddenFill xmlns:a14="http://schemas.microsoft.com/office/drawing/2010/main">
-                <a:solidFill>
-                  <a:srgbClr val="FFFFFF"/>
-                </a:solidFill>
-              </a14:hiddenFill>
-            </a:ext>
-          </a:extLst>
-        </p:spPr>
-      </p:pic>
-      <p:pic>
-        <p:nvPicPr>
-          <p:cNvPr id="11268" name="Picture 4" descr="Cpu ARM Icon | Cold Fusion HD Iconpack ...">
-            <a:extLst>
-              <a:ext uri="{FF2B5EF4-FFF2-40B4-BE49-F238E27FC236}">
-                <a16:creationId xmlns:a16="http://schemas.microsoft.com/office/drawing/2014/main" id="{6C9A746E-12FB-67EA-B66C-DEDA82926B2F}"/>
-              </a:ext>
-            </a:extLst>
-          </p:cNvPr>
-          <p:cNvPicPr>
-            <a:picLocks noChangeAspect="1" noChangeArrowheads="1"/>
-          </p:cNvPicPr>
-          <p:nvPr/>
-        </p:nvPicPr>
-        <p:blipFill>
-          <a:blip r:embed="rId4">
-            <a:extLst>
-              <a:ext uri="{28A0092B-C50C-407E-A947-70E740481C1C}">
-                <a14:useLocalDpi xmlns:a14="http://schemas.microsoft.com/office/drawing/2010/main" val="0"/>
-              </a:ext>
-            </a:extLst>
-          </a:blip>
-          <a:srcRect/>
-          <a:stretch>
-            <a:fillRect/>
-          </a:stretch>
-        </p:blipFill>
-        <p:spPr bwMode="auto">
-          <a:xfrm>
-            <a:off x="933260" y="1755890"/>
-            <a:ext cx="1219200" cy="1219200"/>
-          </a:xfrm>
-          <a:prstGeom prst="rect">
-            <a:avLst/>
-          </a:prstGeom>
-          <a:noFill/>
-          <a:extLst>
-            <a:ext uri="{909E8E84-426E-40DD-AFC4-6F175D3DCCD1}">
-              <a14:hiddenFill xmlns:a14="http://schemas.microsoft.com/office/drawing/2010/main">
-                <a:solidFill>
-                  <a:srgbClr val="FFFFFF"/>
-                </a:solidFill>
-              </a14:hiddenFill>
-            </a:ext>
-          </a:extLst>
-        </p:spPr>
-      </p:pic>
-      <p:sp>
-        <p:nvSpPr>
-          <p:cNvPr id="17" name="Arrow: Left-Right 16">
-            <a:extLst>
-              <a:ext uri="{FF2B5EF4-FFF2-40B4-BE49-F238E27FC236}">
-                <a16:creationId xmlns:a16="http://schemas.microsoft.com/office/drawing/2014/main" id="{042F6860-699E-3DD7-745B-24601342B0F2}"/>
-              </a:ext>
-            </a:extLst>
-          </p:cNvPr>
-          <p:cNvSpPr/>
-          <p:nvPr/>
-        </p:nvSpPr>
-        <p:spPr>
-          <a:xfrm rot="2058403" flipV="1">
-            <a:off x="2127445" y="3306701"/>
-            <a:ext cx="1630968" cy="258694"/>
-          </a:xfrm>
-          <a:prstGeom prst="leftRightArrow">
-            <a:avLst/>
-          </a:prstGeom>
-          <a:solidFill>
-            <a:schemeClr val="accent1">
-              <a:lumMod val="20000"/>
-              <a:lumOff val="80000"/>
-            </a:schemeClr>
-          </a:solidFill>
-        </p:spPr>
-        <p:style>
-          <a:lnRef idx="2">
-            <a:schemeClr val="accent1">
-              <a:shade val="15000"/>
-            </a:schemeClr>
-          </a:lnRef>
-          <a:fillRef idx="1">
-            <a:schemeClr val="accent1"/>
-          </a:fillRef>
-          <a:effectRef idx="0">
-            <a:schemeClr val="accent1"/>
-          </a:effectRef>
-          <a:fontRef idx="minor">
-            <a:schemeClr val="lt1"/>
-          </a:fontRef>
-        </p:style>
-        <p:txBody>
-          <a:bodyPr rtlCol="0" anchor="ctr"/>
-          <a:lstStyle/>
-          <a:p>
-            <a:pPr algn="ctr"/>
-            <a:endParaRPr lang="en-US"/>
-          </a:p>
-        </p:txBody>
-      </p:sp>
-      <p:sp>
-        <p:nvSpPr>
-          <p:cNvPr id="19" name="Arrow: Left-Right 18">
-            <a:extLst>
-              <a:ext uri="{FF2B5EF4-FFF2-40B4-BE49-F238E27FC236}">
-                <a16:creationId xmlns:a16="http://schemas.microsoft.com/office/drawing/2014/main" id="{C24AD7F1-4E14-1A37-8105-B5E6646AD0B5}"/>
-              </a:ext>
-            </a:extLst>
-          </p:cNvPr>
-          <p:cNvSpPr/>
-          <p:nvPr/>
-        </p:nvSpPr>
-        <p:spPr>
-          <a:xfrm rot="19115223" flipV="1">
-            <a:off x="5136023" y="3236739"/>
-            <a:ext cx="1630968" cy="258694"/>
-          </a:xfrm>
-          <a:prstGeom prst="leftRightArrow">
-            <a:avLst/>
-          </a:prstGeom>
-          <a:solidFill>
-            <a:schemeClr val="accent1">
-              <a:lumMod val="20000"/>
-              <a:lumOff val="80000"/>
-            </a:schemeClr>
-          </a:solidFill>
-        </p:spPr>
-        <p:style>
-          <a:lnRef idx="2">
-            <a:schemeClr val="accent1">
-              <a:shade val="15000"/>
-            </a:schemeClr>
-          </a:lnRef>
-          <a:fillRef idx="1">
-            <a:schemeClr val="accent1"/>
-          </a:fillRef>
-          <a:effectRef idx="0">
-            <a:schemeClr val="accent1"/>
-          </a:effectRef>
-          <a:fontRef idx="minor">
-            <a:schemeClr val="lt1"/>
-          </a:fontRef>
-        </p:style>
-        <p:txBody>
-          <a:bodyPr rtlCol="0" anchor="ctr"/>
-          <a:lstStyle/>
-          <a:p>
-            <a:pPr algn="ctr"/>
-            <a:endParaRPr lang="en-US"/>
-          </a:p>
-        </p:txBody>
-      </p:sp>
-      <p:sp>
-        <p:nvSpPr>
-          <p:cNvPr id="20" name="Arrow: Left-Right 19">
-            <a:extLst>
-              <a:ext uri="{FF2B5EF4-FFF2-40B4-BE49-F238E27FC236}">
-                <a16:creationId xmlns:a16="http://schemas.microsoft.com/office/drawing/2014/main" id="{34F275D8-7603-A015-214A-B72B1AE49F04}"/>
-              </a:ext>
-            </a:extLst>
-          </p:cNvPr>
-          <p:cNvSpPr/>
-          <p:nvPr/>
-        </p:nvSpPr>
-        <p:spPr>
-          <a:xfrm flipV="1">
-            <a:off x="7710871" y="2209833"/>
-            <a:ext cx="1692807" cy="258694"/>
-          </a:xfrm>
-          <a:prstGeom prst="leftRightArrow">
-            <a:avLst/>
-          </a:prstGeom>
-          <a:solidFill>
-            <a:schemeClr val="accent1">
-              <a:lumMod val="20000"/>
-              <a:lumOff val="80000"/>
-            </a:schemeClr>
-          </a:solidFill>
-        </p:spPr>
-        <p:style>
-          <a:lnRef idx="2">
-            <a:schemeClr val="accent1">
-              <a:shade val="15000"/>
-            </a:schemeClr>
-          </a:lnRef>
-          <a:fillRef idx="1">
-            <a:schemeClr val="accent1"/>
-          </a:fillRef>
-          <a:effectRef idx="0">
-            <a:schemeClr val="accent1"/>
-          </a:effectRef>
-          <a:fontRef idx="minor">
-            <a:schemeClr val="lt1"/>
-          </a:fontRef>
-        </p:style>
-        <p:txBody>
-          <a:bodyPr rtlCol="0" anchor="ctr"/>
-          <a:lstStyle/>
-          <a:p>
-            <a:pPr algn="ctr"/>
-            <a:endParaRPr lang="en-US"/>
-          </a:p>
-        </p:txBody>
-      </p:sp>
-      <p:pic>
-        <p:nvPicPr>
-          <p:cNvPr id="11270" name="Picture 6" descr="Choosing the Right RFIC Design Partner">
-            <a:extLst>
-              <a:ext uri="{FF2B5EF4-FFF2-40B4-BE49-F238E27FC236}">
-                <a16:creationId xmlns:a16="http://schemas.microsoft.com/office/drawing/2014/main" id="{87C55D30-F153-6C10-805B-9869B273AF56}"/>
-              </a:ext>
-            </a:extLst>
-          </p:cNvPr>
-          <p:cNvPicPr>
-            <a:picLocks noChangeAspect="1" noChangeArrowheads="1"/>
-          </p:cNvPicPr>
-          <p:nvPr/>
-        </p:nvPicPr>
-        <p:blipFill>
-          <a:blip r:embed="rId5">
-            <a:extLst>
-              <a:ext uri="{28A0092B-C50C-407E-A947-70E740481C1C}">
-                <a14:useLocalDpi xmlns:a14="http://schemas.microsoft.com/office/drawing/2010/main" val="0"/>
-              </a:ext>
-            </a:extLst>
-          </a:blip>
-          <a:srcRect/>
-          <a:stretch>
-            <a:fillRect/>
-          </a:stretch>
-        </p:blipFill>
-        <p:spPr bwMode="auto">
-          <a:xfrm>
-            <a:off x="9673307" y="1877057"/>
-            <a:ext cx="1823982" cy="918469"/>
-          </a:xfrm>
-          <a:prstGeom prst="rect">
-            <a:avLst/>
-          </a:prstGeom>
-          <a:noFill/>
-          <a:extLst>
-            <a:ext uri="{909E8E84-426E-40DD-AFC4-6F175D3DCCD1}">
-              <a14:hiddenFill xmlns:a14="http://schemas.microsoft.com/office/drawing/2010/main">
-                <a:solidFill>
-                  <a:srgbClr val="FFFFFF"/>
-                </a:solidFill>
-              </a14:hiddenFill>
-            </a:ext>
-          </a:extLst>
-        </p:spPr>
-      </p:pic>
-      <p:sp>
-        <p:nvSpPr>
-          <p:cNvPr id="21" name="TextBox 20">
-            <a:extLst>
-              <a:ext uri="{FF2B5EF4-FFF2-40B4-BE49-F238E27FC236}">
-                <a16:creationId xmlns:a16="http://schemas.microsoft.com/office/drawing/2014/main" id="{17DF7769-D3F0-EE56-88A5-52B8ECB8A87B}"/>
-              </a:ext>
-            </a:extLst>
-          </p:cNvPr>
-          <p:cNvSpPr txBox="1"/>
-          <p:nvPr/>
-        </p:nvSpPr>
-        <p:spPr>
-          <a:xfrm>
-            <a:off x="8068485" y="1843567"/>
-            <a:ext cx="1094146" cy="338554"/>
-          </a:xfrm>
-          <a:prstGeom prst="rect">
-            <a:avLst/>
-          </a:prstGeom>
-          <a:noFill/>
-        </p:spPr>
-        <p:txBody>
-          <a:bodyPr wrap="none" rtlCol="0">
-            <a:spAutoFit/>
-          </a:bodyPr>
-          <a:lstStyle/>
-          <a:p>
-            <a:r>
-              <a:rPr lang="en-US" sz="1600" dirty="0" err="1"/>
-              <a:t>Gsamps</a:t>
-            </a:r>
-            <a:r>
-              <a:rPr lang="en-US" sz="1600" dirty="0"/>
-              <a:t> / s</a:t>
-            </a:r>
-          </a:p>
-        </p:txBody>
-      </p:sp>
-    </p:spTree>
-    <p:extLst>
-      <p:ext uri="{BB962C8B-B14F-4D97-AF65-F5344CB8AC3E}">
-        <p14:creationId xmlns:p14="http://schemas.microsoft.com/office/powerpoint/2010/main" val="290173976"/>
       </p:ext>
     </p:extLst>
   </p:cSld>
@@ -11209,7 +10599,7 @@
           <p:cNvPr id="2" name="Title 1">
             <a:extLst>
               <a:ext uri="{FF2B5EF4-FFF2-40B4-BE49-F238E27FC236}">
-                <a16:creationId xmlns:a16="http://schemas.microsoft.com/office/drawing/2014/main" id="{EE35AC84-E245-98CD-8B48-37EFE406EB14}"/>
+                <a16:creationId xmlns:a16="http://schemas.microsoft.com/office/drawing/2014/main" id="{D4600AE6-2F41-432B-A516-6FCFAA54F0C8}"/>
               </a:ext>
             </a:extLst>
           </p:cNvPr>
@@ -11227,94 +10617,8 @@
           <a:p>
             <a:r>
               <a:rPr lang="en-US" dirty="0"/>
-              <a:t>Example:  </a:t>
-            </a:r>
-            <a:r>
-              <a:rPr lang="en-US" dirty="0" err="1"/>
-              <a:t>Robomorphic</a:t>
-            </a:r>
-            <a:r>
-              <a:rPr lang="en-US" dirty="0"/>
-              <a:t> Computing</a:t>
-            </a:r>
-          </a:p>
-        </p:txBody>
-      </p:sp>
-      <p:sp>
-        <p:nvSpPr>
-          <p:cNvPr id="3" name="Content Placeholder 2">
-            <a:extLst>
-              <a:ext uri="{FF2B5EF4-FFF2-40B4-BE49-F238E27FC236}">
-                <a16:creationId xmlns:a16="http://schemas.microsoft.com/office/drawing/2014/main" id="{DC8D9C84-B569-36FA-BF09-9F8B6D27658B}"/>
-              </a:ext>
-            </a:extLst>
-          </p:cNvPr>
-          <p:cNvSpPr>
-            <a:spLocks noGrp="1"/>
-          </p:cNvSpPr>
-          <p:nvPr>
-            <p:ph idx="1"/>
-          </p:nvPr>
-        </p:nvSpPr>
-        <p:spPr/>
-        <p:txBody>
-          <a:bodyPr/>
-          <a:lstStyle/>
-          <a:p>
-            <a:r>
-              <a:rPr lang="en-US" dirty="0"/>
-              <a:t>Custom accelerator for robotic computation</a:t>
-            </a:r>
-          </a:p>
-          <a:p>
-            <a:r>
-              <a:rPr lang="en-US" dirty="0"/>
-              <a:t>Performs complex kinematic simulations for:</a:t>
-            </a:r>
-          </a:p>
-          <a:p>
-            <a:pPr lvl="1"/>
-            <a:r>
-              <a:rPr lang="en-US" dirty="0"/>
-              <a:t>Model predictive control</a:t>
-            </a:r>
-          </a:p>
-          <a:p>
-            <a:pPr lvl="1"/>
-            <a:r>
-              <a:rPr lang="en-US" dirty="0"/>
-              <a:t>Path planning</a:t>
-            </a:r>
-          </a:p>
-          <a:p>
-            <a:r>
-              <a:rPr lang="en-US" dirty="0"/>
-              <a:t>Key challenge:</a:t>
-            </a:r>
-          </a:p>
-          <a:p>
-            <a:pPr lvl="1"/>
-            <a:r>
-              <a:rPr lang="en-US" dirty="0"/>
-              <a:t>How do you describe robot morphology?</a:t>
-            </a:r>
-          </a:p>
-          <a:p>
-            <a:pPr lvl="1"/>
-            <a:r>
-              <a:rPr lang="en-US" dirty="0"/>
-              <a:t>Need a general structure applicable to many robots</a:t>
-            </a:r>
-          </a:p>
-          <a:p>
-            <a:pPr lvl="1"/>
-            <a:r>
-              <a:rPr lang="en-US" dirty="0"/>
-              <a:t>Many algorithms</a:t>
-            </a:r>
-          </a:p>
-          <a:p>
-            <a:endParaRPr lang="en-US" dirty="0"/>
+              <a:t>Example:  5G Modem Core</a:t>
+            </a:r>
           </a:p>
         </p:txBody>
       </p:sp>
@@ -11323,7 +10627,7 @@
           <p:cNvPr id="4" name="Slide Number Placeholder 3">
             <a:extLst>
               <a:ext uri="{FF2B5EF4-FFF2-40B4-BE49-F238E27FC236}">
-                <a16:creationId xmlns:a16="http://schemas.microsoft.com/office/drawing/2014/main" id="{205FB40B-0157-4203-791C-6519DEEEEF4F}"/>
+                <a16:creationId xmlns:a16="http://schemas.microsoft.com/office/drawing/2014/main" id="{057407C1-DF8C-6F6E-34BD-8A9710ADC5CA}"/>
               </a:ext>
             </a:extLst>
           </p:cNvPr>
@@ -11349,140 +10653,724 @@
       </p:sp>
       <p:pic>
         <p:nvPicPr>
-          <p:cNvPr id="6" name="Picture 5">
-            <a:extLst>
-              <a:ext uri="{FF2B5EF4-FFF2-40B4-BE49-F238E27FC236}">
-                <a16:creationId xmlns:a16="http://schemas.microsoft.com/office/drawing/2014/main" id="{589F3710-DFAA-8527-FC92-B0C34895F828}"/>
+          <p:cNvPr id="5" name="Picture 2" descr="Asic - Free icons">
+            <a:extLst>
+              <a:ext uri="{FF2B5EF4-FFF2-40B4-BE49-F238E27FC236}">
+                <a16:creationId xmlns:a16="http://schemas.microsoft.com/office/drawing/2014/main" id="{6FD48BF5-CE27-38CF-12AF-0BC6447D91E6}"/>
               </a:ext>
             </a:extLst>
           </p:cNvPr>
           <p:cNvPicPr>
-            <a:picLocks noChangeAspect="1"/>
+            <a:picLocks noChangeAspect="1" noChangeArrowheads="1"/>
           </p:cNvPicPr>
           <p:nvPr/>
         </p:nvPicPr>
         <p:blipFill>
-          <a:blip r:embed="rId2"/>
+          <a:blip r:embed="rId2">
+            <a:extLst>
+              <a:ext uri="{28A0092B-C50C-407E-A947-70E740481C1C}">
+                <a14:useLocalDpi xmlns:a14="http://schemas.microsoft.com/office/drawing/2010/main" val="0"/>
+              </a:ext>
+            </a:extLst>
+          </a:blip>
+          <a:srcRect/>
           <a:stretch>
             <a:fillRect/>
           </a:stretch>
         </p:blipFill>
-        <p:spPr>
-          <a:xfrm>
-            <a:off x="7159334" y="1825373"/>
-            <a:ext cx="4172532" cy="3600953"/>
-          </a:xfrm>
-          <a:prstGeom prst="rect">
-            <a:avLst/>
-          </a:prstGeom>
-        </p:spPr>
-      </p:pic>
-      <p:sp>
-        <p:nvSpPr>
-          <p:cNvPr id="8" name="TextBox 7">
-            <a:extLst>
-              <a:ext uri="{FF2B5EF4-FFF2-40B4-BE49-F238E27FC236}">
-                <a16:creationId xmlns:a16="http://schemas.microsoft.com/office/drawing/2014/main" id="{D0CB9A43-6499-6C86-8633-423F1A427A3D}"/>
-              </a:ext>
-            </a:extLst>
-          </p:cNvPr>
-          <p:cNvSpPr txBox="1"/>
-          <p:nvPr/>
-        </p:nvSpPr>
-        <p:spPr>
-          <a:xfrm>
-            <a:off x="736600" y="4985760"/>
-            <a:ext cx="6096000" cy="769441"/>
+        <p:spPr bwMode="auto">
+          <a:xfrm>
+            <a:off x="6648649" y="1877057"/>
+            <a:ext cx="1026051" cy="1026051"/>
           </a:xfrm>
           <a:prstGeom prst="rect">
             <a:avLst/>
           </a:prstGeom>
           <a:noFill/>
-        </p:spPr>
-        <p:txBody>
-          <a:bodyPr wrap="square">
+          <a:extLst>
+            <a:ext uri="{909E8E84-426E-40DD-AFC4-6F175D3DCCD1}">
+              <a14:hiddenFill xmlns:a14="http://schemas.microsoft.com/office/drawing/2010/main">
+                <a:solidFill>
+                  <a:srgbClr val="FFFFFF"/>
+                </a:solidFill>
+              </a14:hiddenFill>
+            </a:ext>
+          </a:extLst>
+        </p:spPr>
+      </p:pic>
+      <p:sp>
+        <p:nvSpPr>
+          <p:cNvPr id="6" name="TextBox 5">
+            <a:extLst>
+              <a:ext uri="{FF2B5EF4-FFF2-40B4-BE49-F238E27FC236}">
+                <a16:creationId xmlns:a16="http://schemas.microsoft.com/office/drawing/2014/main" id="{BD0FEDF7-409B-2849-2219-B3751594F169}"/>
+              </a:ext>
+            </a:extLst>
+          </p:cNvPr>
+          <p:cNvSpPr txBox="1"/>
+          <p:nvPr/>
+        </p:nvSpPr>
+        <p:spPr>
+          <a:xfrm>
+            <a:off x="6767013" y="3081262"/>
+            <a:ext cx="1118383" cy="1231106"/>
+          </a:xfrm>
+          <a:prstGeom prst="rect">
+            <a:avLst/>
+          </a:prstGeom>
+          <a:noFill/>
+        </p:spPr>
+        <p:txBody>
+          <a:bodyPr wrap="none" rtlCol="0">
             <a:spAutoFit/>
           </a:bodyPr>
           <a:lstStyle/>
           <a:p>
             <a:r>
-              <a:rPr lang="en-US" sz="1100" b="0" i="0" dirty="0">
+              <a:rPr lang="en-US" dirty="0">
                 <a:solidFill>
-                  <a:srgbClr val="222222"/>
+                  <a:schemeClr val="tx2">
+                    <a:lumMod val="60000"/>
+                    <a:lumOff val="40000"/>
+                  </a:schemeClr>
                 </a:solidFill>
-                <a:effectLst/>
-                <a:latin typeface="Arial" panose="020B0604020202020204" pitchFamily="34" charset="0"/>
               </a:rPr>
-              <a:t>Neuman, S. M., Plancher, B., </a:t>
-            </a:r>
-            <a:r>
-              <a:rPr lang="en-US" sz="1100" b="0" i="0" dirty="0" err="1">
+              <a:t>5G HW</a:t>
+            </a:r>
+            <a:br>
+              <a:rPr lang="en-US" dirty="0"/>
+            </a:br>
+            <a:r>
+              <a:rPr lang="en-US" sz="1400" dirty="0"/>
+              <a:t>Filtering, </a:t>
+            </a:r>
+          </a:p>
+          <a:p>
+            <a:r>
+              <a:rPr lang="en-US" sz="1400" dirty="0"/>
+              <a:t>Equalization,</a:t>
+            </a:r>
+            <a:br>
+              <a:rPr lang="en-US" sz="1400" dirty="0"/>
+            </a:br>
+            <a:r>
+              <a:rPr lang="en-US" sz="1400" dirty="0"/>
+              <a:t>Decoding,</a:t>
+            </a:r>
+            <a:br>
+              <a:rPr lang="en-US" sz="1400" dirty="0"/>
+            </a:br>
+            <a:r>
+              <a:rPr lang="en-US" sz="1400" dirty="0"/>
+              <a:t>…</a:t>
+            </a:r>
+          </a:p>
+        </p:txBody>
+      </p:sp>
+      <p:sp>
+        <p:nvSpPr>
+          <p:cNvPr id="9" name="TextBox 8">
+            <a:extLst>
+              <a:ext uri="{FF2B5EF4-FFF2-40B4-BE49-F238E27FC236}">
+                <a16:creationId xmlns:a16="http://schemas.microsoft.com/office/drawing/2014/main" id="{9C0DCD87-AA70-17E0-80EC-C6B7EB92CA3B}"/>
+              </a:ext>
+            </a:extLst>
+          </p:cNvPr>
+          <p:cNvSpPr txBox="1"/>
+          <p:nvPr/>
+        </p:nvSpPr>
+        <p:spPr>
+          <a:xfrm>
+            <a:off x="3503601" y="4896899"/>
+            <a:ext cx="1993238" cy="1415772"/>
+          </a:xfrm>
+          <a:prstGeom prst="rect">
+            <a:avLst/>
+          </a:prstGeom>
+          <a:noFill/>
+        </p:spPr>
+        <p:txBody>
+          <a:bodyPr wrap="none" rtlCol="0">
+            <a:spAutoFit/>
+          </a:bodyPr>
+          <a:lstStyle/>
+          <a:p>
+            <a:r>
+              <a:rPr lang="en-US" sz="1600" dirty="0">
                 <a:solidFill>
-                  <a:srgbClr val="222222"/>
+                  <a:schemeClr val="tx2">
+                    <a:lumMod val="60000"/>
+                    <a:lumOff val="40000"/>
+                  </a:schemeClr>
                 </a:solidFill>
-                <a:effectLst/>
-                <a:latin typeface="Arial" panose="020B0604020202020204" pitchFamily="34" charset="0"/>
               </a:rPr>
-              <a:t>Bourgeat</a:t>
-            </a:r>
-            <a:r>
-              <a:rPr lang="en-US" sz="1100" b="0" i="0" dirty="0">
+              <a:t>Hexagon DSP</a:t>
+            </a:r>
+            <a:br>
+              <a:rPr lang="en-US" sz="1600" dirty="0">
                 <a:solidFill>
-                  <a:srgbClr val="222222"/>
+                  <a:schemeClr val="tx2">
+                    <a:lumMod val="60000"/>
+                    <a:lumOff val="40000"/>
+                  </a:schemeClr>
                 </a:solidFill>
-                <a:effectLst/>
-                <a:latin typeface="Arial" panose="020B0604020202020204" pitchFamily="34" charset="0"/>
               </a:rPr>
-              <a:t>, T., Tambe, T., Devadas, S., &amp; Reddi, V. J. (2021, April). </a:t>
-            </a:r>
-            <a:r>
-              <a:rPr lang="en-US" sz="1100" b="0" i="0" dirty="0" err="1">
+            </a:br>
+            <a:r>
+              <a:rPr lang="en-US" sz="1400" dirty="0"/>
+              <a:t>Control channels,</a:t>
+            </a:r>
+            <a:br>
+              <a:rPr lang="en-US" sz="1400" dirty="0"/>
+            </a:br>
+            <a:r>
+              <a:rPr lang="en-US" sz="1400" dirty="0"/>
+              <a:t>Infrequent, but complex,</a:t>
+            </a:r>
+            <a:br>
+              <a:rPr lang="en-US" sz="1400" dirty="0"/>
+            </a:br>
+            <a:r>
+              <a:rPr lang="en-US" sz="1400" dirty="0"/>
+              <a:t>data processing</a:t>
+            </a:r>
+            <a:br>
+              <a:rPr lang="en-US" sz="1400" dirty="0"/>
+            </a:br>
+            <a:br>
+              <a:rPr lang="en-US" sz="1400" dirty="0"/>
+            </a:br>
+            <a:r>
+              <a:rPr lang="en-US" sz="1400" dirty="0"/>
+              <a:t> 	</a:t>
+            </a:r>
+          </a:p>
+        </p:txBody>
+      </p:sp>
+      <p:sp>
+        <p:nvSpPr>
+          <p:cNvPr id="11" name="TextBox 10">
+            <a:extLst>
+              <a:ext uri="{FF2B5EF4-FFF2-40B4-BE49-F238E27FC236}">
+                <a16:creationId xmlns:a16="http://schemas.microsoft.com/office/drawing/2014/main" id="{B524EDC5-2A84-07C5-7094-C505E2BE8E98}"/>
+              </a:ext>
+            </a:extLst>
+          </p:cNvPr>
+          <p:cNvSpPr txBox="1"/>
+          <p:nvPr/>
+        </p:nvSpPr>
+        <p:spPr>
+          <a:xfrm>
+            <a:off x="718762" y="3055106"/>
+            <a:ext cx="1477649" cy="1200329"/>
+          </a:xfrm>
+          <a:prstGeom prst="rect">
+            <a:avLst/>
+          </a:prstGeom>
+          <a:noFill/>
+        </p:spPr>
+        <p:txBody>
+          <a:bodyPr wrap="none" rtlCol="0">
+            <a:spAutoFit/>
+          </a:bodyPr>
+          <a:lstStyle/>
+          <a:p>
+            <a:r>
+              <a:rPr lang="en-US" sz="1600" dirty="0">
                 <a:solidFill>
-                  <a:srgbClr val="222222"/>
+                  <a:schemeClr val="tx2">
+                    <a:lumMod val="60000"/>
+                    <a:lumOff val="40000"/>
+                  </a:schemeClr>
                 </a:solidFill>
-                <a:effectLst/>
-                <a:latin typeface="Arial" panose="020B0604020202020204" pitchFamily="34" charset="0"/>
               </a:rPr>
-              <a:t>Robomorphic</a:t>
-            </a:r>
-            <a:r>
-              <a:rPr lang="en-US" sz="1100" b="0" i="0" dirty="0">
+              <a:t>ARM Core</a:t>
+            </a:r>
+            <a:br>
+              <a:rPr lang="en-US" sz="1600" dirty="0"/>
+            </a:br>
+            <a:r>
+              <a:rPr lang="en-US" sz="1400" dirty="0"/>
+              <a:t>Upper layer SW,</a:t>
+            </a:r>
+            <a:br>
+              <a:rPr lang="en-US" sz="1400" dirty="0"/>
+            </a:br>
+            <a:r>
+              <a:rPr lang="en-US" sz="1400" dirty="0"/>
+              <a:t>Configuration,</a:t>
+            </a:r>
+          </a:p>
+          <a:p>
+            <a:r>
+              <a:rPr lang="en-US" sz="1400" dirty="0"/>
+              <a:t>Networking,</a:t>
+            </a:r>
+          </a:p>
+          <a:p>
+            <a:r>
+              <a:rPr lang="en-US" sz="1400" dirty="0"/>
+              <a:t>Packet processing</a:t>
+            </a:r>
+            <a:endParaRPr lang="en-US" sz="1200" dirty="0"/>
+          </a:p>
+        </p:txBody>
+      </p:sp>
+      <p:sp>
+        <p:nvSpPr>
+          <p:cNvPr id="13" name="TextBox 12">
+            <a:extLst>
+              <a:ext uri="{FF2B5EF4-FFF2-40B4-BE49-F238E27FC236}">
+                <a16:creationId xmlns:a16="http://schemas.microsoft.com/office/drawing/2014/main" id="{7D391DB9-042B-F939-7798-298C120B1DA5}"/>
+              </a:ext>
+            </a:extLst>
+          </p:cNvPr>
+          <p:cNvSpPr txBox="1"/>
+          <p:nvPr/>
+        </p:nvSpPr>
+        <p:spPr>
+          <a:xfrm>
+            <a:off x="9673307" y="2986856"/>
+            <a:ext cx="2244845" cy="1015663"/>
+          </a:xfrm>
+          <a:prstGeom prst="rect">
+            <a:avLst/>
+          </a:prstGeom>
+          <a:noFill/>
+        </p:spPr>
+        <p:txBody>
+          <a:bodyPr wrap="none" rtlCol="0">
+            <a:spAutoFit/>
+          </a:bodyPr>
+          <a:lstStyle/>
+          <a:p>
+            <a:r>
+              <a:rPr lang="en-US" dirty="0">
                 <a:solidFill>
-                  <a:srgbClr val="222222"/>
+                  <a:schemeClr val="tx2">
+                    <a:lumMod val="60000"/>
+                    <a:lumOff val="40000"/>
+                  </a:schemeClr>
                 </a:solidFill>
-                <a:effectLst/>
-                <a:latin typeface="Arial" panose="020B0604020202020204" pitchFamily="34" charset="0"/>
               </a:rPr>
-              <a:t> computing: a design methodology for domain-specific accelerators parameterized by robot morphology. In </a:t>
-            </a:r>
-            <a:r>
-              <a:rPr lang="en-US" sz="1100" b="0" i="1" dirty="0">
+              <a:t>RFIC</a:t>
+            </a:r>
+            <a:br>
+              <a:rPr lang="en-US" dirty="0"/>
+            </a:br>
+            <a:r>
+              <a:rPr lang="en-US" sz="1400" dirty="0"/>
+              <a:t>Antenna interface,</a:t>
+            </a:r>
+            <a:br>
+              <a:rPr lang="en-US" sz="1400" dirty="0"/>
+            </a:br>
+            <a:r>
+              <a:rPr lang="en-US" sz="1400" dirty="0"/>
+              <a:t>Radio frequency operations,</a:t>
+            </a:r>
+            <a:br>
+              <a:rPr lang="en-US" sz="1400" dirty="0"/>
+            </a:br>
+            <a:r>
+              <a:rPr lang="en-US" sz="1400" dirty="0"/>
+              <a:t>DACs / ADCs</a:t>
+            </a:r>
+          </a:p>
+        </p:txBody>
+      </p:sp>
+      <p:sp>
+        <p:nvSpPr>
+          <p:cNvPr id="15" name="Arrow: Left-Right 14">
+            <a:extLst>
+              <a:ext uri="{FF2B5EF4-FFF2-40B4-BE49-F238E27FC236}">
+                <a16:creationId xmlns:a16="http://schemas.microsoft.com/office/drawing/2014/main" id="{DA58526A-C756-B6C2-09C6-12A7D759E23B}"/>
+              </a:ext>
+            </a:extLst>
+          </p:cNvPr>
+          <p:cNvSpPr/>
+          <p:nvPr/>
+        </p:nvSpPr>
+        <p:spPr>
+          <a:xfrm>
+            <a:off x="2321438" y="2275997"/>
+            <a:ext cx="3977762" cy="246718"/>
+          </a:xfrm>
+          <a:prstGeom prst="leftRightArrow">
+            <a:avLst/>
+          </a:prstGeom>
+          <a:solidFill>
+            <a:schemeClr val="accent1">
+              <a:lumMod val="20000"/>
+              <a:lumOff val="80000"/>
+            </a:schemeClr>
+          </a:solidFill>
+        </p:spPr>
+        <p:style>
+          <a:lnRef idx="2">
+            <a:schemeClr val="accent1">
+              <a:shade val="15000"/>
+            </a:schemeClr>
+          </a:lnRef>
+          <a:fillRef idx="1">
+            <a:schemeClr val="accent1"/>
+          </a:fillRef>
+          <a:effectRef idx="0">
+            <a:schemeClr val="accent1"/>
+          </a:effectRef>
+          <a:fontRef idx="minor">
+            <a:schemeClr val="lt1"/>
+          </a:fontRef>
+        </p:style>
+        <p:txBody>
+          <a:bodyPr rtlCol="0" anchor="ctr"/>
+          <a:lstStyle/>
+          <a:p>
+            <a:pPr algn="ctr"/>
+            <a:endParaRPr lang="en-US"/>
+          </a:p>
+        </p:txBody>
+      </p:sp>
+      <p:pic>
+        <p:nvPicPr>
+          <p:cNvPr id="11266" name="Picture 2" descr="Qualcomm's Hexagon 685 DSP is a Machine Learning Powerhouse">
+            <a:extLst>
+              <a:ext uri="{FF2B5EF4-FFF2-40B4-BE49-F238E27FC236}">
+                <a16:creationId xmlns:a16="http://schemas.microsoft.com/office/drawing/2014/main" id="{8F067635-8F81-BDC4-96A7-7DC5340D1E70}"/>
+              </a:ext>
+            </a:extLst>
+          </p:cNvPr>
+          <p:cNvPicPr>
+            <a:picLocks noChangeAspect="1" noChangeArrowheads="1"/>
+          </p:cNvPicPr>
+          <p:nvPr/>
+        </p:nvPicPr>
+        <p:blipFill>
+          <a:blip r:embed="rId3">
+            <a:extLst>
+              <a:ext uri="{28A0092B-C50C-407E-A947-70E740481C1C}">
+                <a14:useLocalDpi xmlns:a14="http://schemas.microsoft.com/office/drawing/2010/main" val="0"/>
+              </a:ext>
+            </a:extLst>
+          </a:blip>
+          <a:srcRect/>
+          <a:stretch>
+            <a:fillRect/>
+          </a:stretch>
+        </p:blipFill>
+        <p:spPr bwMode="auto">
+          <a:xfrm>
+            <a:off x="3689448" y="3347134"/>
+            <a:ext cx="1621544" cy="1436688"/>
+          </a:xfrm>
+          <a:prstGeom prst="rect">
+            <a:avLst/>
+          </a:prstGeom>
+          <a:noFill/>
+          <a:extLst>
+            <a:ext uri="{909E8E84-426E-40DD-AFC4-6F175D3DCCD1}">
+              <a14:hiddenFill xmlns:a14="http://schemas.microsoft.com/office/drawing/2010/main">
                 <a:solidFill>
-                  <a:srgbClr val="222222"/>
+                  <a:srgbClr val="FFFFFF"/>
                 </a:solidFill>
-                <a:effectLst/>
-                <a:latin typeface="Arial" panose="020B0604020202020204" pitchFamily="34" charset="0"/>
-              </a:rPr>
-              <a:t>Proceedings of the 26th ACM International Conference on Architectural Support for Programming Languages and Operating Systems</a:t>
-            </a:r>
-            <a:r>
-              <a:rPr lang="en-US" sz="1100" b="0" i="0" dirty="0">
+              </a14:hiddenFill>
+            </a:ext>
+          </a:extLst>
+        </p:spPr>
+      </p:pic>
+      <p:pic>
+        <p:nvPicPr>
+          <p:cNvPr id="11268" name="Picture 4" descr="Cpu ARM Icon | Cold Fusion HD Iconpack ...">
+            <a:extLst>
+              <a:ext uri="{FF2B5EF4-FFF2-40B4-BE49-F238E27FC236}">
+                <a16:creationId xmlns:a16="http://schemas.microsoft.com/office/drawing/2014/main" id="{6C9A746E-12FB-67EA-B66C-DEDA82926B2F}"/>
+              </a:ext>
+            </a:extLst>
+          </p:cNvPr>
+          <p:cNvPicPr>
+            <a:picLocks noChangeAspect="1" noChangeArrowheads="1"/>
+          </p:cNvPicPr>
+          <p:nvPr/>
+        </p:nvPicPr>
+        <p:blipFill>
+          <a:blip r:embed="rId4">
+            <a:extLst>
+              <a:ext uri="{28A0092B-C50C-407E-A947-70E740481C1C}">
+                <a14:useLocalDpi xmlns:a14="http://schemas.microsoft.com/office/drawing/2010/main" val="0"/>
+              </a:ext>
+            </a:extLst>
+          </a:blip>
+          <a:srcRect/>
+          <a:stretch>
+            <a:fillRect/>
+          </a:stretch>
+        </p:blipFill>
+        <p:spPr bwMode="auto">
+          <a:xfrm>
+            <a:off x="933260" y="1755890"/>
+            <a:ext cx="1219200" cy="1219200"/>
+          </a:xfrm>
+          <a:prstGeom prst="rect">
+            <a:avLst/>
+          </a:prstGeom>
+          <a:noFill/>
+          <a:extLst>
+            <a:ext uri="{909E8E84-426E-40DD-AFC4-6F175D3DCCD1}">
+              <a14:hiddenFill xmlns:a14="http://schemas.microsoft.com/office/drawing/2010/main">
                 <a:solidFill>
-                  <a:srgbClr val="222222"/>
+                  <a:srgbClr val="FFFFFF"/>
                 </a:solidFill>
-                <a:effectLst/>
-                <a:latin typeface="Arial" panose="020B0604020202020204" pitchFamily="34" charset="0"/>
-              </a:rPr>
-              <a:t> (pp. 674-686).</a:t>
-            </a:r>
-            <a:endParaRPr lang="en-US" sz="1100" dirty="0"/>
+              </a14:hiddenFill>
+            </a:ext>
+          </a:extLst>
+        </p:spPr>
+      </p:pic>
+      <p:sp>
+        <p:nvSpPr>
+          <p:cNvPr id="17" name="Arrow: Left-Right 16">
+            <a:extLst>
+              <a:ext uri="{FF2B5EF4-FFF2-40B4-BE49-F238E27FC236}">
+                <a16:creationId xmlns:a16="http://schemas.microsoft.com/office/drawing/2014/main" id="{042F6860-699E-3DD7-745B-24601342B0F2}"/>
+              </a:ext>
+            </a:extLst>
+          </p:cNvPr>
+          <p:cNvSpPr/>
+          <p:nvPr/>
+        </p:nvSpPr>
+        <p:spPr>
+          <a:xfrm rot="2058403" flipV="1">
+            <a:off x="2127445" y="3306701"/>
+            <a:ext cx="1630968" cy="258694"/>
+          </a:xfrm>
+          <a:prstGeom prst="leftRightArrow">
+            <a:avLst/>
+          </a:prstGeom>
+          <a:solidFill>
+            <a:schemeClr val="accent1">
+              <a:lumMod val="20000"/>
+              <a:lumOff val="80000"/>
+            </a:schemeClr>
+          </a:solidFill>
+        </p:spPr>
+        <p:style>
+          <a:lnRef idx="2">
+            <a:schemeClr val="accent1">
+              <a:shade val="15000"/>
+            </a:schemeClr>
+          </a:lnRef>
+          <a:fillRef idx="1">
+            <a:schemeClr val="accent1"/>
+          </a:fillRef>
+          <a:effectRef idx="0">
+            <a:schemeClr val="accent1"/>
+          </a:effectRef>
+          <a:fontRef idx="minor">
+            <a:schemeClr val="lt1"/>
+          </a:fontRef>
+        </p:style>
+        <p:txBody>
+          <a:bodyPr rtlCol="0" anchor="ctr"/>
+          <a:lstStyle/>
+          <a:p>
+            <a:pPr algn="ctr"/>
+            <a:endParaRPr lang="en-US"/>
+          </a:p>
+        </p:txBody>
+      </p:sp>
+      <p:sp>
+        <p:nvSpPr>
+          <p:cNvPr id="19" name="Arrow: Left-Right 18">
+            <a:extLst>
+              <a:ext uri="{FF2B5EF4-FFF2-40B4-BE49-F238E27FC236}">
+                <a16:creationId xmlns:a16="http://schemas.microsoft.com/office/drawing/2014/main" id="{C24AD7F1-4E14-1A37-8105-B5E6646AD0B5}"/>
+              </a:ext>
+            </a:extLst>
+          </p:cNvPr>
+          <p:cNvSpPr/>
+          <p:nvPr/>
+        </p:nvSpPr>
+        <p:spPr>
+          <a:xfrm rot="19115223" flipV="1">
+            <a:off x="5136023" y="3236739"/>
+            <a:ext cx="1630968" cy="258694"/>
+          </a:xfrm>
+          <a:prstGeom prst="leftRightArrow">
+            <a:avLst/>
+          </a:prstGeom>
+          <a:solidFill>
+            <a:schemeClr val="accent1">
+              <a:lumMod val="20000"/>
+              <a:lumOff val="80000"/>
+            </a:schemeClr>
+          </a:solidFill>
+        </p:spPr>
+        <p:style>
+          <a:lnRef idx="2">
+            <a:schemeClr val="accent1">
+              <a:shade val="15000"/>
+            </a:schemeClr>
+          </a:lnRef>
+          <a:fillRef idx="1">
+            <a:schemeClr val="accent1"/>
+          </a:fillRef>
+          <a:effectRef idx="0">
+            <a:schemeClr val="accent1"/>
+          </a:effectRef>
+          <a:fontRef idx="minor">
+            <a:schemeClr val="lt1"/>
+          </a:fontRef>
+        </p:style>
+        <p:txBody>
+          <a:bodyPr rtlCol="0" anchor="ctr"/>
+          <a:lstStyle/>
+          <a:p>
+            <a:pPr algn="ctr"/>
+            <a:endParaRPr lang="en-US"/>
+          </a:p>
+        </p:txBody>
+      </p:sp>
+      <p:sp>
+        <p:nvSpPr>
+          <p:cNvPr id="20" name="Arrow: Left-Right 19">
+            <a:extLst>
+              <a:ext uri="{FF2B5EF4-FFF2-40B4-BE49-F238E27FC236}">
+                <a16:creationId xmlns:a16="http://schemas.microsoft.com/office/drawing/2014/main" id="{34F275D8-7603-A015-214A-B72B1AE49F04}"/>
+              </a:ext>
+            </a:extLst>
+          </p:cNvPr>
+          <p:cNvSpPr/>
+          <p:nvPr/>
+        </p:nvSpPr>
+        <p:spPr>
+          <a:xfrm flipV="1">
+            <a:off x="7710871" y="2209833"/>
+            <a:ext cx="1692807" cy="258694"/>
+          </a:xfrm>
+          <a:prstGeom prst="leftRightArrow">
+            <a:avLst/>
+          </a:prstGeom>
+          <a:solidFill>
+            <a:schemeClr val="accent1">
+              <a:lumMod val="20000"/>
+              <a:lumOff val="80000"/>
+            </a:schemeClr>
+          </a:solidFill>
+        </p:spPr>
+        <p:style>
+          <a:lnRef idx="2">
+            <a:schemeClr val="accent1">
+              <a:shade val="15000"/>
+            </a:schemeClr>
+          </a:lnRef>
+          <a:fillRef idx="1">
+            <a:schemeClr val="accent1"/>
+          </a:fillRef>
+          <a:effectRef idx="0">
+            <a:schemeClr val="accent1"/>
+          </a:effectRef>
+          <a:fontRef idx="minor">
+            <a:schemeClr val="lt1"/>
+          </a:fontRef>
+        </p:style>
+        <p:txBody>
+          <a:bodyPr rtlCol="0" anchor="ctr"/>
+          <a:lstStyle/>
+          <a:p>
+            <a:pPr algn="ctr"/>
+            <a:endParaRPr lang="en-US"/>
+          </a:p>
+        </p:txBody>
+      </p:sp>
+      <p:pic>
+        <p:nvPicPr>
+          <p:cNvPr id="11270" name="Picture 6" descr="Choosing the Right RFIC Design Partner">
+            <a:extLst>
+              <a:ext uri="{FF2B5EF4-FFF2-40B4-BE49-F238E27FC236}">
+                <a16:creationId xmlns:a16="http://schemas.microsoft.com/office/drawing/2014/main" id="{87C55D30-F153-6C10-805B-9869B273AF56}"/>
+              </a:ext>
+            </a:extLst>
+          </p:cNvPr>
+          <p:cNvPicPr>
+            <a:picLocks noChangeAspect="1" noChangeArrowheads="1"/>
+          </p:cNvPicPr>
+          <p:nvPr/>
+        </p:nvPicPr>
+        <p:blipFill>
+          <a:blip r:embed="rId5">
+            <a:extLst>
+              <a:ext uri="{28A0092B-C50C-407E-A947-70E740481C1C}">
+                <a14:useLocalDpi xmlns:a14="http://schemas.microsoft.com/office/drawing/2010/main" val="0"/>
+              </a:ext>
+            </a:extLst>
+          </a:blip>
+          <a:srcRect/>
+          <a:stretch>
+            <a:fillRect/>
+          </a:stretch>
+        </p:blipFill>
+        <p:spPr bwMode="auto">
+          <a:xfrm>
+            <a:off x="9673307" y="1877057"/>
+            <a:ext cx="1823982" cy="918469"/>
+          </a:xfrm>
+          <a:prstGeom prst="rect">
+            <a:avLst/>
+          </a:prstGeom>
+          <a:noFill/>
+          <a:extLst>
+            <a:ext uri="{909E8E84-426E-40DD-AFC4-6F175D3DCCD1}">
+              <a14:hiddenFill xmlns:a14="http://schemas.microsoft.com/office/drawing/2010/main">
+                <a:solidFill>
+                  <a:srgbClr val="FFFFFF"/>
+                </a:solidFill>
+              </a14:hiddenFill>
+            </a:ext>
+          </a:extLst>
+        </p:spPr>
+      </p:pic>
+      <p:sp>
+        <p:nvSpPr>
+          <p:cNvPr id="21" name="TextBox 20">
+            <a:extLst>
+              <a:ext uri="{FF2B5EF4-FFF2-40B4-BE49-F238E27FC236}">
+                <a16:creationId xmlns:a16="http://schemas.microsoft.com/office/drawing/2014/main" id="{17DF7769-D3F0-EE56-88A5-52B8ECB8A87B}"/>
+              </a:ext>
+            </a:extLst>
+          </p:cNvPr>
+          <p:cNvSpPr txBox="1"/>
+          <p:nvPr/>
+        </p:nvSpPr>
+        <p:spPr>
+          <a:xfrm>
+            <a:off x="8068485" y="1843567"/>
+            <a:ext cx="1094146" cy="338554"/>
+          </a:xfrm>
+          <a:prstGeom prst="rect">
+            <a:avLst/>
+          </a:prstGeom>
+          <a:noFill/>
+        </p:spPr>
+        <p:txBody>
+          <a:bodyPr wrap="none" rtlCol="0">
+            <a:spAutoFit/>
+          </a:bodyPr>
+          <a:lstStyle/>
+          <a:p>
+            <a:r>
+              <a:rPr lang="en-US" sz="1600" dirty="0" err="1"/>
+              <a:t>Gsamps</a:t>
+            </a:r>
+            <a:r>
+              <a:rPr lang="en-US" sz="1600" dirty="0"/>
+              <a:t> / s</a:t>
+            </a:r>
           </a:p>
         </p:txBody>
       </p:sp>
     </p:spTree>
     <p:extLst>
       <p:ext uri="{BB962C8B-B14F-4D97-AF65-F5344CB8AC3E}">
-        <p14:creationId xmlns:p14="http://schemas.microsoft.com/office/powerpoint/2010/main" val="3796720800"/>
+        <p14:creationId xmlns:p14="http://schemas.microsoft.com/office/powerpoint/2010/main" val="290173976"/>
       </p:ext>
     </p:extLst>
   </p:cSld>
@@ -11514,7 +11402,7 @@
           <p:cNvPr id="2" name="Title 1">
             <a:extLst>
               <a:ext uri="{FF2B5EF4-FFF2-40B4-BE49-F238E27FC236}">
-                <a16:creationId xmlns:a16="http://schemas.microsoft.com/office/drawing/2014/main" id="{195EA058-777E-2005-7139-E1069CD1B945}"/>
+                <a16:creationId xmlns:a16="http://schemas.microsoft.com/office/drawing/2014/main" id="{EE35AC84-E245-98CD-8B48-37EFE406EB14}"/>
               </a:ext>
             </a:extLst>
           </p:cNvPr>
@@ -11532,7 +11420,15 @@
           <a:p>
             <a:r>
               <a:rPr lang="en-US" dirty="0"/>
-              <a:t>FPGA vs. ASIC</a:t>
+              <a:t>Example:  </a:t>
+            </a:r>
+            <a:r>
+              <a:rPr lang="en-US" dirty="0" err="1"/>
+              <a:t>Robomorphic</a:t>
+            </a:r>
+            <a:r>
+              <a:rPr lang="en-US" dirty="0"/>
+              <a:t> Computing</a:t>
             </a:r>
           </a:p>
         </p:txBody>
@@ -11542,7 +11438,7 @@
           <p:cNvPr id="3" name="Content Placeholder 2">
             <a:extLst>
               <a:ext uri="{FF2B5EF4-FFF2-40B4-BE49-F238E27FC236}">
-                <a16:creationId xmlns:a16="http://schemas.microsoft.com/office/drawing/2014/main" id="{1CBDB4AD-2F04-29E8-BF6F-B5111D36AD68}"/>
+                <a16:creationId xmlns:a16="http://schemas.microsoft.com/office/drawing/2014/main" id="{DC8D9C84-B569-36FA-BF09-9F8B6D27658B}"/>
               </a:ext>
             </a:extLst>
           </p:cNvPr>
@@ -11555,105 +11451,63 @@
         </p:nvSpPr>
         <p:spPr/>
         <p:txBody>
-          <a:bodyPr>
-            <a:normAutofit/>
-          </a:bodyPr>
-          <a:lstStyle/>
-          <a:p>
-            <a:r>
-              <a:rPr lang="en-US" dirty="0">
-                <a:solidFill>
-                  <a:schemeClr val="accent1">
-                    <a:lumMod val="60000"/>
-                    <a:lumOff val="40000"/>
-                  </a:schemeClr>
-                </a:solidFill>
-              </a:rPr>
-              <a:t>FPGA:  Field‑Programmable Gate Array</a:t>
+          <a:bodyPr/>
+          <a:lstStyle/>
+          <a:p>
+            <a:r>
+              <a:rPr lang="en-US" dirty="0"/>
+              <a:t>Custom accelerator for robotic computation</a:t>
+            </a:r>
+          </a:p>
+          <a:p>
+            <a:r>
+              <a:rPr lang="en-US" dirty="0"/>
+              <a:t>Performs complex kinematic simulations for:</a:t>
             </a:r>
           </a:p>
           <a:p>
             <a:pPr lvl="1"/>
             <a:r>
               <a:rPr lang="en-US" dirty="0"/>
-              <a:t>Reconfigurable hardware</a:t>
+              <a:t>Model predictive control</a:t>
             </a:r>
           </a:p>
           <a:p>
             <a:pPr lvl="1"/>
             <a:r>
               <a:rPr lang="en-US" dirty="0"/>
-              <a:t>Great for prototyping and teaching: no fabrication needed</a:t>
+              <a:t>Path planning</a:t>
+            </a:r>
+          </a:p>
+          <a:p>
+            <a:r>
+              <a:rPr lang="en-US" dirty="0"/>
+              <a:t>Key challenge:</a:t>
             </a:r>
           </a:p>
           <a:p>
             <a:pPr lvl="1"/>
             <a:r>
               <a:rPr lang="en-US" dirty="0"/>
-              <a:t>Slower and less power‑efficient than ASICs </a:t>
+              <a:t>How do you describe robot morphology?</a:t>
             </a:r>
           </a:p>
           <a:p>
             <a:pPr lvl="1"/>
             <a:r>
               <a:rPr lang="en-US" dirty="0"/>
-              <a:t>Research, rapid development, low‑volume products, networking gear, some accelerators</a:t>
-            </a:r>
-          </a:p>
-          <a:p>
-            <a:r>
-              <a:rPr lang="en-US" dirty="0">
-                <a:solidFill>
-                  <a:schemeClr val="accent1">
-                    <a:lumMod val="60000"/>
-                    <a:lumOff val="40000"/>
-                  </a:schemeClr>
-                </a:solidFill>
-              </a:rPr>
-              <a:t>ASIC:  Application‑Specific Integrated Circuit</a:t>
+              <a:t>Need a general structure applicable to many robots</a:t>
             </a:r>
           </a:p>
           <a:p>
             <a:pPr lvl="1"/>
             <a:r>
               <a:rPr lang="en-US" dirty="0"/>
-              <a:t>Custom hardware chip designed for one purpose (e.g., video codec, 5G modem, ML accelerator)</a:t>
-            </a:r>
-          </a:p>
-          <a:p>
-            <a:pPr lvl="1"/>
-            <a:r>
-              <a:rPr lang="en-US" dirty="0"/>
-              <a:t>Much faster and more power‑efficient than FPGAs</a:t>
-            </a:r>
-          </a:p>
-          <a:p>
-            <a:pPr lvl="1"/>
-            <a:r>
-              <a:rPr lang="en-US" dirty="0"/>
-              <a:t>Cannot be changed after fabrication — the design is permanent</a:t>
-            </a:r>
-          </a:p>
-          <a:p>
-            <a:pPr lvl="1"/>
-            <a:r>
-              <a:rPr lang="en-US" dirty="0"/>
-              <a:t>Manufactured (“fabricated”) at a semiconductor foundry</a:t>
-            </a:r>
-          </a:p>
-          <a:p>
-            <a:pPr lvl="1"/>
-            <a:r>
-              <a:rPr lang="en-US" dirty="0"/>
-              <a:t>Ex:  TSMC, </a:t>
-            </a:r>
-          </a:p>
-          <a:p>
-            <a:pPr lvl="1"/>
-            <a:r>
-              <a:rPr lang="en-US" dirty="0"/>
-              <a:t>Smartphones, GPUs, Automotive, …</a:t>
-            </a:r>
+              <a:t>Many algorithms</a:t>
+            </a:r>
+          </a:p>
+          <a:p>
+            <a:endParaRPr lang="en-US" dirty="0"/>
           </a:p>
         </p:txBody>
       </p:sp>
@@ -11662,7 +11516,7 @@
           <p:cNvPr id="4" name="Slide Number Placeholder 3">
             <a:extLst>
               <a:ext uri="{FF2B5EF4-FFF2-40B4-BE49-F238E27FC236}">
-                <a16:creationId xmlns:a16="http://schemas.microsoft.com/office/drawing/2014/main" id="{31C13599-48FA-323F-4365-2209B7358C35}"/>
+                <a16:creationId xmlns:a16="http://schemas.microsoft.com/office/drawing/2014/main" id="{205FB40B-0157-4203-791C-6519DEEEEF4F}"/>
               </a:ext>
             </a:extLst>
           </p:cNvPr>
@@ -11688,102 +11542,140 @@
       </p:sp>
       <p:pic>
         <p:nvPicPr>
-          <p:cNvPr id="5" name="Picture 4" descr="A Guide to Xilinx FPGA Naming Standards">
-            <a:extLst>
-              <a:ext uri="{FF2B5EF4-FFF2-40B4-BE49-F238E27FC236}">
-                <a16:creationId xmlns:a16="http://schemas.microsoft.com/office/drawing/2014/main" id="{FC46BC06-5C87-443F-C7CD-A4C3B8D7EEA7}"/>
+          <p:cNvPr id="6" name="Picture 5">
+            <a:extLst>
+              <a:ext uri="{FF2B5EF4-FFF2-40B4-BE49-F238E27FC236}">
+                <a16:creationId xmlns:a16="http://schemas.microsoft.com/office/drawing/2014/main" id="{589F3710-DFAA-8527-FC92-B0C34895F828}"/>
               </a:ext>
             </a:extLst>
           </p:cNvPr>
           <p:cNvPicPr>
-            <a:picLocks noChangeAspect="1" noChangeArrowheads="1"/>
+            <a:picLocks noChangeAspect="1"/>
           </p:cNvPicPr>
           <p:nvPr/>
         </p:nvPicPr>
         <p:blipFill>
-          <a:blip r:embed="rId2">
-            <a:extLst>
-              <a:ext uri="{28A0092B-C50C-407E-A947-70E740481C1C}">
-                <a14:useLocalDpi xmlns:a14="http://schemas.microsoft.com/office/drawing/2010/main" val="0"/>
-              </a:ext>
-            </a:extLst>
-          </a:blip>
-          <a:srcRect/>
+          <a:blip r:embed="rId2"/>
           <a:stretch>
             <a:fillRect/>
           </a:stretch>
         </p:blipFill>
-        <p:spPr bwMode="auto">
-          <a:xfrm>
-            <a:off x="9254526" y="1326814"/>
-            <a:ext cx="1895688" cy="1256924"/>
+        <p:spPr>
+          <a:xfrm>
+            <a:off x="7159334" y="1825373"/>
+            <a:ext cx="4172532" cy="3600953"/>
+          </a:xfrm>
+          <a:prstGeom prst="rect">
+            <a:avLst/>
+          </a:prstGeom>
+        </p:spPr>
+      </p:pic>
+      <p:sp>
+        <p:nvSpPr>
+          <p:cNvPr id="8" name="TextBox 7">
+            <a:extLst>
+              <a:ext uri="{FF2B5EF4-FFF2-40B4-BE49-F238E27FC236}">
+                <a16:creationId xmlns:a16="http://schemas.microsoft.com/office/drawing/2014/main" id="{D0CB9A43-6499-6C86-8633-423F1A427A3D}"/>
+              </a:ext>
+            </a:extLst>
+          </p:cNvPr>
+          <p:cNvSpPr txBox="1"/>
+          <p:nvPr/>
+        </p:nvSpPr>
+        <p:spPr>
+          <a:xfrm>
+            <a:off x="736600" y="4985760"/>
+            <a:ext cx="6096000" cy="769441"/>
           </a:xfrm>
           <a:prstGeom prst="rect">
             <a:avLst/>
           </a:prstGeom>
           <a:noFill/>
-          <a:extLst>
-            <a:ext uri="{909E8E84-426E-40DD-AFC4-6F175D3DCCD1}">
-              <a14:hiddenFill xmlns:a14="http://schemas.microsoft.com/office/drawing/2010/main">
+        </p:spPr>
+        <p:txBody>
+          <a:bodyPr wrap="square">
+            <a:spAutoFit/>
+          </a:bodyPr>
+          <a:lstStyle/>
+          <a:p>
+            <a:r>
+              <a:rPr lang="en-US" sz="1100" b="0" i="0" dirty="0">
                 <a:solidFill>
-                  <a:srgbClr val="FFFFFF"/>
+                  <a:srgbClr val="222222"/>
                 </a:solidFill>
-              </a14:hiddenFill>
-            </a:ext>
-          </a:extLst>
-        </p:spPr>
-      </p:pic>
-      <p:pic>
-        <p:nvPicPr>
-          <p:cNvPr id="6" name="Picture 6" descr="Plot of ASIC layout submitted for ...">
-            <a:extLst>
-              <a:ext uri="{FF2B5EF4-FFF2-40B4-BE49-F238E27FC236}">
-                <a16:creationId xmlns:a16="http://schemas.microsoft.com/office/drawing/2014/main" id="{F22938C4-AFBE-FBCA-9CCB-6588355D31C3}"/>
-              </a:ext>
-            </a:extLst>
-          </p:cNvPr>
-          <p:cNvPicPr>
-            <a:picLocks noChangeAspect="1" noChangeArrowheads="1"/>
-          </p:cNvPicPr>
-          <p:nvPr/>
-        </p:nvPicPr>
-        <p:blipFill>
-          <a:blip r:embed="rId3">
-            <a:extLst>
-              <a:ext uri="{28A0092B-C50C-407E-A947-70E740481C1C}">
-                <a14:useLocalDpi xmlns:a14="http://schemas.microsoft.com/office/drawing/2010/main" val="0"/>
-              </a:ext>
-            </a:extLst>
-          </a:blip>
-          <a:srcRect/>
-          <a:stretch>
-            <a:fillRect/>
-          </a:stretch>
-        </p:blipFill>
-        <p:spPr bwMode="auto">
-          <a:xfrm>
-            <a:off x="9198766" y="4268160"/>
-            <a:ext cx="1608080" cy="1600934"/>
-          </a:xfrm>
-          <a:prstGeom prst="rect">
-            <a:avLst/>
-          </a:prstGeom>
-          <a:noFill/>
-          <a:extLst>
-            <a:ext uri="{909E8E84-426E-40DD-AFC4-6F175D3DCCD1}">
-              <a14:hiddenFill xmlns:a14="http://schemas.microsoft.com/office/drawing/2010/main">
+                <a:effectLst/>
+                <a:latin typeface="Arial" panose="020B0604020202020204" pitchFamily="34" charset="0"/>
+              </a:rPr>
+              <a:t>Neuman, S. M., Plancher, B., </a:t>
+            </a:r>
+            <a:r>
+              <a:rPr lang="en-US" sz="1100" b="0" i="0" dirty="0" err="1">
                 <a:solidFill>
-                  <a:srgbClr val="FFFFFF"/>
+                  <a:srgbClr val="222222"/>
                 </a:solidFill>
-              </a14:hiddenFill>
-            </a:ext>
-          </a:extLst>
-        </p:spPr>
-      </p:pic>
+                <a:effectLst/>
+                <a:latin typeface="Arial" panose="020B0604020202020204" pitchFamily="34" charset="0"/>
+              </a:rPr>
+              <a:t>Bourgeat</a:t>
+            </a:r>
+            <a:r>
+              <a:rPr lang="en-US" sz="1100" b="0" i="0" dirty="0">
+                <a:solidFill>
+                  <a:srgbClr val="222222"/>
+                </a:solidFill>
+                <a:effectLst/>
+                <a:latin typeface="Arial" panose="020B0604020202020204" pitchFamily="34" charset="0"/>
+              </a:rPr>
+              <a:t>, T., Tambe, T., Devadas, S., &amp; Reddi, V. J. (2021, April). </a:t>
+            </a:r>
+            <a:r>
+              <a:rPr lang="en-US" sz="1100" b="0" i="0" dirty="0" err="1">
+                <a:solidFill>
+                  <a:srgbClr val="222222"/>
+                </a:solidFill>
+                <a:effectLst/>
+                <a:latin typeface="Arial" panose="020B0604020202020204" pitchFamily="34" charset="0"/>
+              </a:rPr>
+              <a:t>Robomorphic</a:t>
+            </a:r>
+            <a:r>
+              <a:rPr lang="en-US" sz="1100" b="0" i="0" dirty="0">
+                <a:solidFill>
+                  <a:srgbClr val="222222"/>
+                </a:solidFill>
+                <a:effectLst/>
+                <a:latin typeface="Arial" panose="020B0604020202020204" pitchFamily="34" charset="0"/>
+              </a:rPr>
+              <a:t> computing: a design methodology for domain-specific accelerators parameterized by robot morphology. In </a:t>
+            </a:r>
+            <a:r>
+              <a:rPr lang="en-US" sz="1100" b="0" i="1" dirty="0">
+                <a:solidFill>
+                  <a:srgbClr val="222222"/>
+                </a:solidFill>
+                <a:effectLst/>
+                <a:latin typeface="Arial" panose="020B0604020202020204" pitchFamily="34" charset="0"/>
+              </a:rPr>
+              <a:t>Proceedings of the 26th ACM International Conference on Architectural Support for Programming Languages and Operating Systems</a:t>
+            </a:r>
+            <a:r>
+              <a:rPr lang="en-US" sz="1100" b="0" i="0" dirty="0">
+                <a:solidFill>
+                  <a:srgbClr val="222222"/>
+                </a:solidFill>
+                <a:effectLst/>
+                <a:latin typeface="Arial" panose="020B0604020202020204" pitchFamily="34" charset="0"/>
+              </a:rPr>
+              <a:t> (pp. 674-686).</a:t>
+            </a:r>
+            <a:endParaRPr lang="en-US" sz="1100" dirty="0"/>
+          </a:p>
+        </p:txBody>
+      </p:sp>
     </p:spTree>
     <p:extLst>
       <p:ext uri="{BB962C8B-B14F-4D97-AF65-F5344CB8AC3E}">
-        <p14:creationId xmlns:p14="http://schemas.microsoft.com/office/powerpoint/2010/main" val="2128923100"/>
+        <p14:creationId xmlns:p14="http://schemas.microsoft.com/office/powerpoint/2010/main" val="3796720800"/>
       </p:ext>
     </p:extLst>
   </p:cSld>
@@ -11815,7 +11707,7 @@
           <p:cNvPr id="2" name="Title 1">
             <a:extLst>
               <a:ext uri="{FF2B5EF4-FFF2-40B4-BE49-F238E27FC236}">
-                <a16:creationId xmlns:a16="http://schemas.microsoft.com/office/drawing/2014/main" id="{3D0D6B1D-AFEE-66FF-281F-2B6E03B3F66D}"/>
+                <a16:creationId xmlns:a16="http://schemas.microsoft.com/office/drawing/2014/main" id="{195EA058-777E-2005-7139-E1069CD1B945}"/>
               </a:ext>
             </a:extLst>
           </p:cNvPr>
@@ -11833,7 +11725,127 @@
           <a:p>
             <a:r>
               <a:rPr lang="en-US" dirty="0"/>
-              <a:t>Turnaround Time Contrasted</a:t>
+              <a:t>FPGA vs. ASIC</a:t>
+            </a:r>
+          </a:p>
+        </p:txBody>
+      </p:sp>
+      <p:sp>
+        <p:nvSpPr>
+          <p:cNvPr id="3" name="Content Placeholder 2">
+            <a:extLst>
+              <a:ext uri="{FF2B5EF4-FFF2-40B4-BE49-F238E27FC236}">
+                <a16:creationId xmlns:a16="http://schemas.microsoft.com/office/drawing/2014/main" id="{1CBDB4AD-2F04-29E8-BF6F-B5111D36AD68}"/>
+              </a:ext>
+            </a:extLst>
+          </p:cNvPr>
+          <p:cNvSpPr>
+            <a:spLocks noGrp="1"/>
+          </p:cNvSpPr>
+          <p:nvPr>
+            <p:ph idx="1"/>
+          </p:nvPr>
+        </p:nvSpPr>
+        <p:spPr/>
+        <p:txBody>
+          <a:bodyPr>
+            <a:normAutofit/>
+          </a:bodyPr>
+          <a:lstStyle/>
+          <a:p>
+            <a:r>
+              <a:rPr lang="en-US" dirty="0">
+                <a:solidFill>
+                  <a:schemeClr val="accent1">
+                    <a:lumMod val="60000"/>
+                    <a:lumOff val="40000"/>
+                  </a:schemeClr>
+                </a:solidFill>
+              </a:rPr>
+              <a:t>FPGA:  Field‑Programmable Gate Array</a:t>
+            </a:r>
+          </a:p>
+          <a:p>
+            <a:pPr lvl="1"/>
+            <a:r>
+              <a:rPr lang="en-US" dirty="0"/>
+              <a:t>Reconfigurable hardware</a:t>
+            </a:r>
+          </a:p>
+          <a:p>
+            <a:pPr lvl="1"/>
+            <a:r>
+              <a:rPr lang="en-US" dirty="0"/>
+              <a:t>Great for prototyping and teaching: no fabrication needed</a:t>
+            </a:r>
+          </a:p>
+          <a:p>
+            <a:pPr lvl="1"/>
+            <a:r>
+              <a:rPr lang="en-US" dirty="0"/>
+              <a:t>Slower and less power‑efficient than ASICs </a:t>
+            </a:r>
+          </a:p>
+          <a:p>
+            <a:pPr lvl="1"/>
+            <a:r>
+              <a:rPr lang="en-US" dirty="0"/>
+              <a:t>Research, rapid development, low‑volume products, networking gear, some accelerators</a:t>
+            </a:r>
+          </a:p>
+          <a:p>
+            <a:r>
+              <a:rPr lang="en-US" dirty="0">
+                <a:solidFill>
+                  <a:schemeClr val="accent1">
+                    <a:lumMod val="60000"/>
+                    <a:lumOff val="40000"/>
+                  </a:schemeClr>
+                </a:solidFill>
+              </a:rPr>
+              <a:t>ASIC:  Application‑Specific Integrated Circuit</a:t>
+            </a:r>
+          </a:p>
+          <a:p>
+            <a:pPr lvl="1"/>
+            <a:r>
+              <a:rPr lang="en-US" dirty="0"/>
+              <a:t>Custom hardware chip designed for one purpose (e.g., video codec, 5G modem, ML accelerator)</a:t>
+            </a:r>
+          </a:p>
+          <a:p>
+            <a:pPr lvl="1"/>
+            <a:r>
+              <a:rPr lang="en-US" dirty="0"/>
+              <a:t>Much faster and more power‑efficient than FPGAs</a:t>
+            </a:r>
+          </a:p>
+          <a:p>
+            <a:pPr lvl="1"/>
+            <a:r>
+              <a:rPr lang="en-US" dirty="0"/>
+              <a:t>Cannot be changed after fabrication — the design is permanent</a:t>
+            </a:r>
+          </a:p>
+          <a:p>
+            <a:pPr lvl="1"/>
+            <a:r>
+              <a:rPr lang="en-US" dirty="0"/>
+              <a:t>Manufactured (“fabricated”) at a semiconductor foundry</a:t>
+            </a:r>
+          </a:p>
+          <a:p>
+            <a:pPr lvl="1"/>
+            <a:r>
+              <a:rPr lang="en-US" dirty="0"/>
+              <a:t>Ex:  TSMC, </a:t>
+            </a:r>
+          </a:p>
+          <a:p>
+            <a:pPr lvl="1"/>
+            <a:r>
+              <a:rPr lang="en-US" dirty="0"/>
+              <a:t>Smartphones, GPUs, Automotive, …</a:t>
             </a:r>
           </a:p>
         </p:txBody>
@@ -11843,7 +11855,7 @@
           <p:cNvPr id="4" name="Slide Number Placeholder 3">
             <a:extLst>
               <a:ext uri="{FF2B5EF4-FFF2-40B4-BE49-F238E27FC236}">
-                <a16:creationId xmlns:a16="http://schemas.microsoft.com/office/drawing/2014/main" id="{0CE1C5BB-FA82-57C4-2B71-CA4B5E10503F}"/>
+                <a16:creationId xmlns:a16="http://schemas.microsoft.com/office/drawing/2014/main" id="{31C13599-48FA-323F-4365-2209B7358C35}"/>
               </a:ext>
             </a:extLst>
           </p:cNvPr>
@@ -11862,6 +11874,187 @@
             <a:fld id="{629637A9-119A-49DA-BD12-AAC58B377D80}" type="slidenum">
               <a:rPr lang="en-US" smtClean="0"/>
               <a:t>26</a:t>
+            </a:fld>
+            <a:endParaRPr lang="en-US" dirty="0"/>
+          </a:p>
+        </p:txBody>
+      </p:sp>
+      <p:pic>
+        <p:nvPicPr>
+          <p:cNvPr id="5" name="Picture 4" descr="A Guide to Xilinx FPGA Naming Standards">
+            <a:extLst>
+              <a:ext uri="{FF2B5EF4-FFF2-40B4-BE49-F238E27FC236}">
+                <a16:creationId xmlns:a16="http://schemas.microsoft.com/office/drawing/2014/main" id="{FC46BC06-5C87-443F-C7CD-A4C3B8D7EEA7}"/>
+              </a:ext>
+            </a:extLst>
+          </p:cNvPr>
+          <p:cNvPicPr>
+            <a:picLocks noChangeAspect="1" noChangeArrowheads="1"/>
+          </p:cNvPicPr>
+          <p:nvPr/>
+        </p:nvPicPr>
+        <p:blipFill>
+          <a:blip r:embed="rId2">
+            <a:extLst>
+              <a:ext uri="{28A0092B-C50C-407E-A947-70E740481C1C}">
+                <a14:useLocalDpi xmlns:a14="http://schemas.microsoft.com/office/drawing/2010/main" val="0"/>
+              </a:ext>
+            </a:extLst>
+          </a:blip>
+          <a:srcRect/>
+          <a:stretch>
+            <a:fillRect/>
+          </a:stretch>
+        </p:blipFill>
+        <p:spPr bwMode="auto">
+          <a:xfrm>
+            <a:off x="9254526" y="1326814"/>
+            <a:ext cx="1895688" cy="1256924"/>
+          </a:xfrm>
+          <a:prstGeom prst="rect">
+            <a:avLst/>
+          </a:prstGeom>
+          <a:noFill/>
+          <a:extLst>
+            <a:ext uri="{909E8E84-426E-40DD-AFC4-6F175D3DCCD1}">
+              <a14:hiddenFill xmlns:a14="http://schemas.microsoft.com/office/drawing/2010/main">
+                <a:solidFill>
+                  <a:srgbClr val="FFFFFF"/>
+                </a:solidFill>
+              </a14:hiddenFill>
+            </a:ext>
+          </a:extLst>
+        </p:spPr>
+      </p:pic>
+      <p:pic>
+        <p:nvPicPr>
+          <p:cNvPr id="6" name="Picture 6" descr="Plot of ASIC layout submitted for ...">
+            <a:extLst>
+              <a:ext uri="{FF2B5EF4-FFF2-40B4-BE49-F238E27FC236}">
+                <a16:creationId xmlns:a16="http://schemas.microsoft.com/office/drawing/2014/main" id="{F22938C4-AFBE-FBCA-9CCB-6588355D31C3}"/>
+              </a:ext>
+            </a:extLst>
+          </p:cNvPr>
+          <p:cNvPicPr>
+            <a:picLocks noChangeAspect="1" noChangeArrowheads="1"/>
+          </p:cNvPicPr>
+          <p:nvPr/>
+        </p:nvPicPr>
+        <p:blipFill>
+          <a:blip r:embed="rId3">
+            <a:extLst>
+              <a:ext uri="{28A0092B-C50C-407E-A947-70E740481C1C}">
+                <a14:useLocalDpi xmlns:a14="http://schemas.microsoft.com/office/drawing/2010/main" val="0"/>
+              </a:ext>
+            </a:extLst>
+          </a:blip>
+          <a:srcRect/>
+          <a:stretch>
+            <a:fillRect/>
+          </a:stretch>
+        </p:blipFill>
+        <p:spPr bwMode="auto">
+          <a:xfrm>
+            <a:off x="9198766" y="4268160"/>
+            <a:ext cx="1608080" cy="1600934"/>
+          </a:xfrm>
+          <a:prstGeom prst="rect">
+            <a:avLst/>
+          </a:prstGeom>
+          <a:noFill/>
+          <a:extLst>
+            <a:ext uri="{909E8E84-426E-40DD-AFC4-6F175D3DCCD1}">
+              <a14:hiddenFill xmlns:a14="http://schemas.microsoft.com/office/drawing/2010/main">
+                <a:solidFill>
+                  <a:srgbClr val="FFFFFF"/>
+                </a:solidFill>
+              </a14:hiddenFill>
+            </a:ext>
+          </a:extLst>
+        </p:spPr>
+      </p:pic>
+    </p:spTree>
+    <p:extLst>
+      <p:ext uri="{BB962C8B-B14F-4D97-AF65-F5344CB8AC3E}">
+        <p14:creationId xmlns:p14="http://schemas.microsoft.com/office/powerpoint/2010/main" val="2128923100"/>
+      </p:ext>
+    </p:extLst>
+  </p:cSld>
+  <p:clrMapOvr>
+    <a:masterClrMapping/>
+  </p:clrMapOvr>
+</p:sld>
+</file>
+
+<file path=ppt/slides/slide27.xml><?xml version="1.0" encoding="utf-8"?>
+<p:sld xmlns:a="http://schemas.openxmlformats.org/drawingml/2006/main" xmlns:r="http://schemas.openxmlformats.org/officeDocument/2006/relationships" xmlns:p="http://schemas.openxmlformats.org/presentationml/2006/main">
+  <p:cSld>
+    <p:spTree>
+      <p:nvGrpSpPr>
+        <p:cNvPr id="1" name=""/>
+        <p:cNvGrpSpPr/>
+        <p:nvPr/>
+      </p:nvGrpSpPr>
+      <p:grpSpPr>
+        <a:xfrm>
+          <a:off x="0" y="0"/>
+          <a:ext cx="0" cy="0"/>
+          <a:chOff x="0" y="0"/>
+          <a:chExt cx="0" cy="0"/>
+        </a:xfrm>
+      </p:grpSpPr>
+      <p:sp>
+        <p:nvSpPr>
+          <p:cNvPr id="2" name="Title 1">
+            <a:extLst>
+              <a:ext uri="{FF2B5EF4-FFF2-40B4-BE49-F238E27FC236}">
+                <a16:creationId xmlns:a16="http://schemas.microsoft.com/office/drawing/2014/main" id="{3D0D6B1D-AFEE-66FF-281F-2B6E03B3F66D}"/>
+              </a:ext>
+            </a:extLst>
+          </p:cNvPr>
+          <p:cNvSpPr>
+            <a:spLocks noGrp="1"/>
+          </p:cNvSpPr>
+          <p:nvPr>
+            <p:ph type="title"/>
+          </p:nvPr>
+        </p:nvSpPr>
+        <p:spPr/>
+        <p:txBody>
+          <a:bodyPr/>
+          <a:lstStyle/>
+          <a:p>
+            <a:r>
+              <a:rPr lang="en-US" dirty="0"/>
+              <a:t>Turnaround Time Contrasted</a:t>
+            </a:r>
+          </a:p>
+        </p:txBody>
+      </p:sp>
+      <p:sp>
+        <p:nvSpPr>
+          <p:cNvPr id="4" name="Slide Number Placeholder 3">
+            <a:extLst>
+              <a:ext uri="{FF2B5EF4-FFF2-40B4-BE49-F238E27FC236}">
+                <a16:creationId xmlns:a16="http://schemas.microsoft.com/office/drawing/2014/main" id="{0CE1C5BB-FA82-57C4-2B71-CA4B5E10503F}"/>
+              </a:ext>
+            </a:extLst>
+          </p:cNvPr>
+          <p:cNvSpPr>
+            <a:spLocks noGrp="1"/>
+          </p:cNvSpPr>
+          <p:nvPr>
+            <p:ph type="sldNum" sz="quarter" idx="12"/>
+          </p:nvPr>
+        </p:nvSpPr>
+        <p:spPr/>
+        <p:txBody>
+          <a:bodyPr/>
+          <a:lstStyle/>
+          <a:p>
+            <a:fld id="{629637A9-119A-49DA-BD12-AAC58B377D80}" type="slidenum">
+              <a:rPr lang="en-US" smtClean="0"/>
+              <a:t>27</a:t>
             </a:fld>
             <a:endParaRPr lang="en-US" dirty="0"/>
           </a:p>
@@ -14212,205 +14405,6 @@
 </p:sld>
 </file>
 
-<file path=ppt/slides/slide27.xml><?xml version="1.0" encoding="utf-8"?>
-<p:sld xmlns:a="http://schemas.openxmlformats.org/drawingml/2006/main" xmlns:r="http://schemas.openxmlformats.org/officeDocument/2006/relationships" xmlns:p="http://schemas.openxmlformats.org/presentationml/2006/main">
-  <p:cSld>
-    <p:spTree>
-      <p:nvGrpSpPr>
-        <p:cNvPr id="1" name=""/>
-        <p:cNvGrpSpPr/>
-        <p:nvPr/>
-      </p:nvGrpSpPr>
-      <p:grpSpPr>
-        <a:xfrm>
-          <a:off x="0" y="0"/>
-          <a:ext cx="0" cy="0"/>
-          <a:chOff x="0" y="0"/>
-          <a:chExt cx="0" cy="0"/>
-        </a:xfrm>
-      </p:grpSpPr>
-      <p:sp>
-        <p:nvSpPr>
-          <p:cNvPr id="2" name="Title 1">
-            <a:extLst>
-              <a:ext uri="{FF2B5EF4-FFF2-40B4-BE49-F238E27FC236}">
-                <a16:creationId xmlns:a16="http://schemas.microsoft.com/office/drawing/2014/main" id="{5902BE6B-C965-3B9C-18C9-DBAA35FD715F}"/>
-              </a:ext>
-            </a:extLst>
-          </p:cNvPr>
-          <p:cNvSpPr>
-            <a:spLocks noGrp="1"/>
-          </p:cNvSpPr>
-          <p:nvPr>
-            <p:ph type="title"/>
-          </p:nvPr>
-        </p:nvSpPr>
-        <p:spPr/>
-        <p:txBody>
-          <a:bodyPr>
-            <a:normAutofit fontScale="90000"/>
-          </a:bodyPr>
-          <a:lstStyle/>
-          <a:p>
-            <a:r>
-              <a:rPr lang="en-US" dirty="0"/>
-              <a:t>Three Conceptual Challenges for Hardware</a:t>
-            </a:r>
-          </a:p>
-        </p:txBody>
-      </p:sp>
-      <p:sp>
-        <p:nvSpPr>
-          <p:cNvPr id="3" name="Content Placeholder 2">
-            <a:extLst>
-              <a:ext uri="{FF2B5EF4-FFF2-40B4-BE49-F238E27FC236}">
-                <a16:creationId xmlns:a16="http://schemas.microsoft.com/office/drawing/2014/main" id="{D0F07AB2-745A-70C6-B819-350F0A46A4E8}"/>
-              </a:ext>
-            </a:extLst>
-          </p:cNvPr>
-          <p:cNvSpPr>
-            <a:spLocks noGrp="1"/>
-          </p:cNvSpPr>
-          <p:nvPr>
-            <p:ph idx="1"/>
-          </p:nvPr>
-        </p:nvSpPr>
-        <p:spPr/>
-        <p:txBody>
-          <a:bodyPr/>
-          <a:lstStyle/>
-          <a:p>
-            <a:r>
-              <a:rPr lang="en-US" dirty="0">
-                <a:solidFill>
-                  <a:schemeClr val="accent1">
-                    <a:lumMod val="60000"/>
-                    <a:lumOff val="40000"/>
-                  </a:schemeClr>
-                </a:solidFill>
-              </a:rPr>
-              <a:t>Concurrency</a:t>
-            </a:r>
-          </a:p>
-          <a:p>
-            <a:pPr lvl="1"/>
-            <a:r>
-              <a:rPr lang="en-US" dirty="0"/>
-              <a:t>Hardware modules run in parallel</a:t>
-            </a:r>
-          </a:p>
-          <a:p>
-            <a:pPr lvl="1"/>
-            <a:r>
-              <a:rPr lang="en-US" dirty="0"/>
-              <a:t>Like multi-threaded programs</a:t>
-            </a:r>
-          </a:p>
-          <a:p>
-            <a:pPr lvl="1"/>
-            <a:r>
-              <a:rPr lang="en-US" dirty="0"/>
-              <a:t>Must consider resource contention, information passing, …</a:t>
-            </a:r>
-          </a:p>
-          <a:p>
-            <a:r>
-              <a:rPr lang="en-US" dirty="0">
-                <a:solidFill>
-                  <a:schemeClr val="accent1">
-                    <a:lumMod val="60000"/>
-                    <a:lumOff val="40000"/>
-                  </a:schemeClr>
-                </a:solidFill>
-              </a:rPr>
-              <a:t>Long turnaround time</a:t>
-            </a:r>
-          </a:p>
-          <a:p>
-            <a:pPr lvl="1"/>
-            <a:r>
-              <a:rPr lang="en-US" dirty="0"/>
-              <a:t>Need reliable simulation and test before fabrication</a:t>
-            </a:r>
-          </a:p>
-          <a:p>
-            <a:pPr lvl="1"/>
-            <a:r>
-              <a:rPr lang="en-US" dirty="0"/>
-              <a:t>High level of rigor</a:t>
-            </a:r>
-          </a:p>
-          <a:p>
-            <a:r>
-              <a:rPr lang="en-US" dirty="0">
-                <a:solidFill>
-                  <a:schemeClr val="accent1">
-                    <a:lumMod val="60000"/>
-                    <a:lumOff val="40000"/>
-                  </a:schemeClr>
-                </a:solidFill>
-              </a:rPr>
-              <a:t>Need for interface abstraction</a:t>
-            </a:r>
-          </a:p>
-          <a:p>
-            <a:pPr lvl="1"/>
-            <a:r>
-              <a:rPr lang="en-US" dirty="0"/>
-              <a:t>Hardware must work over broad range of problems</a:t>
-            </a:r>
-          </a:p>
-          <a:p>
-            <a:pPr lvl="1"/>
-            <a:r>
-              <a:rPr lang="en-US" dirty="0"/>
-              <a:t>But provide gains specific to domain</a:t>
-            </a:r>
-          </a:p>
-        </p:txBody>
-      </p:sp>
-      <p:sp>
-        <p:nvSpPr>
-          <p:cNvPr id="4" name="Slide Number Placeholder 3">
-            <a:extLst>
-              <a:ext uri="{FF2B5EF4-FFF2-40B4-BE49-F238E27FC236}">
-                <a16:creationId xmlns:a16="http://schemas.microsoft.com/office/drawing/2014/main" id="{5CD0E918-5A19-A38F-D474-AC313F05285A}"/>
-              </a:ext>
-            </a:extLst>
-          </p:cNvPr>
-          <p:cNvSpPr>
-            <a:spLocks noGrp="1"/>
-          </p:cNvSpPr>
-          <p:nvPr>
-            <p:ph type="sldNum" sz="quarter" idx="12"/>
-          </p:nvPr>
-        </p:nvSpPr>
-        <p:spPr/>
-        <p:txBody>
-          <a:bodyPr/>
-          <a:lstStyle/>
-          <a:p>
-            <a:fld id="{629637A9-119A-49DA-BD12-AAC58B377D80}" type="slidenum">
-              <a:rPr lang="en-US" smtClean="0"/>
-              <a:t>27</a:t>
-            </a:fld>
-            <a:endParaRPr lang="en-US" dirty="0"/>
-          </a:p>
-        </p:txBody>
-      </p:sp>
-    </p:spTree>
-    <p:extLst>
-      <p:ext uri="{BB962C8B-B14F-4D97-AF65-F5344CB8AC3E}">
-        <p14:creationId xmlns:p14="http://schemas.microsoft.com/office/powerpoint/2010/main" val="570043704"/>
-      </p:ext>
-    </p:extLst>
-  </p:cSld>
-  <p:clrMapOvr>
-    <a:masterClrMapping/>
-  </p:clrMapOvr>
-</p:sld>
-</file>
-
 <file path=ppt/slides/slide28.xml><?xml version="1.0" encoding="utf-8"?>
 <p:sld xmlns:a="http://schemas.openxmlformats.org/drawingml/2006/main" xmlns:r="http://schemas.openxmlformats.org/officeDocument/2006/relationships" xmlns:p="http://schemas.openxmlformats.org/presentationml/2006/main">
   <p:cSld>
@@ -14433,7 +14427,7 @@
           <p:cNvPr id="2" name="Title 1">
             <a:extLst>
               <a:ext uri="{FF2B5EF4-FFF2-40B4-BE49-F238E27FC236}">
-                <a16:creationId xmlns:a16="http://schemas.microsoft.com/office/drawing/2014/main" id="{C3901BDE-1EC8-9E2C-4B3E-2CFF8C265559}"/>
+                <a16:creationId xmlns:a16="http://schemas.microsoft.com/office/drawing/2014/main" id="{5902BE6B-C965-3B9C-18C9-DBAA35FD715F}"/>
               </a:ext>
             </a:extLst>
           </p:cNvPr>
@@ -14446,12 +14440,124 @@
         </p:nvSpPr>
         <p:spPr/>
         <p:txBody>
+          <a:bodyPr>
+            <a:normAutofit fontScale="90000"/>
+          </a:bodyPr>
+          <a:lstStyle/>
+          <a:p>
+            <a:r>
+              <a:rPr lang="en-US" dirty="0"/>
+              <a:t>Three Conceptual Challenges for Hardware</a:t>
+            </a:r>
+          </a:p>
+        </p:txBody>
+      </p:sp>
+      <p:sp>
+        <p:nvSpPr>
+          <p:cNvPr id="3" name="Content Placeholder 2">
+            <a:extLst>
+              <a:ext uri="{FF2B5EF4-FFF2-40B4-BE49-F238E27FC236}">
+                <a16:creationId xmlns:a16="http://schemas.microsoft.com/office/drawing/2014/main" id="{D0F07AB2-745A-70C6-B819-350F0A46A4E8}"/>
+              </a:ext>
+            </a:extLst>
+          </p:cNvPr>
+          <p:cNvSpPr>
+            <a:spLocks noGrp="1"/>
+          </p:cNvSpPr>
+          <p:nvPr>
+            <p:ph idx="1"/>
+          </p:nvPr>
+        </p:nvSpPr>
+        <p:spPr/>
+        <p:txBody>
           <a:bodyPr/>
           <a:lstStyle/>
           <a:p>
             <a:r>
-              <a:rPr lang="en-US" dirty="0"/>
-              <a:t>HW Design Is Getting Easier</a:t>
+              <a:rPr lang="en-US" dirty="0">
+                <a:solidFill>
+                  <a:schemeClr val="accent1">
+                    <a:lumMod val="60000"/>
+                    <a:lumOff val="40000"/>
+                  </a:schemeClr>
+                </a:solidFill>
+              </a:rPr>
+              <a:t>Concurrency</a:t>
+            </a:r>
+          </a:p>
+          <a:p>
+            <a:pPr lvl="1"/>
+            <a:r>
+              <a:rPr lang="en-US" dirty="0"/>
+              <a:t>Hardware modules run in parallel</a:t>
+            </a:r>
+          </a:p>
+          <a:p>
+            <a:pPr lvl="1"/>
+            <a:r>
+              <a:rPr lang="en-US" dirty="0"/>
+              <a:t>Like multi-threaded programs</a:t>
+            </a:r>
+          </a:p>
+          <a:p>
+            <a:pPr lvl="1"/>
+            <a:r>
+              <a:rPr lang="en-US" dirty="0"/>
+              <a:t>Must consider resource contention, information passing, …</a:t>
+            </a:r>
+          </a:p>
+          <a:p>
+            <a:r>
+              <a:rPr lang="en-US" dirty="0">
+                <a:solidFill>
+                  <a:schemeClr val="accent1">
+                    <a:lumMod val="60000"/>
+                    <a:lumOff val="40000"/>
+                  </a:schemeClr>
+                </a:solidFill>
+              </a:rPr>
+              <a:t>Long turnaround time</a:t>
+            </a:r>
+          </a:p>
+          <a:p>
+            <a:pPr lvl="1"/>
+            <a:r>
+              <a:rPr lang="en-US" dirty="0"/>
+              <a:t>Need reliable simulation and test before fabrication</a:t>
+            </a:r>
+          </a:p>
+          <a:p>
+            <a:pPr lvl="1"/>
+            <a:r>
+              <a:rPr lang="en-US" dirty="0"/>
+              <a:t>High level of rigor</a:t>
+            </a:r>
+          </a:p>
+          <a:p>
+            <a:r>
+              <a:rPr lang="en-US" dirty="0">
+                <a:solidFill>
+                  <a:schemeClr val="accent1">
+                    <a:lumMod val="60000"/>
+                    <a:lumOff val="40000"/>
+                  </a:schemeClr>
+                </a:solidFill>
+              </a:rPr>
+              <a:t>Need for interface abstraction</a:t>
+            </a:r>
+          </a:p>
+          <a:p>
+            <a:pPr lvl="1"/>
+            <a:r>
+              <a:rPr lang="en-US" dirty="0"/>
+              <a:t>Hardware must work over broad range of problems</a:t>
+            </a:r>
+          </a:p>
+          <a:p>
+            <a:pPr lvl="1"/>
+            <a:r>
+              <a:rPr lang="en-US" dirty="0"/>
+              <a:t>But provide gains specific to domain</a:t>
             </a:r>
           </a:p>
         </p:txBody>
@@ -14461,7 +14567,7 @@
           <p:cNvPr id="4" name="Slide Number Placeholder 3">
             <a:extLst>
               <a:ext uri="{FF2B5EF4-FFF2-40B4-BE49-F238E27FC236}">
-                <a16:creationId xmlns:a16="http://schemas.microsoft.com/office/drawing/2014/main" id="{1E5452C9-A8E5-0EBF-1169-0AA25817DB65}"/>
+                <a16:creationId xmlns:a16="http://schemas.microsoft.com/office/drawing/2014/main" id="{5CD0E918-5A19-A38F-D474-AC313F05285A}"/>
               </a:ext>
             </a:extLst>
           </p:cNvPr>
@@ -14480,6 +14586,93 @@
             <a:fld id="{629637A9-119A-49DA-BD12-AAC58B377D80}" type="slidenum">
               <a:rPr lang="en-US" smtClean="0"/>
               <a:t>28</a:t>
+            </a:fld>
+            <a:endParaRPr lang="en-US" dirty="0"/>
+          </a:p>
+        </p:txBody>
+      </p:sp>
+    </p:spTree>
+    <p:extLst>
+      <p:ext uri="{BB962C8B-B14F-4D97-AF65-F5344CB8AC3E}">
+        <p14:creationId xmlns:p14="http://schemas.microsoft.com/office/powerpoint/2010/main" val="570043704"/>
+      </p:ext>
+    </p:extLst>
+  </p:cSld>
+  <p:clrMapOvr>
+    <a:masterClrMapping/>
+  </p:clrMapOvr>
+</p:sld>
+</file>
+
+<file path=ppt/slides/slide29.xml><?xml version="1.0" encoding="utf-8"?>
+<p:sld xmlns:a="http://schemas.openxmlformats.org/drawingml/2006/main" xmlns:r="http://schemas.openxmlformats.org/officeDocument/2006/relationships" xmlns:p="http://schemas.openxmlformats.org/presentationml/2006/main">
+  <p:cSld>
+    <p:spTree>
+      <p:nvGrpSpPr>
+        <p:cNvPr id="1" name=""/>
+        <p:cNvGrpSpPr/>
+        <p:nvPr/>
+      </p:nvGrpSpPr>
+      <p:grpSpPr>
+        <a:xfrm>
+          <a:off x="0" y="0"/>
+          <a:ext cx="0" cy="0"/>
+          <a:chOff x="0" y="0"/>
+          <a:chExt cx="0" cy="0"/>
+        </a:xfrm>
+      </p:grpSpPr>
+      <p:sp>
+        <p:nvSpPr>
+          <p:cNvPr id="2" name="Title 1">
+            <a:extLst>
+              <a:ext uri="{FF2B5EF4-FFF2-40B4-BE49-F238E27FC236}">
+                <a16:creationId xmlns:a16="http://schemas.microsoft.com/office/drawing/2014/main" id="{C3901BDE-1EC8-9E2C-4B3E-2CFF8C265559}"/>
+              </a:ext>
+            </a:extLst>
+          </p:cNvPr>
+          <p:cNvSpPr>
+            <a:spLocks noGrp="1"/>
+          </p:cNvSpPr>
+          <p:nvPr>
+            <p:ph type="title"/>
+          </p:nvPr>
+        </p:nvSpPr>
+        <p:spPr/>
+        <p:txBody>
+          <a:bodyPr/>
+          <a:lstStyle/>
+          <a:p>
+            <a:r>
+              <a:rPr lang="en-US" dirty="0"/>
+              <a:t>HW Design Is Getting Easier</a:t>
+            </a:r>
+          </a:p>
+        </p:txBody>
+      </p:sp>
+      <p:sp>
+        <p:nvSpPr>
+          <p:cNvPr id="4" name="Slide Number Placeholder 3">
+            <a:extLst>
+              <a:ext uri="{FF2B5EF4-FFF2-40B4-BE49-F238E27FC236}">
+                <a16:creationId xmlns:a16="http://schemas.microsoft.com/office/drawing/2014/main" id="{1E5452C9-A8E5-0EBF-1169-0AA25817DB65}"/>
+              </a:ext>
+            </a:extLst>
+          </p:cNvPr>
+          <p:cNvSpPr>
+            <a:spLocks noGrp="1"/>
+          </p:cNvSpPr>
+          <p:nvPr>
+            <p:ph type="sldNum" sz="quarter" idx="12"/>
+          </p:nvPr>
+        </p:nvSpPr>
+        <p:spPr/>
+        <p:txBody>
+          <a:bodyPr/>
+          <a:lstStyle/>
+          <a:p>
+            <a:fld id="{629637A9-119A-49DA-BD12-AAC58B377D80}" type="slidenum">
+              <a:rPr lang="en-US" smtClean="0"/>
+              <a:t>29</a:t>
             </a:fld>
             <a:endParaRPr lang="en-US" dirty="0"/>
           </a:p>
@@ -15373,180 +15566,6 @@
 </p:sld>
 </file>
 
-<file path=ppt/slides/slide29.xml><?xml version="1.0" encoding="utf-8"?>
-<p:sld xmlns:a="http://schemas.openxmlformats.org/drawingml/2006/main" xmlns:r="http://schemas.openxmlformats.org/officeDocument/2006/relationships" xmlns:p="http://schemas.openxmlformats.org/presentationml/2006/main">
-  <p:cSld>
-    <p:spTree>
-      <p:nvGrpSpPr>
-        <p:cNvPr id="1" name=""/>
-        <p:cNvGrpSpPr/>
-        <p:nvPr/>
-      </p:nvGrpSpPr>
-      <p:grpSpPr>
-        <a:xfrm>
-          <a:off x="0" y="0"/>
-          <a:ext cx="0" cy="0"/>
-          <a:chOff x="0" y="0"/>
-          <a:chExt cx="0" cy="0"/>
-        </a:xfrm>
-      </p:grpSpPr>
-      <p:sp>
-        <p:nvSpPr>
-          <p:cNvPr id="2" name="Title 1">
-            <a:extLst>
-              <a:ext uri="{FF2B5EF4-FFF2-40B4-BE49-F238E27FC236}">
-                <a16:creationId xmlns:a16="http://schemas.microsoft.com/office/drawing/2014/main" id="{F1217F12-3085-C195-A4B9-C807CC6818A1}"/>
-              </a:ext>
-            </a:extLst>
-          </p:cNvPr>
-          <p:cNvSpPr>
-            <a:spLocks noGrp="1"/>
-          </p:cNvSpPr>
-          <p:nvPr>
-            <p:ph type="title"/>
-          </p:nvPr>
-        </p:nvSpPr>
-        <p:spPr/>
-        <p:txBody>
-          <a:bodyPr/>
-          <a:lstStyle/>
-          <a:p>
-            <a:r>
-              <a:rPr lang="en-US" dirty="0"/>
-              <a:t>In-Class Exercise</a:t>
-            </a:r>
-          </a:p>
-        </p:txBody>
-      </p:sp>
-      <p:sp>
-        <p:nvSpPr>
-          <p:cNvPr id="3" name="Content Placeholder 2">
-            <a:extLst>
-              <a:ext uri="{FF2B5EF4-FFF2-40B4-BE49-F238E27FC236}">
-                <a16:creationId xmlns:a16="http://schemas.microsoft.com/office/drawing/2014/main" id="{B41C901F-73A8-E31E-63F2-1A46724A257F}"/>
-              </a:ext>
-            </a:extLst>
-          </p:cNvPr>
-          <p:cNvSpPr>
-            <a:spLocks noGrp="1"/>
-          </p:cNvSpPr>
-          <p:nvPr>
-            <p:ph idx="1"/>
-          </p:nvPr>
-        </p:nvSpPr>
-        <p:spPr/>
-        <p:txBody>
-          <a:bodyPr/>
-          <a:lstStyle/>
-          <a:p>
-            <a:r>
-              <a:rPr lang="en-US" dirty="0"/>
-              <a:t>Break into small groups</a:t>
-            </a:r>
-          </a:p>
-          <a:p>
-            <a:r>
-              <a:rPr lang="en-US" dirty="0"/>
-              <a:t>Select any domain of interest to your group</a:t>
-            </a:r>
-          </a:p>
-          <a:p>
-            <a:pPr lvl="1"/>
-            <a:r>
-              <a:rPr lang="en-US" dirty="0"/>
-              <a:t>Robotics, scientific computing, finance, gaming, …</a:t>
-            </a:r>
-          </a:p>
-          <a:p>
-            <a:r>
-              <a:rPr lang="en-US" dirty="0"/>
-              <a:t>Propose a hardware accelerator for a specific task in that domain</a:t>
-            </a:r>
-          </a:p>
-          <a:p>
-            <a:pPr lvl="1"/>
-            <a:r>
-              <a:rPr lang="en-US" dirty="0"/>
-              <a:t>Be specific</a:t>
-            </a:r>
-          </a:p>
-          <a:p>
-            <a:pPr lvl="1"/>
-            <a:r>
-              <a:rPr lang="en-US" dirty="0"/>
-              <a:t>Ex., “Fast solver for molecular simulations”, “Real-time obstacle detection for drones”, …</a:t>
-            </a:r>
-          </a:p>
-          <a:p>
-            <a:r>
-              <a:rPr lang="en-US" dirty="0"/>
-              <a:t>What would it interface with?</a:t>
-            </a:r>
-          </a:p>
-          <a:p>
-            <a:pPr lvl="1"/>
-            <a:r>
-              <a:rPr lang="en-US" dirty="0"/>
-              <a:t>CPU, Any sensor data / peripherals?  How much data does it need?</a:t>
-            </a:r>
-          </a:p>
-          <a:p>
-            <a:r>
-              <a:rPr lang="en-US" dirty="0"/>
-              <a:t>Why would custom hardware help?</a:t>
-            </a:r>
-          </a:p>
-          <a:p>
-            <a:pPr lvl="1"/>
-            <a:r>
-              <a:rPr lang="en-US" dirty="0"/>
-              <a:t>What are the computations involved?  Is it structured, compute intensive?</a:t>
-            </a:r>
-          </a:p>
-        </p:txBody>
-      </p:sp>
-      <p:sp>
-        <p:nvSpPr>
-          <p:cNvPr id="4" name="Slide Number Placeholder 3">
-            <a:extLst>
-              <a:ext uri="{FF2B5EF4-FFF2-40B4-BE49-F238E27FC236}">
-                <a16:creationId xmlns:a16="http://schemas.microsoft.com/office/drawing/2014/main" id="{A8633FCA-BD58-D82D-2AAA-0F22542C23DA}"/>
-              </a:ext>
-            </a:extLst>
-          </p:cNvPr>
-          <p:cNvSpPr>
-            <a:spLocks noGrp="1"/>
-          </p:cNvSpPr>
-          <p:nvPr>
-            <p:ph type="sldNum" sz="quarter" idx="12"/>
-          </p:nvPr>
-        </p:nvSpPr>
-        <p:spPr/>
-        <p:txBody>
-          <a:bodyPr/>
-          <a:lstStyle/>
-          <a:p>
-            <a:fld id="{629637A9-119A-49DA-BD12-AAC58B377D80}" type="slidenum">
-              <a:rPr lang="en-US" smtClean="0"/>
-              <a:t>29</a:t>
-            </a:fld>
-            <a:endParaRPr lang="en-US" dirty="0"/>
-          </a:p>
-        </p:txBody>
-      </p:sp>
-    </p:spTree>
-    <p:extLst>
-      <p:ext uri="{BB962C8B-B14F-4D97-AF65-F5344CB8AC3E}">
-        <p14:creationId xmlns:p14="http://schemas.microsoft.com/office/powerpoint/2010/main" val="3995623354"/>
-      </p:ext>
-    </p:extLst>
-  </p:cSld>
-  <p:clrMapOvr>
-    <a:masterClrMapping/>
-  </p:clrMapOvr>
-</p:sld>
-</file>
-
 <file path=ppt/slides/slide3.xml><?xml version="1.0" encoding="utf-8"?>
 <p:sld xmlns:a="http://schemas.openxmlformats.org/drawingml/2006/main" xmlns:r="http://schemas.openxmlformats.org/officeDocument/2006/relationships" xmlns:p="http://schemas.openxmlformats.org/presentationml/2006/main">
   <p:cSld>
@@ -15615,7 +15634,7 @@
           <a:p>
             <a:r>
               <a:rPr lang="en-US" dirty="0"/>
-              <a:t>Instructors</a:t>
+              <a:t>Instructor</a:t>
             </a:r>
           </a:p>
           <a:p>
@@ -15626,16 +15645,20 @@
             </a:r>
           </a:p>
           <a:p>
+            <a:r>
+              <a:rPr lang="en-US" dirty="0"/>
+              <a:t>Course assistant:</a:t>
+            </a:r>
+          </a:p>
+          <a:p>
             <a:pPr lvl="1"/>
             <a:r>
-              <a:rPr lang="en-US" dirty="0"/>
-              <a:t>Siddharth Garg, 370 Jay St, 10-th floor</a:t>
-            </a:r>
-          </a:p>
-          <a:p>
-            <a:r>
-              <a:rPr lang="en-US" dirty="0"/>
-              <a:t>TA’s:  TBD</a:t>
+              <a:rPr lang="en-US" dirty="0" err="1"/>
+              <a:t>Ruibin</a:t>
+            </a:r>
+            <a:r>
+              <a:rPr lang="en-US" dirty="0"/>
+              <a:t> Chen, </a:t>
             </a:r>
           </a:p>
           <a:p>
@@ -15648,7 +15671,7 @@
             <a:pPr lvl="1"/>
             <a:r>
               <a:rPr lang="en-US" dirty="0"/>
-              <a:t>Instructor:  Either Siddharth or Sundeep.  Wednesdays, 3-4</a:t>
+              <a:t>Instructor:  Tuesday, 2-3</a:t>
             </a:r>
           </a:p>
           <a:p>
@@ -15661,14 +15684,14 @@
             <a:pPr lvl="1"/>
             <a:r>
               <a:rPr lang="en-US" dirty="0"/>
-              <a:t>Jacob’s Hall, 6 Metrotech Room 774</a:t>
+              <a:t>Jacob’s Hall, 6 Metrotech Room 201</a:t>
             </a:r>
           </a:p>
           <a:p>
             <a:pPr lvl="1"/>
             <a:r>
               <a:rPr lang="en-US" dirty="0"/>
-              <a:t>Tuesdays 2-4:30</a:t>
+              <a:t>Wednesdays 11-1:30</a:t>
             </a:r>
           </a:p>
           <a:p>
@@ -15709,6 +15732,180 @@
     <p:extLst>
       <p:ext uri="{BB962C8B-B14F-4D97-AF65-F5344CB8AC3E}">
         <p14:creationId xmlns:p14="http://schemas.microsoft.com/office/powerpoint/2010/main" val="2526264195"/>
+      </p:ext>
+    </p:extLst>
+  </p:cSld>
+  <p:clrMapOvr>
+    <a:masterClrMapping/>
+  </p:clrMapOvr>
+</p:sld>
+</file>
+
+<file path=ppt/slides/slide30.xml><?xml version="1.0" encoding="utf-8"?>
+<p:sld xmlns:a="http://schemas.openxmlformats.org/drawingml/2006/main" xmlns:r="http://schemas.openxmlformats.org/officeDocument/2006/relationships" xmlns:p="http://schemas.openxmlformats.org/presentationml/2006/main">
+  <p:cSld>
+    <p:spTree>
+      <p:nvGrpSpPr>
+        <p:cNvPr id="1" name=""/>
+        <p:cNvGrpSpPr/>
+        <p:nvPr/>
+      </p:nvGrpSpPr>
+      <p:grpSpPr>
+        <a:xfrm>
+          <a:off x="0" y="0"/>
+          <a:ext cx="0" cy="0"/>
+          <a:chOff x="0" y="0"/>
+          <a:chExt cx="0" cy="0"/>
+        </a:xfrm>
+      </p:grpSpPr>
+      <p:sp>
+        <p:nvSpPr>
+          <p:cNvPr id="2" name="Title 1">
+            <a:extLst>
+              <a:ext uri="{FF2B5EF4-FFF2-40B4-BE49-F238E27FC236}">
+                <a16:creationId xmlns:a16="http://schemas.microsoft.com/office/drawing/2014/main" id="{F1217F12-3085-C195-A4B9-C807CC6818A1}"/>
+              </a:ext>
+            </a:extLst>
+          </p:cNvPr>
+          <p:cNvSpPr>
+            <a:spLocks noGrp="1"/>
+          </p:cNvSpPr>
+          <p:nvPr>
+            <p:ph type="title"/>
+          </p:nvPr>
+        </p:nvSpPr>
+        <p:spPr/>
+        <p:txBody>
+          <a:bodyPr/>
+          <a:lstStyle/>
+          <a:p>
+            <a:r>
+              <a:rPr lang="en-US" dirty="0"/>
+              <a:t>In-Class Exercise</a:t>
+            </a:r>
+          </a:p>
+        </p:txBody>
+      </p:sp>
+      <p:sp>
+        <p:nvSpPr>
+          <p:cNvPr id="3" name="Content Placeholder 2">
+            <a:extLst>
+              <a:ext uri="{FF2B5EF4-FFF2-40B4-BE49-F238E27FC236}">
+                <a16:creationId xmlns:a16="http://schemas.microsoft.com/office/drawing/2014/main" id="{B41C901F-73A8-E31E-63F2-1A46724A257F}"/>
+              </a:ext>
+            </a:extLst>
+          </p:cNvPr>
+          <p:cNvSpPr>
+            <a:spLocks noGrp="1"/>
+          </p:cNvSpPr>
+          <p:nvPr>
+            <p:ph idx="1"/>
+          </p:nvPr>
+        </p:nvSpPr>
+        <p:spPr/>
+        <p:txBody>
+          <a:bodyPr/>
+          <a:lstStyle/>
+          <a:p>
+            <a:r>
+              <a:rPr lang="en-US" dirty="0"/>
+              <a:t>Break into small groups</a:t>
+            </a:r>
+          </a:p>
+          <a:p>
+            <a:r>
+              <a:rPr lang="en-US" dirty="0"/>
+              <a:t>Select any domain of interest to your group</a:t>
+            </a:r>
+          </a:p>
+          <a:p>
+            <a:pPr lvl="1"/>
+            <a:r>
+              <a:rPr lang="en-US" dirty="0"/>
+              <a:t>Robotics, scientific computing, finance, gaming, …</a:t>
+            </a:r>
+          </a:p>
+          <a:p>
+            <a:r>
+              <a:rPr lang="en-US" dirty="0"/>
+              <a:t>Propose a hardware accelerator for a specific task in that domain</a:t>
+            </a:r>
+          </a:p>
+          <a:p>
+            <a:pPr lvl="1"/>
+            <a:r>
+              <a:rPr lang="en-US" dirty="0"/>
+              <a:t>Be specific</a:t>
+            </a:r>
+          </a:p>
+          <a:p>
+            <a:pPr lvl="1"/>
+            <a:r>
+              <a:rPr lang="en-US" dirty="0"/>
+              <a:t>Ex., “Fast solver for molecular simulations”, “Real-time obstacle detection for drones”, …</a:t>
+            </a:r>
+          </a:p>
+          <a:p>
+            <a:r>
+              <a:rPr lang="en-US" dirty="0"/>
+              <a:t>What would it interface with?</a:t>
+            </a:r>
+          </a:p>
+          <a:p>
+            <a:pPr lvl="1"/>
+            <a:r>
+              <a:rPr lang="en-US" dirty="0"/>
+              <a:t>CPU, Any sensor data / peripherals?  How much data does it need?</a:t>
+            </a:r>
+          </a:p>
+          <a:p>
+            <a:r>
+              <a:rPr lang="en-US" dirty="0"/>
+              <a:t>Why would custom hardware help?</a:t>
+            </a:r>
+          </a:p>
+          <a:p>
+            <a:pPr lvl="1"/>
+            <a:r>
+              <a:rPr lang="en-US" dirty="0"/>
+              <a:t>What are the computations involved?  Is it structured, compute intensive?</a:t>
+            </a:r>
+          </a:p>
+        </p:txBody>
+      </p:sp>
+      <p:sp>
+        <p:nvSpPr>
+          <p:cNvPr id="4" name="Slide Number Placeholder 3">
+            <a:extLst>
+              <a:ext uri="{FF2B5EF4-FFF2-40B4-BE49-F238E27FC236}">
+                <a16:creationId xmlns:a16="http://schemas.microsoft.com/office/drawing/2014/main" id="{A8633FCA-BD58-D82D-2AAA-0F22542C23DA}"/>
+              </a:ext>
+            </a:extLst>
+          </p:cNvPr>
+          <p:cNvSpPr>
+            <a:spLocks noGrp="1"/>
+          </p:cNvSpPr>
+          <p:nvPr>
+            <p:ph type="sldNum" sz="quarter" idx="12"/>
+          </p:nvPr>
+        </p:nvSpPr>
+        <p:spPr/>
+        <p:txBody>
+          <a:bodyPr/>
+          <a:lstStyle/>
+          <a:p>
+            <a:fld id="{629637A9-119A-49DA-BD12-AAC58B377D80}" type="slidenum">
+              <a:rPr lang="en-US" smtClean="0"/>
+              <a:t>30</a:t>
+            </a:fld>
+            <a:endParaRPr lang="en-US" dirty="0"/>
+          </a:p>
+        </p:txBody>
+      </p:sp>
+    </p:spTree>
+    <p:extLst>
+      <p:ext uri="{BB962C8B-B14F-4D97-AF65-F5344CB8AC3E}">
+        <p14:creationId xmlns:p14="http://schemas.microsoft.com/office/powerpoint/2010/main" val="3995623354"/>
       </p:ext>
     </p:extLst>
   </p:cSld>
@@ -16348,8 +16545,8 @@
         </p:nvSpPr>
         <p:spPr>
           <a:xfrm>
-            <a:off x="5797286" y="5420083"/>
-            <a:ext cx="5358394" cy="576596"/>
+            <a:off x="4436533" y="5420083"/>
+            <a:ext cx="6719147" cy="576596"/>
           </a:xfrm>
           <a:prstGeom prst="roundRect">
             <a:avLst/>
@@ -16389,7 +16586,7 @@
                 </a:solidFill>
                 <a:hlinkClick r:id="rId3"/>
               </a:rPr>
-              <a:t>https://sdrangan.github.io/hwdesign</a:t>
+              <a:t>https://sdrangan.github.io/hwdesign/docs</a:t>
             </a:r>
             <a:endParaRPr lang="en-US" sz="2400" dirty="0">
               <a:solidFill>
@@ -16434,7 +16631,7 @@
           <p:cNvPr id="2" name="Title 1">
             <a:extLst>
               <a:ext uri="{FF2B5EF4-FFF2-40B4-BE49-F238E27FC236}">
-                <a16:creationId xmlns:a16="http://schemas.microsoft.com/office/drawing/2014/main" id="{88CA5653-2626-C12B-D4B5-3E3E7463A457}"/>
+                <a16:creationId xmlns:a16="http://schemas.microsoft.com/office/drawing/2014/main" id="{4313C9C2-F070-02D6-1966-AC09B6174048}"/>
               </a:ext>
             </a:extLst>
           </p:cNvPr>
@@ -16452,7 +16649,7 @@
           <a:p>
             <a:r>
               <a:rPr lang="en-US" dirty="0"/>
-              <a:t>Software Set-Up</a:t>
+              <a:t>Software Set-Up:  ECS Server</a:t>
             </a:r>
           </a:p>
         </p:txBody>
@@ -16462,7 +16659,7 @@
           <p:cNvPr id="3" name="Content Placeholder 2">
             <a:extLst>
               <a:ext uri="{FF2B5EF4-FFF2-40B4-BE49-F238E27FC236}">
-                <a16:creationId xmlns:a16="http://schemas.microsoft.com/office/drawing/2014/main" id="{A9754360-EB05-5ECD-4C10-6269DCB7E199}"/>
+                <a16:creationId xmlns:a16="http://schemas.microsoft.com/office/drawing/2014/main" id="{E0E209A2-7DC0-B5BF-8E52-5248F53E40FF}"/>
               </a:ext>
             </a:extLst>
           </p:cNvPr>
@@ -16475,23 +16672,15 @@
         </p:nvSpPr>
         <p:spPr/>
         <p:txBody>
-          <a:bodyPr>
-            <a:normAutofit/>
-          </a:bodyPr>
-          <a:lstStyle/>
-          <a:p>
-            <a:r>
-              <a:rPr lang="en-US" sz="2400" dirty="0"/>
-              <a:t>To perform this course, you will need to:</a:t>
-            </a:r>
-          </a:p>
-          <a:p>
-            <a:r>
-              <a:rPr lang="en-US" sz="2400" dirty="0"/>
-              <a:t>Install </a:t>
-            </a:r>
-            <a:r>
-              <a:rPr lang="en-US" sz="2400" dirty="0">
+          <a:bodyPr/>
+          <a:lstStyle/>
+          <a:p>
+            <a:r>
+              <a:rPr lang="en-US" dirty="0"/>
+              <a:t>Main tools are </a:t>
+            </a:r>
+            <a:r>
+              <a:rPr lang="en-US" dirty="0">
                 <a:solidFill>
                   <a:schemeClr val="accent1">
                     <a:lumMod val="60000"/>
@@ -16502,11 +16691,11 @@
               <a:t>Vitis</a:t>
             </a:r>
             <a:r>
-              <a:rPr lang="en-US" sz="2400" dirty="0"/>
+              <a:rPr lang="en-US" dirty="0"/>
               <a:t> and </a:t>
             </a:r>
             <a:r>
-              <a:rPr lang="en-US" sz="2400" dirty="0" err="1">
+              <a:rPr lang="en-US" dirty="0" err="1">
                 <a:solidFill>
                   <a:schemeClr val="accent1">
                     <a:lumMod val="60000"/>
@@ -16516,7 +16705,7 @@
               </a:rPr>
               <a:t>Vivado</a:t>
             </a:r>
-            <a:endParaRPr lang="en-US" sz="2400" dirty="0">
+            <a:endParaRPr lang="en-US" dirty="0">
               <a:solidFill>
                 <a:schemeClr val="accent1">
                   <a:lumMod val="60000"/>
@@ -16528,62 +16717,72 @@
           <a:p>
             <a:pPr lvl="1"/>
             <a:r>
-              <a:rPr lang="en-US" sz="2200" dirty="0"/>
-              <a:t>Software tools for designing hardware</a:t>
-            </a:r>
-          </a:p>
-          <a:p>
-            <a:r>
-              <a:rPr lang="en-US" sz="2400" dirty="0"/>
-              <a:t>Clone the class repository</a:t>
-            </a:r>
-          </a:p>
-          <a:p>
-            <a:r>
-              <a:rPr lang="en-US" sz="2400" dirty="0"/>
-              <a:t>Optional:  Purchase an actual FPGA board</a:t>
+              <a:rPr lang="en-US" dirty="0">
+                <a:solidFill>
+                  <a:schemeClr val="tx1"/>
+                </a:solidFill>
+              </a:rPr>
+              <a:t>Basic software for digital design</a:t>
+            </a:r>
+          </a:p>
+          <a:p>
+            <a:r>
+              <a:rPr lang="en-US" dirty="0"/>
+              <a:t>You can run all demos and labs on NYU ECS servers</a:t>
             </a:r>
           </a:p>
           <a:p>
             <a:pPr lvl="1"/>
             <a:r>
-              <a:rPr lang="en-US" sz="2200" dirty="0"/>
-              <a:t>See next slide</a:t>
-            </a:r>
-          </a:p>
-          <a:p>
-            <a:r>
-              <a:rPr lang="en-US" sz="2400" dirty="0"/>
-              <a:t>Vitis and </a:t>
-            </a:r>
-            <a:r>
-              <a:rPr lang="en-US" sz="2400" dirty="0" err="1"/>
-              <a:t>Vivado</a:t>
-            </a:r>
-            <a:r>
-              <a:rPr lang="en-US" sz="2400" dirty="0"/>
-              <a:t> options:</a:t>
+              <a:rPr lang="en-US" dirty="0"/>
+              <a:t>No need for set-up on your local machine</a:t>
+            </a:r>
+          </a:p>
+          <a:p>
+            <a:r>
+              <a:rPr lang="en-US" dirty="0"/>
+              <a:t>Ideal for MacOS users</a:t>
             </a:r>
           </a:p>
           <a:p>
             <a:pPr lvl="1"/>
             <a:r>
-              <a:rPr lang="en-US" sz="2200" dirty="0"/>
-              <a:t>Run locally on a Windows machine</a:t>
+              <a:rPr lang="en-US" dirty="0"/>
+              <a:t>Local set-up only supported on Windows and Linux</a:t>
+            </a:r>
+          </a:p>
+          <a:p>
+            <a:r>
+              <a:rPr lang="en-US" dirty="0"/>
+              <a:t>Instructor will provide your email to NYU IT</a:t>
+            </a:r>
+          </a:p>
+          <a:p>
+            <a:r>
+              <a:rPr lang="en-US" dirty="0"/>
+              <a:t>You will then be able to log into ecs03.poly.edu to ecs06.poly.edu</a:t>
             </a:r>
           </a:p>
           <a:p>
             <a:pPr lvl="1"/>
             <a:r>
-              <a:rPr lang="en-US" sz="2200" dirty="0"/>
-              <a:t>MacOS:  You must run it in Linux virtual machine</a:t>
+              <a:rPr lang="en-US" dirty="0"/>
+              <a:t>SSH for command line</a:t>
             </a:r>
           </a:p>
           <a:p>
             <a:pPr lvl="1"/>
             <a:r>
-              <a:rPr lang="en-US" sz="2200" dirty="0"/>
-              <a:t>Use NYU server.  Details to be provided shortly</a:t>
+              <a:rPr lang="en-US" dirty="0"/>
+              <a:t>Or </a:t>
+            </a:r>
+            <a:r>
+              <a:rPr lang="en-US" dirty="0" err="1"/>
+              <a:t>FastX</a:t>
+            </a:r>
+            <a:r>
+              <a:rPr lang="en-US" dirty="0"/>
+              <a:t> for a GUI-based system</a:t>
             </a:r>
           </a:p>
         </p:txBody>
@@ -16593,7 +16792,7 @@
           <p:cNvPr id="4" name="Slide Number Placeholder 3">
             <a:extLst>
               <a:ext uri="{FF2B5EF4-FFF2-40B4-BE49-F238E27FC236}">
-                <a16:creationId xmlns:a16="http://schemas.microsoft.com/office/drawing/2014/main" id="{37258FC5-F591-A75E-94DC-945852BFC16B}"/>
+                <a16:creationId xmlns:a16="http://schemas.microsoft.com/office/drawing/2014/main" id="{7156C8F7-FCC3-6BD5-9ABF-22216B1F1342}"/>
               </a:ext>
             </a:extLst>
           </p:cNvPr>
@@ -16622,7 +16821,7 @@
           <p:cNvPr id="6" name="Picture 5">
             <a:extLst>
               <a:ext uri="{FF2B5EF4-FFF2-40B4-BE49-F238E27FC236}">
-                <a16:creationId xmlns:a16="http://schemas.microsoft.com/office/drawing/2014/main" id="{7844BB8C-D309-9C27-A6DE-4182F725B0CA}"/>
+                <a16:creationId xmlns:a16="http://schemas.microsoft.com/office/drawing/2014/main" id="{B6BD93D7-7B17-E837-F6DB-C2FFAB4121C4}"/>
               </a:ext>
             </a:extLst>
           </p:cNvPr>
@@ -16639,8 +16838,8 @@
         </p:blipFill>
         <p:spPr>
           <a:xfrm>
-            <a:off x="7953763" y="628506"/>
-            <a:ext cx="2952902" cy="2800494"/>
+            <a:off x="5316555" y="4821737"/>
+            <a:ext cx="5839125" cy="1143059"/>
           </a:xfrm>
           <a:prstGeom prst="rect">
             <a:avLst/>
@@ -16650,7 +16849,7 @@
     </p:spTree>
     <p:extLst>
       <p:ext uri="{BB962C8B-B14F-4D97-AF65-F5344CB8AC3E}">
-        <p14:creationId xmlns:p14="http://schemas.microsoft.com/office/powerpoint/2010/main" val="1278048579"/>
+        <p14:creationId xmlns:p14="http://schemas.microsoft.com/office/powerpoint/2010/main" val="543676860"/>
       </p:ext>
     </p:extLst>
   </p:cSld>
@@ -16682,7 +16881,7 @@
           <p:cNvPr id="2" name="Title 1">
             <a:extLst>
               <a:ext uri="{FF2B5EF4-FFF2-40B4-BE49-F238E27FC236}">
-                <a16:creationId xmlns:a16="http://schemas.microsoft.com/office/drawing/2014/main" id="{B4111039-AB79-5C2B-A2DD-99BCE50D8482}"/>
+                <a16:creationId xmlns:a16="http://schemas.microsoft.com/office/drawing/2014/main" id="{88CA5653-2626-C12B-D4B5-3E3E7463A457}"/>
               </a:ext>
             </a:extLst>
           </p:cNvPr>
@@ -16700,7 +16899,7 @@
           <a:p>
             <a:r>
               <a:rPr lang="en-US" dirty="0"/>
-              <a:t>FPGA Boards</a:t>
+              <a:t>Software Set-Up: Local Machine</a:t>
             </a:r>
           </a:p>
         </p:txBody>
@@ -16710,7 +16909,7 @@
           <p:cNvPr id="3" name="Content Placeholder 2">
             <a:extLst>
               <a:ext uri="{FF2B5EF4-FFF2-40B4-BE49-F238E27FC236}">
-                <a16:creationId xmlns:a16="http://schemas.microsoft.com/office/drawing/2014/main" id="{8C9CD018-8CEC-5AF3-F372-0EA172C54BE9}"/>
+                <a16:creationId xmlns:a16="http://schemas.microsoft.com/office/drawing/2014/main" id="{A9754360-EB05-5ECD-4C10-6269DCB7E199}"/>
               </a:ext>
             </a:extLst>
           </p:cNvPr>
@@ -16730,73 +16929,47 @@
           <a:p>
             <a:r>
               <a:rPr lang="en-US" sz="2400" dirty="0"/>
-              <a:t>Projects and labs can be deployed on actual hardware</a:t>
+              <a:t>You can also install Vitis and </a:t>
+            </a:r>
+            <a:r>
+              <a:rPr lang="en-US" sz="2400" dirty="0" err="1"/>
+              <a:t>Vivado</a:t>
+            </a:r>
+            <a:r>
+              <a:rPr lang="en-US" sz="2400" dirty="0"/>
+              <a:t> on local machine</a:t>
+            </a:r>
+          </a:p>
+          <a:p>
+            <a:r>
+              <a:rPr lang="en-US" sz="2400" dirty="0"/>
+              <a:t>But only works for Windows and Linux</a:t>
             </a:r>
           </a:p>
           <a:p>
             <a:pPr lvl="1"/>
             <a:r>
+              <a:rPr lang="en-US" sz="2000" dirty="0"/>
+              <a:t>Does not work for MacOS</a:t>
+            </a:r>
+          </a:p>
+          <a:p>
+            <a:r>
+              <a:rPr lang="en-US" sz="2400" dirty="0"/>
+              <a:t>Optional:  Purchase an actual FPGA board</a:t>
+            </a:r>
+          </a:p>
+          <a:p>
+            <a:pPr lvl="1"/>
+            <a:r>
               <a:rPr lang="en-US" sz="2200" dirty="0"/>
-              <a:t>Currently optional due to price</a:t>
+              <a:t>See next slide</a:t>
             </a:r>
           </a:p>
           <a:p>
             <a:r>
               <a:rPr lang="en-US" sz="2400" dirty="0"/>
-              <a:t>We suggest:  Pynq-Z2 board</a:t>
-            </a:r>
-          </a:p>
-          <a:p>
-            <a:pPr lvl="1"/>
-            <a:r>
-              <a:rPr lang="en-US" sz="2200" dirty="0"/>
-              <a:t>$300 </a:t>
-            </a:r>
-          </a:p>
-          <a:p>
-            <a:pPr lvl="1"/>
-            <a:r>
-              <a:rPr lang="en-US" sz="2200" dirty="0"/>
-              <a:t>USB connection to your laptop</a:t>
-            </a:r>
-          </a:p>
-          <a:p>
-            <a:pPr lvl="1"/>
-            <a:r>
-              <a:rPr lang="en-US" sz="2200" dirty="0" err="1"/>
-              <a:t>Pynq</a:t>
-            </a:r>
-            <a:r>
-              <a:rPr lang="en-US" sz="2200" dirty="0"/>
-              <a:t>:  Simple python interface</a:t>
-            </a:r>
-          </a:p>
-          <a:p>
-            <a:pPr lvl="1"/>
-            <a:r>
-              <a:rPr lang="en-US" sz="2200" dirty="0"/>
-              <a:t>Low-end, but ideal for teaching</a:t>
-            </a:r>
-          </a:p>
-          <a:p>
-            <a:r>
-              <a:rPr lang="en-US" sz="2400" dirty="0"/>
-              <a:t>Other boards may be available in lab</a:t>
-            </a:r>
-          </a:p>
-          <a:p>
-            <a:pPr lvl="1"/>
-            <a:r>
-              <a:rPr lang="en-US" sz="2200" dirty="0"/>
-              <a:t>Ex: </a:t>
-            </a:r>
-            <a:r>
-              <a:rPr lang="en-US" sz="2200" dirty="0" err="1"/>
-              <a:t>RFSoC</a:t>
-            </a:r>
-            <a:r>
-              <a:rPr lang="en-US" sz="2200" dirty="0"/>
-              <a:t> 4x2 for wireless communications</a:t>
+              <a:t>See installation instructions in class</a:t>
             </a:r>
           </a:p>
         </p:txBody>
@@ -16806,7 +16979,7 @@
           <p:cNvPr id="4" name="Slide Number Placeholder 3">
             <a:extLst>
               <a:ext uri="{FF2B5EF4-FFF2-40B4-BE49-F238E27FC236}">
-                <a16:creationId xmlns:a16="http://schemas.microsoft.com/office/drawing/2014/main" id="{6957729F-F5BF-5631-CE34-678FB092DF53}"/>
+                <a16:creationId xmlns:a16="http://schemas.microsoft.com/office/drawing/2014/main" id="{37258FC5-F591-A75E-94DC-945852BFC16B}"/>
               </a:ext>
             </a:extLst>
           </p:cNvPr>
@@ -16835,7 +17008,7 @@
           <p:cNvPr id="6" name="Picture 5">
             <a:extLst>
               <a:ext uri="{FF2B5EF4-FFF2-40B4-BE49-F238E27FC236}">
-                <a16:creationId xmlns:a16="http://schemas.microsoft.com/office/drawing/2014/main" id="{448A23A0-0F27-10E7-3351-DB9D10428201}"/>
+                <a16:creationId xmlns:a16="http://schemas.microsoft.com/office/drawing/2014/main" id="{7844BB8C-D309-9C27-A6DE-4182F725B0CA}"/>
               </a:ext>
             </a:extLst>
           </p:cNvPr>
@@ -16852,68 +17025,8 @@
         </p:blipFill>
         <p:spPr>
           <a:xfrm>
-            <a:off x="8660083" y="382694"/>
-            <a:ext cx="3132331" cy="2518782"/>
-          </a:xfrm>
-          <a:prstGeom prst="rect">
-            <a:avLst/>
-          </a:prstGeom>
-        </p:spPr>
-      </p:pic>
-      <p:pic>
-        <p:nvPicPr>
-          <p:cNvPr id="8" name="Picture 7">
-            <a:extLst>
-              <a:ext uri="{FF2B5EF4-FFF2-40B4-BE49-F238E27FC236}">
-                <a16:creationId xmlns:a16="http://schemas.microsoft.com/office/drawing/2014/main" id="{0011EA30-7607-2636-0AE5-CEE8CABF6B08}"/>
-              </a:ext>
-            </a:extLst>
-          </p:cNvPr>
-          <p:cNvPicPr>
-            <a:picLocks noChangeAspect="1"/>
-          </p:cNvPicPr>
-          <p:nvPr/>
-        </p:nvPicPr>
-        <p:blipFill>
-          <a:blip r:embed="rId3"/>
-          <a:stretch>
-            <a:fillRect/>
-          </a:stretch>
-        </p:blipFill>
-        <p:spPr>
-          <a:xfrm>
-            <a:off x="6644338" y="3080485"/>
-            <a:ext cx="5242862" cy="962173"/>
-          </a:xfrm>
-          <a:prstGeom prst="rect">
-            <a:avLst/>
-          </a:prstGeom>
-        </p:spPr>
-      </p:pic>
-      <p:pic>
-        <p:nvPicPr>
-          <p:cNvPr id="10" name="Picture 9">
-            <a:extLst>
-              <a:ext uri="{FF2B5EF4-FFF2-40B4-BE49-F238E27FC236}">
-                <a16:creationId xmlns:a16="http://schemas.microsoft.com/office/drawing/2014/main" id="{DB990E59-4093-DAA4-FDC4-99F75672D733}"/>
-              </a:ext>
-            </a:extLst>
-          </p:cNvPr>
-          <p:cNvPicPr>
-            <a:picLocks noChangeAspect="1"/>
-          </p:cNvPicPr>
-          <p:nvPr/>
-        </p:nvPicPr>
-        <p:blipFill>
-          <a:blip r:embed="rId4"/>
-          <a:stretch>
-            <a:fillRect/>
-          </a:stretch>
-        </p:blipFill>
-        <p:spPr>
-          <a:xfrm>
-            <a:off x="6695811" y="4211635"/>
-            <a:ext cx="4304867" cy="2467758"/>
+            <a:off x="8141818" y="1957773"/>
+            <a:ext cx="2952902" cy="2800494"/>
           </a:xfrm>
           <a:prstGeom prst="rect">
             <a:avLst/>
@@ -16923,7 +17036,7 @@
     </p:spTree>
     <p:extLst>
       <p:ext uri="{BB962C8B-B14F-4D97-AF65-F5344CB8AC3E}">
-        <p14:creationId xmlns:p14="http://schemas.microsoft.com/office/powerpoint/2010/main" val="590149844"/>
+        <p14:creationId xmlns:p14="http://schemas.microsoft.com/office/powerpoint/2010/main" val="1278048579"/>
       </p:ext>
     </p:extLst>
   </p:cSld>
@@ -16955,7 +17068,7 @@
           <p:cNvPr id="2" name="Title 1">
             <a:extLst>
               <a:ext uri="{FF2B5EF4-FFF2-40B4-BE49-F238E27FC236}">
-                <a16:creationId xmlns:a16="http://schemas.microsoft.com/office/drawing/2014/main" id="{87763C20-3B82-441C-12B0-76CFECCBD52B}"/>
+                <a16:creationId xmlns:a16="http://schemas.microsoft.com/office/drawing/2014/main" id="{B4111039-AB79-5C2B-A2DD-99BCE50D8482}"/>
               </a:ext>
             </a:extLst>
           </p:cNvPr>
@@ -16973,7 +17086,7 @@
           <a:p>
             <a:r>
               <a:rPr lang="en-US" dirty="0"/>
-              <a:t>Tentative Grading</a:t>
+              <a:t>FPGA Boards</a:t>
             </a:r>
           </a:p>
         </p:txBody>
@@ -16983,7 +17096,7 @@
           <p:cNvPr id="3" name="Content Placeholder 2">
             <a:extLst>
               <a:ext uri="{FF2B5EF4-FFF2-40B4-BE49-F238E27FC236}">
-                <a16:creationId xmlns:a16="http://schemas.microsoft.com/office/drawing/2014/main" id="{569F4927-B5C7-8DB2-27BA-85662F410D9D}"/>
+                <a16:creationId xmlns:a16="http://schemas.microsoft.com/office/drawing/2014/main" id="{8C9CD018-8CEC-5AF3-F372-0EA172C54BE9}"/>
               </a:ext>
             </a:extLst>
           </p:cNvPr>
@@ -16996,96 +17109,81 @@
         </p:nvSpPr>
         <p:spPr/>
         <p:txBody>
-          <a:bodyPr/>
-          <a:lstStyle/>
-          <a:p>
-            <a:r>
-              <a:rPr lang="en-US" dirty="0"/>
-              <a:t>Points</a:t>
+          <a:bodyPr>
+            <a:normAutofit/>
+          </a:bodyPr>
+          <a:lstStyle/>
+          <a:p>
+            <a:r>
+              <a:rPr lang="en-US" sz="2400" dirty="0"/>
+              <a:t>Projects and labs can be deployed on actual hardware</a:t>
             </a:r>
           </a:p>
           <a:p>
             <a:pPr lvl="1"/>
             <a:r>
-              <a:rPr lang="en-US" dirty="0"/>
-              <a:t>Homework + Labs: 25%</a:t>
+              <a:rPr lang="en-US" sz="2200" dirty="0"/>
+              <a:t>Currently optional due to price</a:t>
+            </a:r>
+          </a:p>
+          <a:p>
+            <a:r>
+              <a:rPr lang="en-US" sz="2400" dirty="0"/>
+              <a:t>We suggest:  Pynq-Z2 board</a:t>
             </a:r>
           </a:p>
           <a:p>
             <a:pPr lvl="1"/>
             <a:r>
-              <a:rPr lang="en-US" dirty="0"/>
-              <a:t>Midterm:  25%</a:t>
+              <a:rPr lang="en-US" sz="2200" dirty="0"/>
+              <a:t>$300 </a:t>
             </a:r>
           </a:p>
           <a:p>
             <a:pPr lvl="1"/>
             <a:r>
-              <a:rPr lang="en-US" dirty="0"/>
-              <a:t>Final:  25%</a:t>
+              <a:rPr lang="en-US" sz="2200" dirty="0"/>
+              <a:t>USB connection to your laptop</a:t>
             </a:r>
           </a:p>
           <a:p>
             <a:pPr lvl="1"/>
             <a:r>
-              <a:rPr lang="en-US" dirty="0"/>
-              <a:t>Project:  25% </a:t>
-            </a:r>
-          </a:p>
-          <a:p>
-            <a:r>
-              <a:rPr lang="en-US" dirty="0"/>
-              <a:t>Homework will be mostly written problems</a:t>
-            </a:r>
-          </a:p>
-          <a:p>
-            <a:r>
-              <a:rPr lang="en-US" dirty="0"/>
-              <a:t>Labs will be mostly </a:t>
-            </a:r>
-            <a:r>
-              <a:rPr lang="en-US" dirty="0" err="1"/>
-              <a:t>SystemVerilog</a:t>
-            </a:r>
-            <a:r>
-              <a:rPr lang="en-US" dirty="0"/>
-              <a:t> </a:t>
-            </a:r>
-            <a:r>
-              <a:rPr lang="en-US" dirty="0" err="1"/>
-              <a:t>VitisHLS</a:t>
-            </a:r>
-            <a:endParaRPr lang="en-US" dirty="0"/>
+              <a:rPr lang="en-US" sz="2200" dirty="0" err="1"/>
+              <a:t>Pynq</a:t>
+            </a:r>
+            <a:r>
+              <a:rPr lang="en-US" sz="2200" dirty="0"/>
+              <a:t>:  Simple python interface</a:t>
+            </a:r>
           </a:p>
           <a:p>
             <a:pPr lvl="1"/>
             <a:r>
-              <a:rPr lang="en-US" dirty="0"/>
-              <a:t>Approximately 5 Vitis HLS assignments</a:t>
+              <a:rPr lang="en-US" sz="2200" dirty="0"/>
+              <a:t>Low-end, but ideal for teaching</a:t>
+            </a:r>
+          </a:p>
+          <a:p>
+            <a:r>
+              <a:rPr lang="en-US" sz="2400" dirty="0"/>
+              <a:t>Other boards may be available in lab</a:t>
             </a:r>
           </a:p>
           <a:p>
             <a:pPr lvl="1"/>
             <a:r>
-              <a:rPr lang="en-US" dirty="0"/>
-              <a:t>Approximately 5 written assignments</a:t>
-            </a:r>
-          </a:p>
-          <a:p>
-            <a:r>
-              <a:rPr lang="en-US" dirty="0"/>
-              <a:t>Midterm and Final are in class</a:t>
-            </a:r>
-          </a:p>
-          <a:p>
-            <a:pPr lvl="1"/>
-            <a:r>
-              <a:rPr lang="en-US" dirty="0"/>
-              <a:t>Closed book, no electronic aids</a:t>
-            </a:r>
-          </a:p>
-          <a:p>
-            <a:endParaRPr lang="en-US" dirty="0"/>
+              <a:rPr lang="en-US" sz="2200" dirty="0"/>
+              <a:t>Ex: </a:t>
+            </a:r>
+            <a:r>
+              <a:rPr lang="en-US" sz="2200" dirty="0" err="1"/>
+              <a:t>RFSoC</a:t>
+            </a:r>
+            <a:r>
+              <a:rPr lang="en-US" sz="2200" dirty="0"/>
+              <a:t> 4x2 for wireless communications</a:t>
+            </a:r>
           </a:p>
         </p:txBody>
       </p:sp>
@@ -17094,7 +17192,7 @@
           <p:cNvPr id="4" name="Slide Number Placeholder 3">
             <a:extLst>
               <a:ext uri="{FF2B5EF4-FFF2-40B4-BE49-F238E27FC236}">
-                <a16:creationId xmlns:a16="http://schemas.microsoft.com/office/drawing/2014/main" id="{D22CD1AC-1CF5-DED5-ADE8-F1E655F73621}"/>
+                <a16:creationId xmlns:a16="http://schemas.microsoft.com/office/drawing/2014/main" id="{6957729F-F5BF-5631-CE34-678FB092DF53}"/>
               </a:ext>
             </a:extLst>
           </p:cNvPr>
@@ -17118,10 +17216,100 @@
           </a:p>
         </p:txBody>
       </p:sp>
+      <p:pic>
+        <p:nvPicPr>
+          <p:cNvPr id="6" name="Picture 5">
+            <a:extLst>
+              <a:ext uri="{FF2B5EF4-FFF2-40B4-BE49-F238E27FC236}">
+                <a16:creationId xmlns:a16="http://schemas.microsoft.com/office/drawing/2014/main" id="{448A23A0-0F27-10E7-3351-DB9D10428201}"/>
+              </a:ext>
+            </a:extLst>
+          </p:cNvPr>
+          <p:cNvPicPr>
+            <a:picLocks noChangeAspect="1"/>
+          </p:cNvPicPr>
+          <p:nvPr/>
+        </p:nvPicPr>
+        <p:blipFill>
+          <a:blip r:embed="rId2"/>
+          <a:stretch>
+            <a:fillRect/>
+          </a:stretch>
+        </p:blipFill>
+        <p:spPr>
+          <a:xfrm>
+            <a:off x="8660083" y="382694"/>
+            <a:ext cx="3132331" cy="2518782"/>
+          </a:xfrm>
+          <a:prstGeom prst="rect">
+            <a:avLst/>
+          </a:prstGeom>
+        </p:spPr>
+      </p:pic>
+      <p:pic>
+        <p:nvPicPr>
+          <p:cNvPr id="8" name="Picture 7">
+            <a:extLst>
+              <a:ext uri="{FF2B5EF4-FFF2-40B4-BE49-F238E27FC236}">
+                <a16:creationId xmlns:a16="http://schemas.microsoft.com/office/drawing/2014/main" id="{0011EA30-7607-2636-0AE5-CEE8CABF6B08}"/>
+              </a:ext>
+            </a:extLst>
+          </p:cNvPr>
+          <p:cNvPicPr>
+            <a:picLocks noChangeAspect="1"/>
+          </p:cNvPicPr>
+          <p:nvPr/>
+        </p:nvPicPr>
+        <p:blipFill>
+          <a:blip r:embed="rId3"/>
+          <a:stretch>
+            <a:fillRect/>
+          </a:stretch>
+        </p:blipFill>
+        <p:spPr>
+          <a:xfrm>
+            <a:off x="6644338" y="3080485"/>
+            <a:ext cx="5242862" cy="962173"/>
+          </a:xfrm>
+          <a:prstGeom prst="rect">
+            <a:avLst/>
+          </a:prstGeom>
+        </p:spPr>
+      </p:pic>
+      <p:pic>
+        <p:nvPicPr>
+          <p:cNvPr id="10" name="Picture 9">
+            <a:extLst>
+              <a:ext uri="{FF2B5EF4-FFF2-40B4-BE49-F238E27FC236}">
+                <a16:creationId xmlns:a16="http://schemas.microsoft.com/office/drawing/2014/main" id="{DB990E59-4093-DAA4-FDC4-99F75672D733}"/>
+              </a:ext>
+            </a:extLst>
+          </p:cNvPr>
+          <p:cNvPicPr>
+            <a:picLocks noChangeAspect="1"/>
+          </p:cNvPicPr>
+          <p:nvPr/>
+        </p:nvPicPr>
+        <p:blipFill>
+          <a:blip r:embed="rId4"/>
+          <a:stretch>
+            <a:fillRect/>
+          </a:stretch>
+        </p:blipFill>
+        <p:spPr>
+          <a:xfrm>
+            <a:off x="6695811" y="4211635"/>
+            <a:ext cx="4304867" cy="2467758"/>
+          </a:xfrm>
+          <a:prstGeom prst="rect">
+            <a:avLst/>
+          </a:prstGeom>
+        </p:spPr>
+      </p:pic>
     </p:spTree>
     <p:extLst>
       <p:ext uri="{BB962C8B-B14F-4D97-AF65-F5344CB8AC3E}">
-        <p14:creationId xmlns:p14="http://schemas.microsoft.com/office/powerpoint/2010/main" val="2744818841"/>
+        <p14:creationId xmlns:p14="http://schemas.microsoft.com/office/powerpoint/2010/main" val="590149844"/>
       </p:ext>
     </p:extLst>
   </p:cSld>
